--- a/ppt/NemiIshwarlalVikani_X24303046_ev-charging-network.pptx
+++ b/ppt/NemiIshwarlalVikani_X24303046_ev-charging-network.pptx
@@ -1150,20 +1150,20 @@
         </p:nvSpPr>
         <p:spPr>
           <a:xfrm>
-            <a:off x="640080" y="914400"/>
-            <a:ext cx="10972800" cy="1280160"/>
-          </a:xfrm>
-          <a:prstGeom prst="rect">
-            <a:avLst/>
-          </a:prstGeom>
-          <a:noFill/>
-          <a:ln/>
-        </p:spPr>
-        <p:txBody>
-          <a:bodyPr wrap="square" rtlCol="0" anchor="t"/>
-          <a:lstStyle/>
-          <a:p>
-            <a:pPr algn="l" indent="0" marL="0">
+            <a:off x="548640" y="1051560"/>
+            <a:ext cx="11064240" cy="1188720"/>
+          </a:xfrm>
+          <a:prstGeom prst="rect">
+            <a:avLst/>
+          </a:prstGeom>
+          <a:noFill/>
+          <a:ln/>
+        </p:spPr>
+        <p:txBody>
+          <a:bodyPr wrap="square" rtlCol="0" anchor="ctr"/>
+          <a:lstStyle/>
+          <a:p>
+            <a:pPr algn="ctr" indent="0" marL="0">
               <a:buNone/>
             </a:pPr>
             <a:r>
@@ -1189,8 +1189,8 @@
         </p:nvSpPr>
         <p:spPr>
           <a:xfrm>
-            <a:off x="658368" y="2148840"/>
-            <a:ext cx="10972800" cy="365760"/>
+            <a:off x="548640" y="2286000"/>
+            <a:ext cx="11064240" cy="365760"/>
           </a:xfrm>
           <a:prstGeom prst="rect">
             <a:avLst/>
@@ -1202,7 +1202,7 @@
           <a:bodyPr wrap="square" rtlCol="0" anchor="ctr"/>
           <a:lstStyle/>
           <a:p>
-            <a:pPr indent="0" marL="0">
+            <a:pPr algn="ctr" indent="0" marL="0">
               <a:buNone/>
             </a:pPr>
             <a:r>
@@ -1228,8 +1228,8 @@
         </p:nvSpPr>
         <p:spPr>
           <a:xfrm>
-            <a:off x="658368" y="2697480"/>
-            <a:ext cx="10424160" cy="1371600"/>
+            <a:off x="1463040" y="2926080"/>
+            <a:ext cx="9235440" cy="1371600"/>
           </a:xfrm>
           <a:prstGeom prst="rect">
             <a:avLst/>
@@ -1241,7 +1241,7 @@
           <a:bodyPr wrap="square" rtlCol="0" anchor="ctr"/>
           <a:lstStyle/>
           <a:p>
-            <a:pPr indent="0" marL="0">
+            <a:pPr algn="ctr" indent="0" marL="0">
               <a:lnSpc>
                 <a:spcPct val="110000"/>
               </a:lnSpc>
@@ -1270,7 +1270,7 @@
         </p:nvSpPr>
         <p:spPr>
           <a:xfrm>
-            <a:off x="658368" y="4206240"/>
+            <a:off x="1889608" y="4526280"/>
             <a:ext cx="2651760" cy="566928"/>
           </a:xfrm>
           <a:prstGeom prst="roundRect">
@@ -1297,7 +1297,7 @@
         </p:nvSpPr>
         <p:spPr>
           <a:xfrm>
-            <a:off x="658368" y="4206240"/>
+            <a:off x="1889608" y="4526280"/>
             <a:ext cx="2651760" cy="566928"/>
           </a:xfrm>
           <a:prstGeom prst="rect">
@@ -1314,7 +1314,7 @@
               <a:buNone/>
             </a:pPr>
             <a:r>
-              <a:rPr lang="en-US" sz="1400" b="1" dirty="0">
+              <a:rPr lang="en-US" sz="1350" b="1" dirty="0">
                 <a:solidFill>
                   <a:srgbClr val="E3A83C"/>
                 </a:solidFill>
@@ -1324,7 +1324,7 @@
               </a:rPr>
               <a:t>Current &gt; 32 A</a:t>
             </a:r>
-            <a:endParaRPr lang="en-US" sz="1400" dirty="0"/>
+            <a:endParaRPr lang="en-US" sz="1350" dirty="0"/>
           </a:p>
         </p:txBody>
       </p:sp>
@@ -1336,7 +1336,7 @@
         </p:nvSpPr>
         <p:spPr>
           <a:xfrm>
-            <a:off x="3538728" y="4206240"/>
+            <a:off x="4769968" y="4526280"/>
             <a:ext cx="2651760" cy="566928"/>
           </a:xfrm>
           <a:prstGeom prst="roundRect">
@@ -1363,7 +1363,7 @@
         </p:nvSpPr>
         <p:spPr>
           <a:xfrm>
-            <a:off x="3538728" y="4206240"/>
+            <a:off x="4769968" y="4526280"/>
             <a:ext cx="2651760" cy="566928"/>
           </a:xfrm>
           <a:prstGeom prst="rect">
@@ -1380,7 +1380,7 @@
               <a:buNone/>
             </a:pPr>
             <a:r>
-              <a:rPr lang="en-US" sz="1400" b="1" dirty="0">
+              <a:rPr lang="en-US" sz="1350" b="1" dirty="0">
                 <a:solidFill>
                   <a:srgbClr val="E3A83C"/>
                 </a:solidFill>
@@ -1390,7 +1390,7 @@
               </a:rPr>
               <a:t>Station &gt; 45 °C</a:t>
             </a:r>
-            <a:endParaRPr lang="en-US" sz="1400" dirty="0"/>
+            <a:endParaRPr lang="en-US" sz="1350" dirty="0"/>
           </a:p>
         </p:txBody>
       </p:sp>
@@ -1402,7 +1402,7 @@
         </p:nvSpPr>
         <p:spPr>
           <a:xfrm>
-            <a:off x="6419088" y="4206240"/>
+            <a:off x="7650328" y="4526280"/>
             <a:ext cx="2651760" cy="566928"/>
           </a:xfrm>
           <a:prstGeom prst="roundRect">
@@ -1429,7 +1429,7 @@
         </p:nvSpPr>
         <p:spPr>
           <a:xfrm>
-            <a:off x="6419088" y="4206240"/>
+            <a:off x="7650328" y="4526280"/>
             <a:ext cx="2651760" cy="566928"/>
           </a:xfrm>
           <a:prstGeom prst="rect">
@@ -1446,7 +1446,7 @@
               <a:buNone/>
             </a:pPr>
             <a:r>
-              <a:rPr lang="en-US" sz="1400" b="1" dirty="0">
+              <a:rPr lang="en-US" sz="1350" b="1" dirty="0">
                 <a:solidFill>
                   <a:srgbClr val="E3A83C"/>
                 </a:solidFill>
@@ -1456,7 +1456,7 @@
               </a:rPr>
               <a:t>Grid draw &gt; 80 kW</a:t>
             </a:r>
-            <a:endParaRPr lang="en-US" sz="1400" dirty="0"/>
+            <a:endParaRPr lang="en-US" sz="1350" dirty="0"/>
           </a:p>
         </p:txBody>
       </p:sp>
@@ -1468,8 +1468,8 @@
         </p:nvSpPr>
         <p:spPr>
           <a:xfrm>
-            <a:off x="658368" y="6126480"/>
-            <a:ext cx="10972800" cy="365760"/>
+            <a:off x="548640" y="6126480"/>
+            <a:ext cx="11064240" cy="365760"/>
           </a:xfrm>
           <a:prstGeom prst="rect">
             <a:avLst/>
@@ -1481,7 +1481,7 @@
           <a:bodyPr wrap="square" rtlCol="0" anchor="ctr"/>
           <a:lstStyle/>
           <a:p>
-            <a:pPr indent="0" marL="0">
+            <a:pPr algn="ctr" indent="0" marL="0">
               <a:buNone/>
             </a:pPr>
             <a:r>
@@ -1578,12 +1578,12 @@
         </p:nvSpPr>
         <p:spPr>
           <a:xfrm>
-            <a:off x="640080" y="2468880"/>
-            <a:ext cx="1572768" cy="1371600"/>
+            <a:off x="640080" y="1874520"/>
+            <a:ext cx="2286000" cy="1280160"/>
           </a:xfrm>
           <a:prstGeom prst="roundRect">
             <a:avLst>
-              <a:gd name="adj" fmla="val 6667"/>
+              <a:gd name="adj" fmla="val 7143"/>
             </a:avLst>
           </a:prstGeom>
           <a:solidFill>
@@ -1605,8 +1605,8 @@
         </p:nvSpPr>
         <p:spPr>
           <a:xfrm>
-            <a:off x="1325880" y="2670048"/>
-            <a:ext cx="201168" cy="201168"/>
+            <a:off x="1691640" y="2039112"/>
+            <a:ext cx="182880" cy="182880"/>
           </a:xfrm>
           <a:prstGeom prst="ellipse">
             <a:avLst/>
@@ -1625,8 +1625,8 @@
         </p:nvSpPr>
         <p:spPr>
           <a:xfrm>
-            <a:off x="594360" y="2926080"/>
-            <a:ext cx="1664208" cy="411480"/>
+            <a:off x="612648" y="2258568"/>
+            <a:ext cx="2340864" cy="365760"/>
           </a:xfrm>
           <a:prstGeom prst="rect">
             <a:avLst/>
@@ -1664,8 +1664,8 @@
         </p:nvSpPr>
         <p:spPr>
           <a:xfrm>
-            <a:off x="621792" y="3310128"/>
-            <a:ext cx="1609344" cy="457200"/>
+            <a:off x="640080" y="2606040"/>
+            <a:ext cx="2286000" cy="411480"/>
           </a:xfrm>
           <a:prstGeom prst="rect">
             <a:avLst/>
@@ -1703,8 +1703,8 @@
         </p:nvSpPr>
         <p:spPr>
           <a:xfrm>
-            <a:off x="2231136" y="3154680"/>
-            <a:ext cx="258409" cy="0"/>
+            <a:off x="2944368" y="2514600"/>
+            <a:ext cx="1975104" cy="0"/>
           </a:xfrm>
           <a:prstGeom prst="line">
             <a:avLst/>
@@ -1715,6 +1715,7 @@
               <a:srgbClr val="4FB077"/>
             </a:solidFill>
             <a:prstDash val="solid"/>
+            <a:headEnd type="none"/>
             <a:tailEnd type="triangle"/>
           </a:ln>
         </p:spPr>
@@ -1727,12 +1728,12 @@
         </p:nvSpPr>
         <p:spPr>
           <a:xfrm>
-            <a:off x="2507833" y="2468880"/>
-            <a:ext cx="1572768" cy="1371600"/>
+            <a:off x="4937760" y="1874520"/>
+            <a:ext cx="2286000" cy="1280160"/>
           </a:xfrm>
           <a:prstGeom prst="roundRect">
             <a:avLst>
-              <a:gd name="adj" fmla="val 6667"/>
+              <a:gd name="adj" fmla="val 7143"/>
             </a:avLst>
           </a:prstGeom>
           <a:solidFill>
@@ -1754,8 +1755,8 @@
         </p:nvSpPr>
         <p:spPr>
           <a:xfrm>
-            <a:off x="3193633" y="2670048"/>
-            <a:ext cx="201168" cy="201168"/>
+            <a:off x="5989320" y="2039112"/>
+            <a:ext cx="182880" cy="182880"/>
           </a:xfrm>
           <a:prstGeom prst="ellipse">
             <a:avLst/>
@@ -1774,8 +1775,8 @@
         </p:nvSpPr>
         <p:spPr>
           <a:xfrm>
-            <a:off x="2462113" y="2926080"/>
-            <a:ext cx="1664208" cy="411480"/>
+            <a:off x="4910328" y="2258568"/>
+            <a:ext cx="2340864" cy="365760"/>
           </a:xfrm>
           <a:prstGeom prst="rect">
             <a:avLst/>
@@ -1813,8 +1814,8 @@
         </p:nvSpPr>
         <p:spPr>
           <a:xfrm>
-            <a:off x="2489545" y="3310128"/>
-            <a:ext cx="1609344" cy="457200"/>
+            <a:off x="4937760" y="2606040"/>
+            <a:ext cx="2286000" cy="411480"/>
           </a:xfrm>
           <a:prstGeom prst="rect">
             <a:avLst/>
@@ -1852,8 +1853,8 @@
         </p:nvSpPr>
         <p:spPr>
           <a:xfrm>
-            <a:off x="4098889" y="3154680"/>
-            <a:ext cx="258409" cy="0"/>
+            <a:off x="7242048" y="2514600"/>
+            <a:ext cx="1975104" cy="0"/>
           </a:xfrm>
           <a:prstGeom prst="line">
             <a:avLst/>
@@ -1864,6 +1865,7 @@
               <a:srgbClr val="4FB077"/>
             </a:solidFill>
             <a:prstDash val="solid"/>
+            <a:headEnd type="none"/>
             <a:tailEnd type="triangle"/>
           </a:ln>
         </p:spPr>
@@ -1876,12 +1878,12 @@
         </p:nvSpPr>
         <p:spPr>
           <a:xfrm>
-            <a:off x="4375587" y="2468880"/>
-            <a:ext cx="1572768" cy="1371600"/>
+            <a:off x="9235440" y="1874520"/>
+            <a:ext cx="2286000" cy="1280160"/>
           </a:xfrm>
           <a:prstGeom prst="roundRect">
             <a:avLst>
-              <a:gd name="adj" fmla="val 6667"/>
+              <a:gd name="adj" fmla="val 7143"/>
             </a:avLst>
           </a:prstGeom>
           <a:solidFill>
@@ -1903,8 +1905,8 @@
         </p:nvSpPr>
         <p:spPr>
           <a:xfrm>
-            <a:off x="5061387" y="2670048"/>
-            <a:ext cx="201168" cy="201168"/>
+            <a:off x="10287000" y="2039112"/>
+            <a:ext cx="182880" cy="182880"/>
           </a:xfrm>
           <a:prstGeom prst="ellipse">
             <a:avLst/>
@@ -1923,8 +1925,8 @@
         </p:nvSpPr>
         <p:spPr>
           <a:xfrm>
-            <a:off x="4329867" y="2926080"/>
-            <a:ext cx="1664208" cy="411480"/>
+            <a:off x="9208008" y="2258568"/>
+            <a:ext cx="2340864" cy="365760"/>
           </a:xfrm>
           <a:prstGeom prst="rect">
             <a:avLst/>
@@ -1962,8 +1964,8 @@
         </p:nvSpPr>
         <p:spPr>
           <a:xfrm>
-            <a:off x="4357299" y="3310128"/>
-            <a:ext cx="1609344" cy="457200"/>
+            <a:off x="9235440" y="2606040"/>
+            <a:ext cx="2286000" cy="411480"/>
           </a:xfrm>
           <a:prstGeom prst="rect">
             <a:avLst/>
@@ -2001,36 +2003,12 @@
         </p:nvSpPr>
         <p:spPr>
           <a:xfrm>
-            <a:off x="5966643" y="3154680"/>
-            <a:ext cx="258409" cy="0"/>
-          </a:xfrm>
-          <a:prstGeom prst="line">
-            <a:avLst/>
-          </a:prstGeom>
-          <a:noFill/>
-          <a:ln w="25400">
-            <a:solidFill>
-              <a:srgbClr val="4FB077"/>
-            </a:solidFill>
-            <a:prstDash val="solid"/>
-            <a:tailEnd type="triangle"/>
-          </a:ln>
-        </p:spPr>
-      </p:sp>
-      <p:sp>
-        <p:nvSpPr>
-          <p:cNvPr id="18" name="Shape 16"/>
-          <p:cNvSpPr/>
-          <p:nvPr/>
-        </p:nvSpPr>
-        <p:spPr>
-          <a:xfrm>
-            <a:off x="6243340" y="2468880"/>
-            <a:ext cx="1572768" cy="1371600"/>
+            <a:off x="9235440" y="3520440"/>
+            <a:ext cx="2286000" cy="1280160"/>
           </a:xfrm>
           <a:prstGeom prst="roundRect">
             <a:avLst>
-              <a:gd name="adj" fmla="val 6667"/>
+              <a:gd name="adj" fmla="val 7143"/>
             </a:avLst>
           </a:prstGeom>
           <a:solidFill>
@@ -2046,14 +2024,14 @@
       </p:sp>
       <p:sp>
         <p:nvSpPr>
-          <p:cNvPr id="19" name="Shape 17"/>
-          <p:cNvSpPr/>
-          <p:nvPr/>
-        </p:nvSpPr>
-        <p:spPr>
-          <a:xfrm>
-            <a:off x="6929140" y="2670048"/>
-            <a:ext cx="201168" cy="201168"/>
+          <p:cNvPr id="18" name="Shape 16"/>
+          <p:cNvSpPr/>
+          <p:nvPr/>
+        </p:nvSpPr>
+        <p:spPr>
+          <a:xfrm>
+            <a:off x="10287000" y="3685032"/>
+            <a:ext cx="182880" cy="182880"/>
           </a:xfrm>
           <a:prstGeom prst="ellipse">
             <a:avLst/>
@@ -2066,14 +2044,14 @@
       </p:sp>
       <p:sp>
         <p:nvSpPr>
-          <p:cNvPr id="20" name="Text 18"/>
-          <p:cNvSpPr/>
-          <p:nvPr/>
-        </p:nvSpPr>
-        <p:spPr>
-          <a:xfrm>
-            <a:off x="6197620" y="2926080"/>
-            <a:ext cx="1664208" cy="411480"/>
+          <p:cNvPr id="19" name="Text 17"/>
+          <p:cNvSpPr/>
+          <p:nvPr/>
+        </p:nvSpPr>
+        <p:spPr>
+          <a:xfrm>
+            <a:off x="9208008" y="3904488"/>
+            <a:ext cx="2340864" cy="365760"/>
           </a:xfrm>
           <a:prstGeom prst="rect">
             <a:avLst/>
@@ -2105,14 +2083,14 @@
       </p:sp>
       <p:sp>
         <p:nvSpPr>
-          <p:cNvPr id="21" name="Text 19"/>
-          <p:cNvSpPr/>
-          <p:nvPr/>
-        </p:nvSpPr>
-        <p:spPr>
-          <a:xfrm>
-            <a:off x="6225052" y="3310128"/>
-            <a:ext cx="1609344" cy="457200"/>
+          <p:cNvPr id="20" name="Text 18"/>
+          <p:cNvSpPr/>
+          <p:nvPr/>
+        </p:nvSpPr>
+        <p:spPr>
+          <a:xfrm>
+            <a:off x="9235440" y="4251960"/>
+            <a:ext cx="2286000" cy="411480"/>
           </a:xfrm>
           <a:prstGeom prst="rect">
             <a:avLst/>
@@ -2144,14 +2122,14 @@
       </p:sp>
       <p:sp>
         <p:nvSpPr>
-          <p:cNvPr id="22" name="Shape 20"/>
-          <p:cNvSpPr/>
-          <p:nvPr/>
-        </p:nvSpPr>
-        <p:spPr>
-          <a:xfrm>
-            <a:off x="7834396" y="3154680"/>
-            <a:ext cx="258409" cy="0"/>
+          <p:cNvPr id="21" name="Shape 19"/>
+          <p:cNvSpPr/>
+          <p:nvPr/>
+        </p:nvSpPr>
+        <p:spPr>
+          <a:xfrm>
+            <a:off x="7242048" y="4160520"/>
+            <a:ext cx="1975104" cy="0"/>
           </a:xfrm>
           <a:prstGeom prst="line">
             <a:avLst/>
@@ -2162,24 +2140,25 @@
               <a:srgbClr val="4FB077"/>
             </a:solidFill>
             <a:prstDash val="solid"/>
-            <a:tailEnd type="triangle"/>
+            <a:headEnd type="triangle"/>
+            <a:tailEnd type="oval"/>
           </a:ln>
         </p:spPr>
       </p:sp>
       <p:sp>
         <p:nvSpPr>
-          <p:cNvPr id="23" name="Shape 21"/>
-          <p:cNvSpPr/>
-          <p:nvPr/>
-        </p:nvSpPr>
-        <p:spPr>
-          <a:xfrm>
-            <a:off x="8111094" y="2468880"/>
-            <a:ext cx="1572768" cy="1371600"/>
+          <p:cNvPr id="22" name="Shape 20"/>
+          <p:cNvSpPr/>
+          <p:nvPr/>
+        </p:nvSpPr>
+        <p:spPr>
+          <a:xfrm>
+            <a:off x="4937760" y="3520440"/>
+            <a:ext cx="2286000" cy="1280160"/>
           </a:xfrm>
           <a:prstGeom prst="roundRect">
             <a:avLst>
-              <a:gd name="adj" fmla="val 6667"/>
+              <a:gd name="adj" fmla="val 7143"/>
             </a:avLst>
           </a:prstGeom>
           <a:solidFill>
@@ -2195,14 +2174,14 @@
       </p:sp>
       <p:sp>
         <p:nvSpPr>
-          <p:cNvPr id="24" name="Shape 22"/>
-          <p:cNvSpPr/>
-          <p:nvPr/>
-        </p:nvSpPr>
-        <p:spPr>
-          <a:xfrm>
-            <a:off x="8796894" y="2670048"/>
-            <a:ext cx="201168" cy="201168"/>
+          <p:cNvPr id="23" name="Shape 21"/>
+          <p:cNvSpPr/>
+          <p:nvPr/>
+        </p:nvSpPr>
+        <p:spPr>
+          <a:xfrm>
+            <a:off x="5989320" y="3685032"/>
+            <a:ext cx="182880" cy="182880"/>
           </a:xfrm>
           <a:prstGeom prst="ellipse">
             <a:avLst/>
@@ -2215,14 +2194,14 @@
       </p:sp>
       <p:sp>
         <p:nvSpPr>
-          <p:cNvPr id="25" name="Text 23"/>
-          <p:cNvSpPr/>
-          <p:nvPr/>
-        </p:nvSpPr>
-        <p:spPr>
-          <a:xfrm>
-            <a:off x="8065374" y="2926080"/>
-            <a:ext cx="1664208" cy="411480"/>
+          <p:cNvPr id="24" name="Text 22"/>
+          <p:cNvSpPr/>
+          <p:nvPr/>
+        </p:nvSpPr>
+        <p:spPr>
+          <a:xfrm>
+            <a:off x="4910328" y="3904488"/>
+            <a:ext cx="2340864" cy="365760"/>
           </a:xfrm>
           <a:prstGeom prst="rect">
             <a:avLst/>
@@ -2254,14 +2233,14 @@
       </p:sp>
       <p:sp>
         <p:nvSpPr>
-          <p:cNvPr id="26" name="Text 24"/>
-          <p:cNvSpPr/>
-          <p:nvPr/>
-        </p:nvSpPr>
-        <p:spPr>
-          <a:xfrm>
-            <a:off x="8092806" y="3310128"/>
-            <a:ext cx="1609344" cy="457200"/>
+          <p:cNvPr id="25" name="Text 23"/>
+          <p:cNvSpPr/>
+          <p:nvPr/>
+        </p:nvSpPr>
+        <p:spPr>
+          <a:xfrm>
+            <a:off x="4937760" y="4251960"/>
+            <a:ext cx="2286000" cy="411480"/>
           </a:xfrm>
           <a:prstGeom prst="rect">
             <a:avLst/>
@@ -2293,14 +2272,14 @@
       </p:sp>
       <p:sp>
         <p:nvSpPr>
-          <p:cNvPr id="27" name="Shape 25"/>
-          <p:cNvSpPr/>
-          <p:nvPr/>
-        </p:nvSpPr>
-        <p:spPr>
-          <a:xfrm>
-            <a:off x="9702150" y="3154680"/>
-            <a:ext cx="258409" cy="0"/>
+          <p:cNvPr id="26" name="Shape 24"/>
+          <p:cNvSpPr/>
+          <p:nvPr/>
+        </p:nvSpPr>
+        <p:spPr>
+          <a:xfrm>
+            <a:off x="2944368" y="4160520"/>
+            <a:ext cx="1975104" cy="0"/>
           </a:xfrm>
           <a:prstGeom prst="line">
             <a:avLst/>
@@ -2311,24 +2290,25 @@
               <a:srgbClr val="4FB077"/>
             </a:solidFill>
             <a:prstDash val="solid"/>
-            <a:tailEnd type="triangle"/>
+            <a:headEnd type="triangle"/>
+            <a:tailEnd type="oval"/>
           </a:ln>
         </p:spPr>
       </p:sp>
       <p:sp>
         <p:nvSpPr>
-          <p:cNvPr id="28" name="Shape 26"/>
-          <p:cNvSpPr/>
-          <p:nvPr/>
-        </p:nvSpPr>
-        <p:spPr>
-          <a:xfrm>
-            <a:off x="9978847" y="2468880"/>
-            <a:ext cx="1572768" cy="1371600"/>
+          <p:cNvPr id="27" name="Shape 25"/>
+          <p:cNvSpPr/>
+          <p:nvPr/>
+        </p:nvSpPr>
+        <p:spPr>
+          <a:xfrm>
+            <a:off x="640080" y="3520440"/>
+            <a:ext cx="2286000" cy="1280160"/>
           </a:xfrm>
           <a:prstGeom prst="roundRect">
             <a:avLst>
-              <a:gd name="adj" fmla="val 6667"/>
+              <a:gd name="adj" fmla="val 7143"/>
             </a:avLst>
           </a:prstGeom>
           <a:solidFill>
@@ -2344,14 +2324,14 @@
       </p:sp>
       <p:sp>
         <p:nvSpPr>
-          <p:cNvPr id="29" name="Shape 27"/>
-          <p:cNvSpPr/>
-          <p:nvPr/>
-        </p:nvSpPr>
-        <p:spPr>
-          <a:xfrm>
-            <a:off x="10664647" y="2670048"/>
-            <a:ext cx="201168" cy="201168"/>
+          <p:cNvPr id="28" name="Shape 26"/>
+          <p:cNvSpPr/>
+          <p:nvPr/>
+        </p:nvSpPr>
+        <p:spPr>
+          <a:xfrm>
+            <a:off x="1691640" y="3685032"/>
+            <a:ext cx="182880" cy="182880"/>
           </a:xfrm>
           <a:prstGeom prst="ellipse">
             <a:avLst/>
@@ -2364,14 +2344,14 @@
       </p:sp>
       <p:sp>
         <p:nvSpPr>
-          <p:cNvPr id="30" name="Text 28"/>
-          <p:cNvSpPr/>
-          <p:nvPr/>
-        </p:nvSpPr>
-        <p:spPr>
-          <a:xfrm>
-            <a:off x="9933127" y="2926080"/>
-            <a:ext cx="1664208" cy="411480"/>
+          <p:cNvPr id="29" name="Text 27"/>
+          <p:cNvSpPr/>
+          <p:nvPr/>
+        </p:nvSpPr>
+        <p:spPr>
+          <a:xfrm>
+            <a:off x="612648" y="3904488"/>
+            <a:ext cx="2340864" cy="365760"/>
           </a:xfrm>
           <a:prstGeom prst="rect">
             <a:avLst/>
@@ -2403,14 +2383,14 @@
       </p:sp>
       <p:sp>
         <p:nvSpPr>
-          <p:cNvPr id="31" name="Text 29"/>
-          <p:cNvSpPr/>
-          <p:nvPr/>
-        </p:nvSpPr>
-        <p:spPr>
-          <a:xfrm>
-            <a:off x="9960559" y="3310128"/>
-            <a:ext cx="1609344" cy="457200"/>
+          <p:cNvPr id="30" name="Text 28"/>
+          <p:cNvSpPr/>
+          <p:nvPr/>
+        </p:nvSpPr>
+        <p:spPr>
+          <a:xfrm>
+            <a:off x="640080" y="4251960"/>
+            <a:ext cx="2286000" cy="411480"/>
           </a:xfrm>
           <a:prstGeom prst="rect">
             <a:avLst/>
@@ -2442,92 +2422,38 @@
       </p:sp>
       <p:sp>
         <p:nvSpPr>
+          <p:cNvPr id="31" name="Shape 29"/>
+          <p:cNvSpPr/>
+          <p:nvPr/>
+        </p:nvSpPr>
+        <p:spPr>
+          <a:xfrm>
+            <a:off x="10378440" y="3154680"/>
+            <a:ext cx="0" cy="365760"/>
+          </a:xfrm>
+          <a:prstGeom prst="line">
+            <a:avLst/>
+          </a:prstGeom>
+          <a:noFill/>
+          <a:ln w="25400">
+            <a:solidFill>
+              <a:srgbClr val="4FB077"/>
+            </a:solidFill>
+            <a:prstDash val="solid"/>
+            <a:tailEnd type="triangle"/>
+          </a:ln>
+        </p:spPr>
+      </p:sp>
+      <p:sp>
+        <p:nvSpPr>
           <p:cNvPr id="32" name="Text 30"/>
           <p:cNvSpPr/>
           <p:nvPr/>
         </p:nvSpPr>
         <p:spPr>
           <a:xfrm>
-            <a:off x="640080" y="3977640"/>
-            <a:ext cx="3440521" cy="274320"/>
-          </a:xfrm>
-          <a:prstGeom prst="rect">
-            <a:avLst/>
-          </a:prstGeom>
-          <a:noFill/>
-          <a:ln/>
-        </p:spPr>
-        <p:txBody>
-          <a:bodyPr wrap="square" rtlCol="0" anchor="ctr"/>
-          <a:lstStyle/>
-          <a:p>
-            <a:pPr algn="ctr" indent="0" marL="0">
-              <a:buNone/>
-            </a:pPr>
-            <a:r>
-              <a:rPr lang="en-US" sz="1100" b="1" spc="200" kern="0" dirty="0">
-                <a:solidFill>
-                  <a:srgbClr val="4FB077"/>
-                </a:solidFill>
-                <a:latin typeface="Calibri" pitchFamily="34" charset="0"/>
-                <a:ea typeface="Calibri" pitchFamily="34" charset="-122"/>
-                <a:cs typeface="Calibri" pitchFamily="34" charset="-120"/>
-              </a:rPr>
-              <a:t>EDGE</a:t>
-            </a:r>
-            <a:endParaRPr lang="en-US" sz="1100" dirty="0"/>
-          </a:p>
-        </p:txBody>
-      </p:sp>
-      <p:sp>
-        <p:nvSpPr>
-          <p:cNvPr id="33" name="Text 31"/>
-          <p:cNvSpPr/>
-          <p:nvPr/>
-        </p:nvSpPr>
-        <p:spPr>
-          <a:xfrm>
-            <a:off x="4375587" y="3977640"/>
-            <a:ext cx="7176028" cy="274320"/>
-          </a:xfrm>
-          <a:prstGeom prst="rect">
-            <a:avLst/>
-          </a:prstGeom>
-          <a:noFill/>
-          <a:ln/>
-        </p:spPr>
-        <p:txBody>
-          <a:bodyPr wrap="square" rtlCol="0" anchor="ctr"/>
-          <a:lstStyle/>
-          <a:p>
-            <a:pPr algn="ctr" indent="0" marL="0">
-              <a:buNone/>
-            </a:pPr>
-            <a:r>
-              <a:rPr lang="en-US" sz="1100" b="1" spc="200" kern="0" dirty="0">
-                <a:solidFill>
-                  <a:srgbClr val="12703C"/>
-                </a:solidFill>
-                <a:latin typeface="Calibri" pitchFamily="34" charset="0"/>
-                <a:ea typeface="Calibri" pitchFamily="34" charset="-122"/>
-                <a:cs typeface="Calibri" pitchFamily="34" charset="-120"/>
-              </a:rPr>
-              <a:t>CLOUD</a:t>
-            </a:r>
-            <a:endParaRPr lang="en-US" sz="1100" dirty="0"/>
-          </a:p>
-        </p:txBody>
-      </p:sp>
-      <p:sp>
-        <p:nvSpPr>
-          <p:cNvPr id="34" name="Text 32"/>
-          <p:cNvSpPr/>
-          <p:nvPr/>
-        </p:nvSpPr>
-        <p:spPr>
-          <a:xfrm>
-            <a:off x="640080" y="5212080"/>
-            <a:ext cx="10972800" cy="640080"/>
+            <a:off x="640080" y="5257800"/>
+            <a:ext cx="10972800" cy="731520"/>
           </a:xfrm>
           <a:prstGeom prst="rect">
             <a:avLst/>
@@ -2675,8 +2601,35 @@
         </p:nvSpPr>
         <p:spPr>
           <a:xfrm>
-            <a:off x="731520" y="1965960"/>
-            <a:ext cx="685800" cy="685800"/>
+            <a:off x="640080" y="1874520"/>
+            <a:ext cx="3502152" cy="3657600"/>
+          </a:xfrm>
+          <a:prstGeom prst="roundRect">
+            <a:avLst>
+              <a:gd name="adj" fmla="val 2611"/>
+            </a:avLst>
+          </a:prstGeom>
+          <a:solidFill>
+            <a:srgbClr val="EDF6F0"/>
+          </a:solidFill>
+          <a:ln w="15240">
+            <a:solidFill>
+              <a:srgbClr val="1E9450"/>
+            </a:solidFill>
+            <a:prstDash val="solid"/>
+          </a:ln>
+        </p:spPr>
+      </p:sp>
+      <p:sp>
+        <p:nvSpPr>
+          <p:cNvPr id="5" name="Shape 3"/>
+          <p:cNvSpPr/>
+          <p:nvPr/>
+        </p:nvSpPr>
+        <p:spPr>
+          <a:xfrm>
+            <a:off x="914400" y="2194560"/>
+            <a:ext cx="640080" cy="640080"/>
           </a:xfrm>
           <a:prstGeom prst="ellipse">
             <a:avLst/>
@@ -2689,14 +2642,14 @@
       </p:sp>
       <p:sp>
         <p:nvSpPr>
-          <p:cNvPr id="5" name="Text 3"/>
-          <p:cNvSpPr/>
-          <p:nvPr/>
-        </p:nvSpPr>
-        <p:spPr>
-          <a:xfrm>
-            <a:off x="731520" y="1965960"/>
-            <a:ext cx="685800" cy="685800"/>
+          <p:cNvPr id="6" name="Text 4"/>
+          <p:cNvSpPr/>
+          <p:nvPr/>
+        </p:nvSpPr>
+        <p:spPr>
+          <a:xfrm>
+            <a:off x="914400" y="2194560"/>
+            <a:ext cx="640080" cy="640080"/>
           </a:xfrm>
           <a:prstGeom prst="rect">
             <a:avLst/>
@@ -2712,7 +2665,7 @@
               <a:buNone/>
             </a:pPr>
             <a:r>
-              <a:rPr lang="en-US" sz="2600" b="1" dirty="0">
+              <a:rPr lang="en-US" sz="2400" b="1" dirty="0">
                 <a:solidFill>
                   <a:srgbClr val="FFFFFF"/>
                 </a:solidFill>
@@ -2722,20 +2675,20 @@
               </a:rPr>
               <a:t>1</a:t>
             </a:r>
-            <a:endParaRPr lang="en-US" sz="2600" dirty="0"/>
-          </a:p>
-        </p:txBody>
-      </p:sp>
-      <p:sp>
-        <p:nvSpPr>
-          <p:cNvPr id="6" name="Text 4"/>
-          <p:cNvSpPr/>
-          <p:nvPr/>
-        </p:nvSpPr>
-        <p:spPr>
-          <a:xfrm>
-            <a:off x="1691640" y="1920240"/>
-            <a:ext cx="9875520" cy="411480"/>
+            <a:endParaRPr lang="en-US" sz="2400" dirty="0"/>
+          </a:p>
+        </p:txBody>
+      </p:sp>
+      <p:sp>
+        <p:nvSpPr>
+          <p:cNvPr id="7" name="Text 5"/>
+          <p:cNvSpPr/>
+          <p:nvPr/>
+        </p:nvSpPr>
+        <p:spPr>
+          <a:xfrm>
+            <a:off x="914400" y="3017520"/>
+            <a:ext cx="2953512" cy="822960"/>
           </a:xfrm>
           <a:prstGeom prst="rect">
             <a:avLst/>
@@ -2751,7 +2704,7 @@
               <a:buNone/>
             </a:pPr>
             <a:r>
-              <a:rPr lang="en-US" sz="1800" b="1" dirty="0">
+              <a:rPr lang="en-US" sz="1700" b="1" dirty="0">
                 <a:solidFill>
                   <a:srgbClr val="10281E"/>
                 </a:solidFill>
@@ -2759,22 +2712,22 @@
                 <a:ea typeface="Calibri" pitchFamily="34" charset="-122"/>
                 <a:cs typeface="Calibri" pitchFamily="34" charset="-120"/>
               </a:rPr>
-              <a:t>Pipeline health, all green</a:t>
-            </a:r>
-            <a:endParaRPr lang="en-US" sz="1800" dirty="0"/>
-          </a:p>
-        </p:txBody>
-      </p:sp>
-      <p:sp>
-        <p:nvSpPr>
-          <p:cNvPr id="7" name="Text 5"/>
-          <p:cNvSpPr/>
-          <p:nvPr/>
-        </p:nvSpPr>
-        <p:spPr>
-          <a:xfrm>
-            <a:off x="1691640" y="2340864"/>
-            <a:ext cx="9875520" cy="640080"/>
+              <a:t>Two hubs, five charging metrics</a:t>
+            </a:r>
+            <a:endParaRPr lang="en-US" sz="1700" dirty="0"/>
+          </a:p>
+        </p:txBody>
+      </p:sp>
+      <p:sp>
+        <p:nvSpPr>
+          <p:cNvPr id="8" name="Text 6"/>
+          <p:cNvSpPr/>
+          <p:nvPr/>
+        </p:nvSpPr>
+        <p:spPr>
+          <a:xfrm>
+            <a:off x="914400" y="3794760"/>
+            <a:ext cx="2953512" cy="1554480"/>
           </a:xfrm>
           <a:prstGeom prst="rect">
             <a:avLst/>
@@ -2787,10 +2740,13 @@
           <a:lstStyle/>
           <a:p>
             <a:pPr indent="0" marL="0">
+              <a:lnSpc>
+                <a:spcPct val="105000"/>
+              </a:lnSpc>
               <a:buNone/>
             </a:pPr>
             <a:r>
-              <a:rPr lang="en-US" sz="1350" dirty="0">
+              <a:rPr lang="en-US" sz="1300" dirty="0">
                 <a:solidFill>
                   <a:srgbClr val="557064"/>
                 </a:solidFill>
@@ -2798,22 +2754,49 @@
                 <a:ea typeface="Calibri" pitchFamily="34" charset="-122"/>
                 <a:cs typeface="Calibri" pitchFamily="34" charset="-120"/>
               </a:rPr>
-              <a:t>Four of four checks green on the live account, freshest reading a few seconds old.</a:t>
-            </a:r>
-            <a:endParaRPr lang="en-US" sz="1350" dirty="0"/>
-          </a:p>
-        </p:txBody>
-      </p:sp>
-      <p:sp>
-        <p:nvSpPr>
-          <p:cNvPr id="8" name="Shape 6"/>
-          <p:cNvSpPr/>
-          <p:nvPr/>
-        </p:nvSpPr>
-        <p:spPr>
-          <a:xfrm>
-            <a:off x="731520" y="3383280"/>
-            <a:ext cx="685800" cy="685800"/>
+              <a:t>Current, battery charge, temperature, grid load and session time live for both hubs, freshest reading a few seconds old.</a:t>
+            </a:r>
+            <a:endParaRPr lang="en-US" sz="1300" dirty="0"/>
+          </a:p>
+        </p:txBody>
+      </p:sp>
+      <p:sp>
+        <p:nvSpPr>
+          <p:cNvPr id="9" name="Shape 7"/>
+          <p:cNvSpPr/>
+          <p:nvPr/>
+        </p:nvSpPr>
+        <p:spPr>
+          <a:xfrm>
+            <a:off x="4416552" y="1874520"/>
+            <a:ext cx="3502152" cy="3657600"/>
+          </a:xfrm>
+          <a:prstGeom prst="roundRect">
+            <a:avLst>
+              <a:gd name="adj" fmla="val 2611"/>
+            </a:avLst>
+          </a:prstGeom>
+          <a:solidFill>
+            <a:srgbClr val="EDF6F0"/>
+          </a:solidFill>
+          <a:ln w="15240">
+            <a:solidFill>
+              <a:srgbClr val="1E9450"/>
+            </a:solidFill>
+            <a:prstDash val="solid"/>
+          </a:ln>
+        </p:spPr>
+      </p:sp>
+      <p:sp>
+        <p:nvSpPr>
+          <p:cNvPr id="10" name="Shape 8"/>
+          <p:cNvSpPr/>
+          <p:nvPr/>
+        </p:nvSpPr>
+        <p:spPr>
+          <a:xfrm>
+            <a:off x="4690872" y="2194560"/>
+            <a:ext cx="640080" cy="640080"/>
           </a:xfrm>
           <a:prstGeom prst="ellipse">
             <a:avLst/>
@@ -2826,14 +2809,14 @@
       </p:sp>
       <p:sp>
         <p:nvSpPr>
-          <p:cNvPr id="9" name="Text 7"/>
-          <p:cNvSpPr/>
-          <p:nvPr/>
-        </p:nvSpPr>
-        <p:spPr>
-          <a:xfrm>
-            <a:off x="731520" y="3383280"/>
-            <a:ext cx="685800" cy="685800"/>
+          <p:cNvPr id="11" name="Text 9"/>
+          <p:cNvSpPr/>
+          <p:nvPr/>
+        </p:nvSpPr>
+        <p:spPr>
+          <a:xfrm>
+            <a:off x="4690872" y="2194560"/>
+            <a:ext cx="640080" cy="640080"/>
           </a:xfrm>
           <a:prstGeom prst="rect">
             <a:avLst/>
@@ -2849,7 +2832,7 @@
               <a:buNone/>
             </a:pPr>
             <a:r>
-              <a:rPr lang="en-US" sz="2600" b="1" dirty="0">
+              <a:rPr lang="en-US" sz="2400" b="1" dirty="0">
                 <a:solidFill>
                   <a:srgbClr val="FFFFFF"/>
                 </a:solidFill>
@@ -2859,20 +2842,20 @@
               </a:rPr>
               <a:t>2</a:t>
             </a:r>
-            <a:endParaRPr lang="en-US" sz="2600" dirty="0"/>
-          </a:p>
-        </p:txBody>
-      </p:sp>
-      <p:sp>
-        <p:nvSpPr>
-          <p:cNvPr id="10" name="Text 8"/>
-          <p:cNvSpPr/>
-          <p:nvPr/>
-        </p:nvSpPr>
-        <p:spPr>
-          <a:xfrm>
-            <a:off x="1691640" y="3337560"/>
-            <a:ext cx="9875520" cy="411480"/>
+            <a:endParaRPr lang="en-US" sz="2400" dirty="0"/>
+          </a:p>
+        </p:txBody>
+      </p:sp>
+      <p:sp>
+        <p:nvSpPr>
+          <p:cNvPr id="12" name="Text 10"/>
+          <p:cNvSpPr/>
+          <p:nvPr/>
+        </p:nvSpPr>
+        <p:spPr>
+          <a:xfrm>
+            <a:off x="4690872" y="3017520"/>
+            <a:ext cx="2953512" cy="822960"/>
           </a:xfrm>
           <a:prstGeom prst="rect">
             <a:avLst/>
@@ -2888,7 +2871,7 @@
               <a:buNone/>
             </a:pPr>
             <a:r>
-              <a:rPr lang="en-US" sz="1800" b="1" dirty="0">
+              <a:rPr lang="en-US" sz="1700" b="1" dirty="0">
                 <a:solidFill>
                   <a:srgbClr val="10281E"/>
                 </a:solidFill>
@@ -2896,22 +2879,22 @@
                 <a:ea typeface="Calibri" pitchFamily="34" charset="-122"/>
                 <a:cs typeface="Calibri" pitchFamily="34" charset="-120"/>
               </a:rPr>
-              <a:t>Live safety alerts</a:t>
-            </a:r>
-            <a:endParaRPr lang="en-US" sz="1800" dirty="0"/>
-          </a:p>
-        </p:txBody>
-      </p:sp>
-      <p:sp>
-        <p:nvSpPr>
-          <p:cNvPr id="11" name="Text 9"/>
-          <p:cNvSpPr/>
-          <p:nvPr/>
-        </p:nvSpPr>
-        <p:spPr>
-          <a:xfrm>
-            <a:off x="1691640" y="3758184"/>
-            <a:ext cx="9875520" cy="640080"/>
+              <a:t>Two safety alerts on hub-1</a:t>
+            </a:r>
+            <a:endParaRPr lang="en-US" sz="1700" dirty="0"/>
+          </a:p>
+        </p:txBody>
+      </p:sp>
+      <p:sp>
+        <p:nvSpPr>
+          <p:cNvPr id="13" name="Text 11"/>
+          <p:cNvSpPr/>
+          <p:nvPr/>
+        </p:nvSpPr>
+        <p:spPr>
+          <a:xfrm>
+            <a:off x="4690872" y="3794760"/>
+            <a:ext cx="2953512" cy="1554480"/>
           </a:xfrm>
           <a:prstGeom prst="rect">
             <a:avLst/>
@@ -2924,10 +2907,13 @@
           <a:lstStyle/>
           <a:p>
             <a:pPr indent="0" marL="0">
+              <a:lnSpc>
+                <a:spcPct val="105000"/>
+              </a:lnSpc>
               <a:buNone/>
             </a:pPr>
             <a:r>
-              <a:rPr lang="en-US" sz="1350" dirty="0">
+              <a:rPr lang="en-US" sz="1300" dirty="0">
                 <a:solidFill>
                   <a:srgbClr val="557064"/>
                 </a:solidFill>
@@ -2935,22 +2921,49 @@
                 <a:ea typeface="Calibri" pitchFamily="34" charset="-122"/>
                 <a:cs typeface="Calibri" pitchFamily="34" charset="-120"/>
               </a:rPr>
-              <a:t>Stored records climbed 26 to 289 across the window, with overheat risk and grid strain both firing live on hub-1.</a:t>
-            </a:r>
-            <a:endParaRPr lang="en-US" sz="1350" dirty="0"/>
-          </a:p>
-        </p:txBody>
-      </p:sp>
-      <p:sp>
-        <p:nvSpPr>
-          <p:cNvPr id="12" name="Shape 10"/>
-          <p:cNvSpPr/>
-          <p:nvPr/>
-        </p:nvSpPr>
-        <p:spPr>
-          <a:xfrm>
-            <a:off x="731520" y="4800600"/>
-            <a:ext cx="685800" cy="685800"/>
+              <a:t>Overheat risk and grid strain are both firing live on hub-1, each raised at the fog node the moment its window crossed.</a:t>
+            </a:r>
+            <a:endParaRPr lang="en-US" sz="1300" dirty="0"/>
+          </a:p>
+        </p:txBody>
+      </p:sp>
+      <p:sp>
+        <p:nvSpPr>
+          <p:cNvPr id="14" name="Shape 12"/>
+          <p:cNvSpPr/>
+          <p:nvPr/>
+        </p:nvSpPr>
+        <p:spPr>
+          <a:xfrm>
+            <a:off x="8193024" y="1874520"/>
+            <a:ext cx="3502152" cy="3657600"/>
+          </a:xfrm>
+          <a:prstGeom prst="roundRect">
+            <a:avLst>
+              <a:gd name="adj" fmla="val 2611"/>
+            </a:avLst>
+          </a:prstGeom>
+          <a:solidFill>
+            <a:srgbClr val="EDF6F0"/>
+          </a:solidFill>
+          <a:ln w="15240">
+            <a:solidFill>
+              <a:srgbClr val="1E9450"/>
+            </a:solidFill>
+            <a:prstDash val="solid"/>
+          </a:ln>
+        </p:spPr>
+      </p:sp>
+      <p:sp>
+        <p:nvSpPr>
+          <p:cNvPr id="15" name="Shape 13"/>
+          <p:cNvSpPr/>
+          <p:nvPr/>
+        </p:nvSpPr>
+        <p:spPr>
+          <a:xfrm>
+            <a:off x="8467344" y="2194560"/>
+            <a:ext cx="640080" cy="640080"/>
           </a:xfrm>
           <a:prstGeom prst="ellipse">
             <a:avLst/>
@@ -2963,14 +2976,14 @@
       </p:sp>
       <p:sp>
         <p:nvSpPr>
-          <p:cNvPr id="13" name="Text 11"/>
-          <p:cNvSpPr/>
-          <p:nvPr/>
-        </p:nvSpPr>
-        <p:spPr>
-          <a:xfrm>
-            <a:off x="731520" y="4800600"/>
-            <a:ext cx="685800" cy="685800"/>
+          <p:cNvPr id="16" name="Text 14"/>
+          <p:cNvSpPr/>
+          <p:nvPr/>
+        </p:nvSpPr>
+        <p:spPr>
+          <a:xfrm>
+            <a:off x="8467344" y="2194560"/>
+            <a:ext cx="640080" cy="640080"/>
           </a:xfrm>
           <a:prstGeom prst="rect">
             <a:avLst/>
@@ -2986,7 +2999,7 @@
               <a:buNone/>
             </a:pPr>
             <a:r>
-              <a:rPr lang="en-US" sz="2600" b="1" dirty="0">
+              <a:rPr lang="en-US" sz="2400" b="1" dirty="0">
                 <a:solidFill>
                   <a:srgbClr val="FFFFFF"/>
                 </a:solidFill>
@@ -2996,20 +3009,20 @@
               </a:rPr>
               <a:t>3</a:t>
             </a:r>
-            <a:endParaRPr lang="en-US" sz="2600" dirty="0"/>
-          </a:p>
-        </p:txBody>
-      </p:sp>
-      <p:sp>
-        <p:nvSpPr>
-          <p:cNvPr id="14" name="Text 12"/>
-          <p:cNvSpPr/>
-          <p:nvPr/>
-        </p:nvSpPr>
-        <p:spPr>
-          <a:xfrm>
-            <a:off x="1691640" y="4754880"/>
-            <a:ext cx="9875520" cy="411480"/>
+            <a:endParaRPr lang="en-US" sz="2400" dirty="0"/>
+          </a:p>
+        </p:txBody>
+      </p:sp>
+      <p:sp>
+        <p:nvSpPr>
+          <p:cNvPr id="17" name="Text 15"/>
+          <p:cNvSpPr/>
+          <p:nvPr/>
+        </p:nvSpPr>
+        <p:spPr>
+          <a:xfrm>
+            <a:off x="8467344" y="3017520"/>
+            <a:ext cx="2953512" cy="822960"/>
           </a:xfrm>
           <a:prstGeom prst="rect">
             <a:avLst/>
@@ -3025,7 +3038,7 @@
               <a:buNone/>
             </a:pPr>
             <a:r>
-              <a:rPr lang="en-US" sz="1800" b="1" dirty="0">
+              <a:rPr lang="en-US" sz="1700" b="1" dirty="0">
                 <a:solidFill>
                   <a:srgbClr val="10281E"/>
                 </a:solidFill>
@@ -3033,22 +3046,22 @@
                 <a:ea typeface="Calibri" pitchFamily="34" charset="-122"/>
                 <a:cs typeface="Calibri" pitchFamily="34" charset="-120"/>
               </a:rPr>
-              <a:t>Tested end to end</a:t>
-            </a:r>
-            <a:endParaRPr lang="en-US" sz="1800" dirty="0"/>
-          </a:p>
-        </p:txBody>
-      </p:sp>
-      <p:sp>
-        <p:nvSpPr>
-          <p:cNvPr id="15" name="Text 13"/>
-          <p:cNvSpPr/>
-          <p:nvPr/>
-        </p:nvSpPr>
-        <p:spPr>
-          <a:xfrm>
-            <a:off x="1691640" y="5175504"/>
-            <a:ext cx="9875520" cy="640080"/>
+              <a:t>Real data, climbing</a:t>
+            </a:r>
+            <a:endParaRPr lang="en-US" sz="1700" dirty="0"/>
+          </a:p>
+        </p:txBody>
+      </p:sp>
+      <p:sp>
+        <p:nvSpPr>
+          <p:cNvPr id="18" name="Text 16"/>
+          <p:cNvSpPr/>
+          <p:nvPr/>
+        </p:nvSpPr>
+        <p:spPr>
+          <a:xfrm>
+            <a:off x="8467344" y="3794760"/>
+            <a:ext cx="2953512" cy="1554480"/>
           </a:xfrm>
           <a:prstGeom prst="rect">
             <a:avLst/>
@@ -3061,10 +3074,13 @@
           <a:lstStyle/>
           <a:p>
             <a:pPr indent="0" marL="0">
+              <a:lnSpc>
+                <a:spcPct val="105000"/>
+              </a:lnSpc>
               <a:buNone/>
             </a:pPr>
             <a:r>
-              <a:rPr lang="en-US" sz="1350" dirty="0">
+              <a:rPr lang="en-US" sz="1300" dirty="0">
                 <a:solidFill>
                   <a:srgbClr val="557064"/>
                 </a:solidFill>
@@ -3072,15 +3088,15 @@
                 <a:ea typeface="Calibri" pitchFamily="34" charset="-122"/>
                 <a:cs typeface="Calibri" pitchFamily="34" charset="-120"/>
               </a:rPr>
-              <a:t>121 automated tests pass across the sensor, fog, processor and dashboard modules.</a:t>
-            </a:r>
-            <a:endParaRPr lang="en-US" sz="1350" dirty="0"/>
-          </a:p>
-        </p:txBody>
-      </p:sp>
-      <p:sp>
-        <p:nvSpPr>
-          <p:cNvPr id="16" name="Text 14"/>
+              <a:t>The stored-record count runs from 26 to 289 across the verification window, confirming genuinely live data.</a:t>
+            </a:r>
+            <a:endParaRPr lang="en-US" sz="1300" dirty="0"/>
+          </a:p>
+        </p:txBody>
+      </p:sp>
+      <p:sp>
+        <p:nvSpPr>
+          <p:cNvPr id="19" name="Text 17"/>
           <p:cNvSpPr/>
           <p:nvPr/>
         </p:nvSpPr>
@@ -3157,24 +3173,24 @@
         </p:nvSpPr>
         <p:spPr>
           <a:xfrm>
-            <a:off x="640080" y="640080"/>
-            <a:ext cx="10972800" cy="640080"/>
-          </a:xfrm>
-          <a:prstGeom prst="rect">
-            <a:avLst/>
-          </a:prstGeom>
-          <a:noFill/>
-          <a:ln/>
-        </p:spPr>
-        <p:txBody>
-          <a:bodyPr wrap="square" rtlCol="0" anchor="ctr"/>
+            <a:off x="640080" y="594360"/>
+            <a:ext cx="10972800" cy="822960"/>
+          </a:xfrm>
+          <a:prstGeom prst="rect">
+            <a:avLst/>
+          </a:prstGeom>
+          <a:noFill/>
+          <a:ln/>
+        </p:spPr>
+        <p:txBody>
+          <a:bodyPr wrap="square" rtlCol="0" anchor="t"/>
           <a:lstStyle/>
           <a:p>
             <a:pPr indent="0" marL="0">
               <a:buNone/>
             </a:pPr>
             <a:r>
-              <a:rPr lang="en-US" sz="3000" b="1" dirty="0">
+              <a:rPr lang="en-US" sz="2800" b="1" dirty="0">
                 <a:solidFill>
                   <a:srgbClr val="FFFFFF"/>
                 </a:solidFill>
@@ -3184,7 +3200,7 @@
               </a:rPr>
               <a:t>Hardest Part — one Flask app, two front doors</a:t>
             </a:r>
-            <a:endParaRPr lang="en-US" sz="3000" dirty="0"/>
+            <a:endParaRPr lang="en-US" sz="2800" dirty="0"/>
           </a:p>
         </p:txBody>
       </p:sp>
@@ -3196,12 +3212,12 @@
         </p:nvSpPr>
         <p:spPr>
           <a:xfrm>
-            <a:off x="731520" y="1920240"/>
-            <a:ext cx="10698480" cy="1965960"/>
+            <a:off x="731520" y="1874520"/>
+            <a:ext cx="5212080" cy="4160520"/>
           </a:xfrm>
           <a:prstGeom prst="roundRect">
             <a:avLst>
-              <a:gd name="adj" fmla="val 4651"/>
+              <a:gd name="adj" fmla="val 2198"/>
             </a:avLst>
           </a:prstGeom>
           <a:solidFill>
@@ -3223,7 +3239,7 @@
         </p:nvSpPr>
         <p:spPr>
           <a:xfrm>
-            <a:off x="1005840" y="2103120"/>
+            <a:off x="1051560" y="2103120"/>
             <a:ext cx="3657600" cy="457200"/>
           </a:xfrm>
           <a:prstGeom prst="rect">
@@ -3262,8 +3278,8 @@
         </p:nvSpPr>
         <p:spPr>
           <a:xfrm>
-            <a:off x="1005840" y="2578608"/>
-            <a:ext cx="9966960" cy="1188720"/>
+            <a:off x="1051560" y="2651760"/>
+            <a:ext cx="4572000" cy="3200400"/>
           </a:xfrm>
           <a:prstGeom prst="rect">
             <a:avLst/>
@@ -3277,12 +3293,12 @@
           <a:p>
             <a:pPr indent="0" marL="0">
               <a:lnSpc>
-                <a:spcPct val="105000"/>
+                <a:spcPct val="110000"/>
               </a:lnSpc>
               <a:buNone/>
             </a:pPr>
             <a:r>
-              <a:rPr lang="en-US" sz="1300" dirty="0">
+              <a:rPr lang="en-US" sz="1350" dirty="0">
                 <a:solidFill>
                   <a:srgbClr val="CDE9D8"/>
                 </a:solidFill>
@@ -3292,7 +3308,7 @@
               </a:rPr>
               <a:t>The dashboard is a Flask application, but API Gateway invokes a Lambda with a proxy event, not an HTTP request — so the same code had to answer in both worlds. Re-declaring every route for Lambda would drift from the local server over time, and a third-party adapter would add a dependency to maintain.</a:t>
             </a:r>
-            <a:endParaRPr lang="en-US" sz="1300" dirty="0"/>
+            <a:endParaRPr lang="en-US" sz="1350" dirty="0"/>
           </a:p>
         </p:txBody>
       </p:sp>
@@ -3304,12 +3320,12 @@
         </p:nvSpPr>
         <p:spPr>
           <a:xfrm>
-            <a:off x="731520" y="4041648"/>
-            <a:ext cx="10698480" cy="1965960"/>
+            <a:off x="6263640" y="1874520"/>
+            <a:ext cx="5212080" cy="4160520"/>
           </a:xfrm>
           <a:prstGeom prst="roundRect">
             <a:avLst>
-              <a:gd name="adj" fmla="val 4651"/>
+              <a:gd name="adj" fmla="val 2198"/>
             </a:avLst>
           </a:prstGeom>
           <a:solidFill>
@@ -3331,7 +3347,7 @@
         </p:nvSpPr>
         <p:spPr>
           <a:xfrm>
-            <a:off x="1005840" y="4224528"/>
+            <a:off x="6583680" y="2103120"/>
             <a:ext cx="3657600" cy="457200"/>
           </a:xfrm>
           <a:prstGeom prst="rect">
@@ -3370,8 +3386,8 @@
         </p:nvSpPr>
         <p:spPr>
           <a:xfrm>
-            <a:off x="1005840" y="4700016"/>
-            <a:ext cx="9966960" cy="1188720"/>
+            <a:off x="6583680" y="2651760"/>
+            <a:ext cx="4572000" cy="3200400"/>
           </a:xfrm>
           <a:prstGeom prst="rect">
             <a:avLst/>
@@ -3385,12 +3401,12 @@
           <a:p>
             <a:pPr indent="0" marL="0">
               <a:lnSpc>
-                <a:spcPct val="105000"/>
+                <a:spcPct val="110000"/>
               </a:lnSpc>
               <a:buNone/>
             </a:pPr>
             <a:r>
-              <a:rPr lang="en-US" sz="1300" dirty="0">
+              <a:rPr lang="en-US" sz="1350" dirty="0">
                 <a:solidFill>
                   <a:srgbClr val="CDE9D8"/>
                 </a:solidFill>
@@ -3400,7 +3416,7 @@
               </a:rPr>
               <a:t>A small hand-rolled bridge turns the API Gateway proxy event into a standard Python web-server environment and invokes the existing Flask app unchanged, with a cross-origin header on every response. A pre-deployment audit also confirmed the recurring pitfalls — paginated counting, batched publishing and credential handling — were already correct.</a:t>
             </a:r>
-            <a:endParaRPr lang="en-US" sz="1300" dirty="0"/>
+            <a:endParaRPr lang="en-US" sz="1350" dirty="0"/>
           </a:p>
         </p:txBody>
       </p:sp>

--- a/ppt/NemiIshwarlalVikani_X24303046_ev-charging-network.pptx
+++ b/ppt/NemiIshwarlalVikani_X24303046_ev-charging-network.pptx
@@ -3147,7 +3147,7 @@
     <p:bg>
       <p:bgPr>
         <a:solidFill>
-          <a:srgbClr val="10281F"/>
+          <a:srgbClr val="FFFFFF"/>
         </a:solidFill>
       </p:bgPr>
     </p:bg>
@@ -3173,7 +3173,7 @@
         </p:nvSpPr>
         <p:spPr>
           <a:xfrm>
-            <a:off x="640080" y="594360"/>
+            <a:off x="640080" y="502920"/>
             <a:ext cx="10972800" cy="822960"/>
           </a:xfrm>
           <a:prstGeom prst="rect">
@@ -3192,7 +3192,7 @@
             <a:r>
               <a:rPr lang="en-US" sz="2800" b="1" dirty="0">
                 <a:solidFill>
-                  <a:srgbClr val="FFFFFF"/>
+                  <a:srgbClr val="10281E"/>
                 </a:solidFill>
                 <a:latin typeface="Times New Roman" pitchFamily="34" charset="0"/>
                 <a:ea typeface="Times New Roman" pitchFamily="34" charset="-122"/>
@@ -3212,8 +3212,8 @@
         </p:nvSpPr>
         <p:spPr>
           <a:xfrm>
-            <a:off x="731520" y="1874520"/>
-            <a:ext cx="5212080" cy="4160520"/>
+            <a:off x="640080" y="1874520"/>
+            <a:ext cx="4937760" cy="4160520"/>
           </a:xfrm>
           <a:prstGeom prst="roundRect">
             <a:avLst>
@@ -3221,9 +3221,9 @@
             </a:avLst>
           </a:prstGeom>
           <a:solidFill>
-            <a:srgbClr val="17402B"/>
-          </a:solidFill>
-          <a:ln w="15875">
+            <a:srgbClr val="EDF6F0"/>
+          </a:solidFill>
+          <a:ln w="19050">
             <a:solidFill>
               <a:srgbClr val="E3A83C"/>
             </a:solidFill>
@@ -3239,7 +3239,7 @@
         </p:nvSpPr>
         <p:spPr>
           <a:xfrm>
-            <a:off x="1051560" y="2103120"/>
+            <a:off x="960120" y="2103120"/>
             <a:ext cx="3657600" cy="457200"/>
           </a:xfrm>
           <a:prstGeom prst="rect">
@@ -3278,8 +3278,8 @@
         </p:nvSpPr>
         <p:spPr>
           <a:xfrm>
-            <a:off x="1051560" y="2651760"/>
-            <a:ext cx="4572000" cy="3200400"/>
+            <a:off x="960120" y="2651760"/>
+            <a:ext cx="4343400" cy="3200400"/>
           </a:xfrm>
           <a:prstGeom prst="rect">
             <a:avLst/>
@@ -3293,14 +3293,14 @@
           <a:p>
             <a:pPr indent="0" marL="0">
               <a:lnSpc>
-                <a:spcPct val="110000"/>
+                <a:spcPct val="112000"/>
               </a:lnSpc>
               <a:buNone/>
             </a:pPr>
             <a:r>
               <a:rPr lang="en-US" sz="1350" dirty="0">
                 <a:solidFill>
-                  <a:srgbClr val="CDE9D8"/>
+                  <a:srgbClr val="10281E"/>
                 </a:solidFill>
                 <a:latin typeface="Calibri" pitchFamily="34" charset="0"/>
                 <a:ea typeface="Calibri" pitchFamily="34" charset="-122"/>
@@ -3320,8 +3320,8 @@
         </p:nvSpPr>
         <p:spPr>
           <a:xfrm>
-            <a:off x="6263640" y="1874520"/>
-            <a:ext cx="5212080" cy="4160520"/>
+            <a:off x="6611112" y="1874520"/>
+            <a:ext cx="4937760" cy="4160520"/>
           </a:xfrm>
           <a:prstGeom prst="roundRect">
             <a:avLst>
@@ -3329,11 +3329,11 @@
             </a:avLst>
           </a:prstGeom>
           <a:solidFill>
-            <a:srgbClr val="17402B"/>
-          </a:solidFill>
-          <a:ln w="15875">
+            <a:srgbClr val="EDF6F0"/>
+          </a:solidFill>
+          <a:ln w="19050">
             <a:solidFill>
-              <a:srgbClr val="4FB077"/>
+              <a:srgbClr val="1E9450"/>
             </a:solidFill>
             <a:prstDash val="solid"/>
           </a:ln>
@@ -3347,7 +3347,7 @@
         </p:nvSpPr>
         <p:spPr>
           <a:xfrm>
-            <a:off x="6583680" y="2103120"/>
+            <a:off x="6931152" y="2103120"/>
             <a:ext cx="3657600" cy="457200"/>
           </a:xfrm>
           <a:prstGeom prst="rect">
@@ -3366,7 +3366,7 @@
             <a:r>
               <a:rPr lang="en-US" sz="1900" b="1" dirty="0">
                 <a:solidFill>
-                  <a:srgbClr val="4FB077"/>
+                  <a:srgbClr val="1E9450"/>
                 </a:solidFill>
                 <a:latin typeface="Times New Roman" pitchFamily="34" charset="0"/>
                 <a:ea typeface="Times New Roman" pitchFamily="34" charset="-122"/>
@@ -3386,8 +3386,8 @@
         </p:nvSpPr>
         <p:spPr>
           <a:xfrm>
-            <a:off x="6583680" y="2651760"/>
-            <a:ext cx="4572000" cy="3200400"/>
+            <a:off x="6931152" y="2651760"/>
+            <a:ext cx="4343400" cy="3200400"/>
           </a:xfrm>
           <a:prstGeom prst="rect">
             <a:avLst/>
@@ -3401,14 +3401,14 @@
           <a:p>
             <a:pPr indent="0" marL="0">
               <a:lnSpc>
-                <a:spcPct val="110000"/>
+                <a:spcPct val="112000"/>
               </a:lnSpc>
               <a:buNone/>
             </a:pPr>
             <a:r>
               <a:rPr lang="en-US" sz="1350" dirty="0">
                 <a:solidFill>
-                  <a:srgbClr val="CDE9D8"/>
+                  <a:srgbClr val="10281E"/>
                 </a:solidFill>
                 <a:latin typeface="Calibri" pitchFamily="34" charset="0"/>
                 <a:ea typeface="Calibri" pitchFamily="34" charset="-122"/>
@@ -3419,6 +3419,26 @@
             <a:endParaRPr lang="en-US" sz="1350" dirty="0"/>
           </a:p>
         </p:txBody>
+      </p:sp>
+      <p:sp>
+        <p:nvSpPr>
+          <p:cNvPr id="9" name="Shape 7"/>
+          <p:cNvSpPr/>
+          <p:nvPr/>
+        </p:nvSpPr>
+        <p:spPr>
+          <a:xfrm>
+            <a:off x="5669280" y="3703320"/>
+            <a:ext cx="841248" cy="512064"/>
+          </a:xfrm>
+          <a:prstGeom prst="rightArrow">
+            <a:avLst/>
+          </a:prstGeom>
+          <a:solidFill>
+            <a:srgbClr val="12703C"/>
+          </a:solidFill>
+          <a:ln/>
+        </p:spPr>
       </p:sp>
     </p:spTree>
   </p:cSld>

--- a/ppt/NemiIshwarlalVikani_X24303046_ev-charging-network.pptx
+++ b/ppt/NemiIshwarlalVikani_X24303046_ev-charging-network.pptx
@@ -1144,30 +1144,50 @@
       </p:grpSpPr>
       <p:sp>
         <p:nvSpPr>
-          <p:cNvPr id="2" name="Text 0"/>
-          <p:cNvSpPr/>
-          <p:nvPr/>
-        </p:nvSpPr>
-        <p:spPr>
-          <a:xfrm>
-            <a:off x="548640" y="1051560"/>
-            <a:ext cx="11064240" cy="1188720"/>
-          </a:xfrm>
-          <a:prstGeom prst="rect">
-            <a:avLst/>
-          </a:prstGeom>
-          <a:noFill/>
-          <a:ln/>
-        </p:spPr>
-        <p:txBody>
-          <a:bodyPr wrap="square" rtlCol="0" anchor="ctr"/>
-          <a:lstStyle/>
-          <a:p>
-            <a:pPr algn="ctr" indent="0" marL="0">
-              <a:buNone/>
-            </a:pPr>
-            <a:r>
-              <a:rPr lang="en-US" sz="4000" b="1" dirty="0">
+          <p:cNvPr id="2" name="Shape 0"/>
+          <p:cNvSpPr/>
+          <p:nvPr/>
+        </p:nvSpPr>
+        <p:spPr>
+          <a:xfrm>
+            <a:off x="7528255" y="0"/>
+            <a:ext cx="4663440" cy="6858000"/>
+          </a:xfrm>
+          <a:prstGeom prst="rect">
+            <a:avLst/>
+          </a:prstGeom>
+          <a:solidFill>
+            <a:srgbClr val="12703C"/>
+          </a:solidFill>
+          <a:ln/>
+        </p:spPr>
+      </p:sp>
+      <p:sp>
+        <p:nvSpPr>
+          <p:cNvPr id="3" name="Text 1"/>
+          <p:cNvSpPr/>
+          <p:nvPr/>
+        </p:nvSpPr>
+        <p:spPr>
+          <a:xfrm>
+            <a:off x="7939735" y="1280160"/>
+            <a:ext cx="3749040" cy="2377440"/>
+          </a:xfrm>
+          <a:prstGeom prst="rect">
+            <a:avLst/>
+          </a:prstGeom>
+          <a:noFill/>
+          <a:ln/>
+        </p:spPr>
+        <p:txBody>
+          <a:bodyPr wrap="square" rtlCol="0" anchor="t"/>
+          <a:lstStyle/>
+          <a:p>
+            <a:pPr indent="0" marL="0">
+              <a:buNone/>
+            </a:pPr>
+            <a:r>
+              <a:rPr lang="en-US" sz="3400" b="1" dirty="0">
                 <a:solidFill>
                   <a:srgbClr val="FFFFFF"/>
                 </a:solidFill>
@@ -1177,20 +1197,20 @@
               </a:rPr>
               <a:t>EV Charging Network Monitoring</a:t>
             </a:r>
-            <a:endParaRPr lang="en-US" sz="4000" dirty="0"/>
-          </a:p>
-        </p:txBody>
-      </p:sp>
-      <p:sp>
-        <p:nvSpPr>
-          <p:cNvPr id="3" name="Text 1"/>
-          <p:cNvSpPr/>
-          <p:nvPr/>
-        </p:nvSpPr>
-        <p:spPr>
-          <a:xfrm>
-            <a:off x="548640" y="2286000"/>
-            <a:ext cx="11064240" cy="365760"/>
+            <a:endParaRPr lang="en-US" sz="3400" dirty="0"/>
+          </a:p>
+        </p:txBody>
+      </p:sp>
+      <p:sp>
+        <p:nvSpPr>
+          <p:cNvPr id="4" name="Text 2"/>
+          <p:cNvSpPr/>
+          <p:nvPr/>
+        </p:nvSpPr>
+        <p:spPr>
+          <a:xfrm>
+            <a:off x="7958023" y="5394960"/>
+            <a:ext cx="3840480" cy="731520"/>
           </a:xfrm>
           <a:prstGeom prst="rect">
             <a:avLst/>
@@ -1202,13 +1222,13 @@
           <a:bodyPr wrap="square" rtlCol="0" anchor="ctr"/>
           <a:lstStyle/>
           <a:p>
-            <a:pPr algn="ctr" indent="0" marL="0">
-              <a:buNone/>
-            </a:pPr>
-            <a:r>
-              <a:rPr lang="en-US" sz="1600" dirty="0">
-                <a:solidFill>
-                  <a:srgbClr val="4FB077"/>
+            <a:pPr indent="0" marL="0">
+              <a:buNone/>
+            </a:pPr>
+            <a:r>
+              <a:rPr lang="en-US" sz="1500" dirty="0">
+                <a:solidFill>
+                  <a:srgbClr val="CDE9D8"/>
                 </a:solidFill>
                 <a:latin typeface="Calibri" pitchFamily="34" charset="0"/>
                 <a:ea typeface="Calibri" pitchFamily="34" charset="-122"/>
@@ -1216,20 +1236,20 @@
               </a:rPr>
               <a:t>Nemi Ishwarlal Vikani   ·   X24303046</a:t>
             </a:r>
-            <a:endParaRPr lang="en-US" sz="1600" dirty="0"/>
-          </a:p>
-        </p:txBody>
-      </p:sp>
-      <p:sp>
-        <p:nvSpPr>
-          <p:cNvPr id="4" name="Text 2"/>
-          <p:cNvSpPr/>
-          <p:nvPr/>
-        </p:nvSpPr>
-        <p:spPr>
-          <a:xfrm>
-            <a:off x="1463040" y="2926080"/>
-            <a:ext cx="9235440" cy="1371600"/>
+            <a:endParaRPr lang="en-US" sz="1500" dirty="0"/>
+          </a:p>
+        </p:txBody>
+      </p:sp>
+      <p:sp>
+        <p:nvSpPr>
+          <p:cNvPr id="5" name="Text 3"/>
+          <p:cNvSpPr/>
+          <p:nvPr/>
+        </p:nvSpPr>
+        <p:spPr>
+          <a:xfrm>
+            <a:off x="548640" y="1371600"/>
+            <a:ext cx="6492240" cy="2011680"/>
           </a:xfrm>
           <a:prstGeom prst="rect">
             <a:avLst/>
@@ -1241,9 +1261,9 @@
           <a:bodyPr wrap="square" rtlCol="0" anchor="ctr"/>
           <a:lstStyle/>
           <a:p>
-            <a:pPr algn="ctr" indent="0" marL="0">
+            <a:pPr indent="0" marL="0">
               <a:lnSpc>
-                <a:spcPct val="110000"/>
+                <a:spcPct val="112000"/>
               </a:lnSpc>
               <a:buNone/>
             </a:pPr>
@@ -1264,14 +1284,14 @@
       </p:sp>
       <p:sp>
         <p:nvSpPr>
-          <p:cNvPr id="5" name="Shape 3"/>
-          <p:cNvSpPr/>
-          <p:nvPr/>
-        </p:nvSpPr>
-        <p:spPr>
-          <a:xfrm>
-            <a:off x="1889608" y="4526280"/>
-            <a:ext cx="2651760" cy="566928"/>
+          <p:cNvPr id="6" name="Shape 4"/>
+          <p:cNvSpPr/>
+          <p:nvPr/>
+        </p:nvSpPr>
+        <p:spPr>
+          <a:xfrm>
+            <a:off x="548640" y="4023360"/>
+            <a:ext cx="2926080" cy="566928"/>
           </a:xfrm>
           <a:prstGeom prst="roundRect">
             <a:avLst>
@@ -1291,14 +1311,14 @@
       </p:sp>
       <p:sp>
         <p:nvSpPr>
-          <p:cNvPr id="6" name="Text 4"/>
-          <p:cNvSpPr/>
-          <p:nvPr/>
-        </p:nvSpPr>
-        <p:spPr>
-          <a:xfrm>
-            <a:off x="1889608" y="4526280"/>
-            <a:ext cx="2651760" cy="566928"/>
+          <p:cNvPr id="7" name="Text 5"/>
+          <p:cNvSpPr/>
+          <p:nvPr/>
+        </p:nvSpPr>
+        <p:spPr>
+          <a:xfrm>
+            <a:off x="548640" y="4023360"/>
+            <a:ext cx="2926080" cy="566928"/>
           </a:xfrm>
           <a:prstGeom prst="rect">
             <a:avLst/>
@@ -1330,14 +1350,14 @@
       </p:sp>
       <p:sp>
         <p:nvSpPr>
-          <p:cNvPr id="7" name="Shape 5"/>
-          <p:cNvSpPr/>
-          <p:nvPr/>
-        </p:nvSpPr>
-        <p:spPr>
-          <a:xfrm>
-            <a:off x="4769968" y="4526280"/>
-            <a:ext cx="2651760" cy="566928"/>
+          <p:cNvPr id="8" name="Shape 6"/>
+          <p:cNvSpPr/>
+          <p:nvPr/>
+        </p:nvSpPr>
+        <p:spPr>
+          <a:xfrm>
+            <a:off x="548640" y="4709160"/>
+            <a:ext cx="2926080" cy="566928"/>
           </a:xfrm>
           <a:prstGeom prst="roundRect">
             <a:avLst>
@@ -1357,14 +1377,14 @@
       </p:sp>
       <p:sp>
         <p:nvSpPr>
-          <p:cNvPr id="8" name="Text 6"/>
-          <p:cNvSpPr/>
-          <p:nvPr/>
-        </p:nvSpPr>
-        <p:spPr>
-          <a:xfrm>
-            <a:off x="4769968" y="4526280"/>
-            <a:ext cx="2651760" cy="566928"/>
+          <p:cNvPr id="9" name="Text 7"/>
+          <p:cNvSpPr/>
+          <p:nvPr/>
+        </p:nvSpPr>
+        <p:spPr>
+          <a:xfrm>
+            <a:off x="548640" y="4709160"/>
+            <a:ext cx="2926080" cy="566928"/>
           </a:xfrm>
           <a:prstGeom prst="rect">
             <a:avLst/>
@@ -1396,14 +1416,14 @@
       </p:sp>
       <p:sp>
         <p:nvSpPr>
-          <p:cNvPr id="9" name="Shape 7"/>
-          <p:cNvSpPr/>
-          <p:nvPr/>
-        </p:nvSpPr>
-        <p:spPr>
-          <a:xfrm>
-            <a:off x="7650328" y="4526280"/>
-            <a:ext cx="2651760" cy="566928"/>
+          <p:cNvPr id="10" name="Shape 8"/>
+          <p:cNvSpPr/>
+          <p:nvPr/>
+        </p:nvSpPr>
+        <p:spPr>
+          <a:xfrm>
+            <a:off x="548640" y="5394960"/>
+            <a:ext cx="2926080" cy="566928"/>
           </a:xfrm>
           <a:prstGeom prst="roundRect">
             <a:avLst>
@@ -1423,14 +1443,14 @@
       </p:sp>
       <p:sp>
         <p:nvSpPr>
-          <p:cNvPr id="10" name="Text 8"/>
-          <p:cNvSpPr/>
-          <p:nvPr/>
-        </p:nvSpPr>
-        <p:spPr>
-          <a:xfrm>
-            <a:off x="7650328" y="4526280"/>
-            <a:ext cx="2651760" cy="566928"/>
+          <p:cNvPr id="11" name="Text 9"/>
+          <p:cNvSpPr/>
+          <p:nvPr/>
+        </p:nvSpPr>
+        <p:spPr>
+          <a:xfrm>
+            <a:off x="548640" y="5394960"/>
+            <a:ext cx="2926080" cy="566928"/>
           </a:xfrm>
           <a:prstGeom prst="rect">
             <a:avLst/>
@@ -1462,14 +1482,14 @@
       </p:sp>
       <p:sp>
         <p:nvSpPr>
-          <p:cNvPr id="11" name="Text 9"/>
-          <p:cNvSpPr/>
-          <p:nvPr/>
-        </p:nvSpPr>
-        <p:spPr>
-          <a:xfrm>
-            <a:off x="548640" y="6126480"/>
-            <a:ext cx="11064240" cy="365760"/>
+          <p:cNvPr id="12" name="Text 10"/>
+          <p:cNvSpPr/>
+          <p:nvPr/>
+        </p:nvSpPr>
+        <p:spPr>
+          <a:xfrm>
+            <a:off x="548640" y="6172200"/>
+            <a:ext cx="6217920" cy="365760"/>
           </a:xfrm>
           <a:prstGeom prst="rect">
             <a:avLst/>
@@ -1481,11 +1501,11 @@
           <a:bodyPr wrap="square" rtlCol="0" anchor="ctr"/>
           <a:lstStyle/>
           <a:p>
-            <a:pPr algn="ctr" indent="0" marL="0">
-              <a:buNone/>
-            </a:pPr>
-            <a:r>
-              <a:rPr lang="en-US" sz="1300" dirty="0">
+            <a:pPr indent="0" marL="0">
+              <a:buNone/>
+            </a:pPr>
+            <a:r>
+              <a:rPr lang="en-US" sz="1250" dirty="0">
                 <a:solidFill>
                   <a:srgbClr val="557064"/>
                 </a:solidFill>
@@ -1495,7 +1515,7 @@
               </a:rPr>
               <a:t>Fog &amp; Edge Computing (H9FECC)   ·   deployed live on AWS</a:t>
             </a:r>
-            <a:endParaRPr lang="en-US" sz="1300" dirty="0"/>
+            <a:endParaRPr lang="en-US" sz="1250" dirty="0"/>
           </a:p>
         </p:txBody>
       </p:sp>
@@ -1578,18 +1598,18 @@
         </p:nvSpPr>
         <p:spPr>
           <a:xfrm>
-            <a:off x="640080" y="1874520"/>
-            <a:ext cx="2286000" cy="1280160"/>
+            <a:off x="3992728" y="1234440"/>
+            <a:ext cx="4206240" cy="658368"/>
           </a:xfrm>
           <a:prstGeom prst="roundRect">
             <a:avLst>
-              <a:gd name="adj" fmla="val 7143"/>
+              <a:gd name="adj" fmla="val 11111"/>
             </a:avLst>
           </a:prstGeom>
           <a:solidFill>
             <a:srgbClr val="EDF6F0"/>
           </a:solidFill>
-          <a:ln w="19050">
+          <a:ln w="17780">
             <a:solidFill>
               <a:srgbClr val="4FB077"/>
             </a:solidFill>
@@ -1605,8 +1625,8 @@
         </p:nvSpPr>
         <p:spPr>
           <a:xfrm>
-            <a:off x="1691640" y="2039112"/>
-            <a:ext cx="182880" cy="182880"/>
+            <a:off x="4193896" y="1481328"/>
+            <a:ext cx="164592" cy="164592"/>
           </a:xfrm>
           <a:prstGeom prst="ellipse">
             <a:avLst/>
@@ -1625,8 +1645,8 @@
         </p:nvSpPr>
         <p:spPr>
           <a:xfrm>
-            <a:off x="612648" y="2258568"/>
-            <a:ext cx="2340864" cy="365760"/>
+            <a:off x="4495648" y="1234440"/>
+            <a:ext cx="2194560" cy="658368"/>
           </a:xfrm>
           <a:prstGeom prst="rect">
             <a:avLst/>
@@ -1638,11 +1658,11 @@
           <a:bodyPr wrap="square" lIns="0" tIns="0" rIns="0" bIns="0" rtlCol="0" anchor="ctr"/>
           <a:lstStyle/>
           <a:p>
-            <a:pPr algn="ctr" indent="0" marL="0">
-              <a:buNone/>
-            </a:pPr>
-            <a:r>
-              <a:rPr lang="en-US" sz="1450" b="1" dirty="0">
+            <a:pPr indent="0" marL="0">
+              <a:buNone/>
+            </a:pPr>
+            <a:r>
+              <a:rPr lang="en-US" sz="1350" b="1" dirty="0">
                 <a:solidFill>
                   <a:srgbClr val="10281E"/>
                 </a:solidFill>
@@ -1652,7 +1672,7 @@
               </a:rPr>
               <a:t>Hub sensors</a:t>
             </a:r>
-            <a:endParaRPr lang="en-US" sz="1450" dirty="0"/>
+            <a:endParaRPr lang="en-US" sz="1350" dirty="0"/>
           </a:p>
         </p:txBody>
       </p:sp>
@@ -1664,24 +1684,24 @@
         </p:nvSpPr>
         <p:spPr>
           <a:xfrm>
-            <a:off x="640080" y="2606040"/>
-            <a:ext cx="2286000" cy="411480"/>
-          </a:xfrm>
-          <a:prstGeom prst="rect">
-            <a:avLst/>
-          </a:prstGeom>
-          <a:noFill/>
-          <a:ln/>
-        </p:spPr>
-        <p:txBody>
-          <a:bodyPr wrap="square" lIns="0" tIns="0" rIns="0" bIns="0" rtlCol="0" anchor="t"/>
-          <a:lstStyle/>
-          <a:p>
-            <a:pPr algn="ctr" indent="0" marL="0">
-              <a:buNone/>
-            </a:pPr>
-            <a:r>
-              <a:rPr lang="en-US" sz="1050" dirty="0">
+            <a:off x="6644488" y="1234440"/>
+            <a:ext cx="1463040" cy="658368"/>
+          </a:xfrm>
+          <a:prstGeom prst="rect">
+            <a:avLst/>
+          </a:prstGeom>
+          <a:noFill/>
+          <a:ln/>
+        </p:spPr>
+        <p:txBody>
+          <a:bodyPr wrap="square" lIns="0" tIns="0" rIns="0" bIns="0" rtlCol="0" anchor="ctr"/>
+          <a:lstStyle/>
+          <a:p>
+            <a:pPr algn="r" indent="0" marL="0">
+              <a:buNone/>
+            </a:pPr>
+            <a:r>
+              <a:rPr lang="en-US" sz="950" dirty="0">
                 <a:solidFill>
                   <a:srgbClr val="557064"/>
                 </a:solidFill>
@@ -1691,7 +1711,7 @@
               </a:rPr>
               <a:t>10 · 2 hubs · 5 metrics</a:t>
             </a:r>
-            <a:endParaRPr lang="en-US" sz="1050" dirty="0"/>
+            <a:endParaRPr lang="en-US" sz="950" dirty="0"/>
           </a:p>
         </p:txBody>
       </p:sp>
@@ -1703,733 +1723,8 @@
         </p:nvSpPr>
         <p:spPr>
           <a:xfrm>
-            <a:off x="2944368" y="2514600"/>
-            <a:ext cx="1975104" cy="0"/>
-          </a:xfrm>
-          <a:prstGeom prst="line">
-            <a:avLst/>
-          </a:prstGeom>
-          <a:noFill/>
-          <a:ln w="25400">
-            <a:solidFill>
-              <a:srgbClr val="4FB077"/>
-            </a:solidFill>
-            <a:prstDash val="solid"/>
-            <a:headEnd type="none"/>
-            <a:tailEnd type="triangle"/>
-          </a:ln>
-        </p:spPr>
-      </p:sp>
-      <p:sp>
-        <p:nvSpPr>
-          <p:cNvPr id="8" name="Shape 6"/>
-          <p:cNvSpPr/>
-          <p:nvPr/>
-        </p:nvSpPr>
-        <p:spPr>
-          <a:xfrm>
-            <a:off x="4937760" y="1874520"/>
-            <a:ext cx="2286000" cy="1280160"/>
-          </a:xfrm>
-          <a:prstGeom prst="roundRect">
-            <a:avLst>
-              <a:gd name="adj" fmla="val 7143"/>
-            </a:avLst>
-          </a:prstGeom>
-          <a:solidFill>
-            <a:srgbClr val="EDF6F0"/>
-          </a:solidFill>
-          <a:ln w="19050">
-            <a:solidFill>
-              <a:srgbClr val="4FB077"/>
-            </a:solidFill>
-            <a:prstDash val="solid"/>
-          </a:ln>
-        </p:spPr>
-      </p:sp>
-      <p:sp>
-        <p:nvSpPr>
-          <p:cNvPr id="9" name="Shape 7"/>
-          <p:cNvSpPr/>
-          <p:nvPr/>
-        </p:nvSpPr>
-        <p:spPr>
-          <a:xfrm>
-            <a:off x="5989320" y="2039112"/>
-            <a:ext cx="182880" cy="182880"/>
-          </a:xfrm>
-          <a:prstGeom prst="ellipse">
-            <a:avLst/>
-          </a:prstGeom>
-          <a:solidFill>
-            <a:srgbClr val="4FB077"/>
-          </a:solidFill>
-          <a:ln/>
-        </p:spPr>
-      </p:sp>
-      <p:sp>
-        <p:nvSpPr>
-          <p:cNvPr id="10" name="Text 8"/>
-          <p:cNvSpPr/>
-          <p:nvPr/>
-        </p:nvSpPr>
-        <p:spPr>
-          <a:xfrm>
-            <a:off x="4910328" y="2258568"/>
-            <a:ext cx="2340864" cy="365760"/>
-          </a:xfrm>
-          <a:prstGeom prst="rect">
-            <a:avLst/>
-          </a:prstGeom>
-          <a:noFill/>
-          <a:ln/>
-        </p:spPr>
-        <p:txBody>
-          <a:bodyPr wrap="square" lIns="0" tIns="0" rIns="0" bIns="0" rtlCol="0" anchor="ctr"/>
-          <a:lstStyle/>
-          <a:p>
-            <a:pPr algn="ctr" indent="0" marL="0">
-              <a:buNone/>
-            </a:pPr>
-            <a:r>
-              <a:rPr lang="en-US" sz="1450" b="1" dirty="0">
-                <a:solidFill>
-                  <a:srgbClr val="10281E"/>
-                </a:solidFill>
-                <a:latin typeface="Calibri" pitchFamily="34" charset="0"/>
-                <a:ea typeface="Calibri" pitchFamily="34" charset="-122"/>
-                <a:cs typeface="Calibri" pitchFamily="34" charset="-120"/>
-              </a:rPr>
-              <a:t>Fog node</a:t>
-            </a:r>
-            <a:endParaRPr lang="en-US" sz="1450" dirty="0"/>
-          </a:p>
-        </p:txBody>
-      </p:sp>
-      <p:sp>
-        <p:nvSpPr>
-          <p:cNvPr id="11" name="Text 9"/>
-          <p:cNvSpPr/>
-          <p:nvPr/>
-        </p:nvSpPr>
-        <p:spPr>
-          <a:xfrm>
-            <a:off x="4937760" y="2606040"/>
-            <a:ext cx="2286000" cy="411480"/>
-          </a:xfrm>
-          <a:prstGeom prst="rect">
-            <a:avLst/>
-          </a:prstGeom>
-          <a:noFill/>
-          <a:ln/>
-        </p:spPr>
-        <p:txBody>
-          <a:bodyPr wrap="square" lIns="0" tIns="0" rIns="0" bIns="0" rtlCol="0" anchor="t"/>
-          <a:lstStyle/>
-          <a:p>
-            <a:pPr algn="ctr" indent="0" marL="0">
-              <a:buNone/>
-            </a:pPr>
-            <a:r>
-              <a:rPr lang="en-US" sz="1050" dirty="0">
-                <a:solidFill>
-                  <a:srgbClr val="557064"/>
-                </a:solidFill>
-                <a:latin typeface="Calibri" pitchFamily="34" charset="0"/>
-                <a:ea typeface="Calibri" pitchFamily="34" charset="-122"/>
-                <a:cs typeface="Calibri" pitchFamily="34" charset="-120"/>
-              </a:rPr>
-              <a:t>windows · 4 rules</a:t>
-            </a:r>
-            <a:endParaRPr lang="en-US" sz="1050" dirty="0"/>
-          </a:p>
-        </p:txBody>
-      </p:sp>
-      <p:sp>
-        <p:nvSpPr>
-          <p:cNvPr id="12" name="Shape 10"/>
-          <p:cNvSpPr/>
-          <p:nvPr/>
-        </p:nvSpPr>
-        <p:spPr>
-          <a:xfrm>
-            <a:off x="7242048" y="2514600"/>
-            <a:ext cx="1975104" cy="0"/>
-          </a:xfrm>
-          <a:prstGeom prst="line">
-            <a:avLst/>
-          </a:prstGeom>
-          <a:noFill/>
-          <a:ln w="25400">
-            <a:solidFill>
-              <a:srgbClr val="4FB077"/>
-            </a:solidFill>
-            <a:prstDash val="solid"/>
-            <a:headEnd type="none"/>
-            <a:tailEnd type="triangle"/>
-          </a:ln>
-        </p:spPr>
-      </p:sp>
-      <p:sp>
-        <p:nvSpPr>
-          <p:cNvPr id="13" name="Shape 11"/>
-          <p:cNvSpPr/>
-          <p:nvPr/>
-        </p:nvSpPr>
-        <p:spPr>
-          <a:xfrm>
-            <a:off x="9235440" y="1874520"/>
-            <a:ext cx="2286000" cy="1280160"/>
-          </a:xfrm>
-          <a:prstGeom prst="roundRect">
-            <a:avLst>
-              <a:gd name="adj" fmla="val 7143"/>
-            </a:avLst>
-          </a:prstGeom>
-          <a:solidFill>
-            <a:srgbClr val="EDF6F0"/>
-          </a:solidFill>
-          <a:ln w="19050">
-            <a:solidFill>
-              <a:srgbClr val="12703C"/>
-            </a:solidFill>
-            <a:prstDash val="solid"/>
-          </a:ln>
-        </p:spPr>
-      </p:sp>
-      <p:sp>
-        <p:nvSpPr>
-          <p:cNvPr id="14" name="Shape 12"/>
-          <p:cNvSpPr/>
-          <p:nvPr/>
-        </p:nvSpPr>
-        <p:spPr>
-          <a:xfrm>
-            <a:off x="10287000" y="2039112"/>
-            <a:ext cx="182880" cy="182880"/>
-          </a:xfrm>
-          <a:prstGeom prst="ellipse">
-            <a:avLst/>
-          </a:prstGeom>
-          <a:solidFill>
-            <a:srgbClr val="12703C"/>
-          </a:solidFill>
-          <a:ln/>
-        </p:spPr>
-      </p:sp>
-      <p:sp>
-        <p:nvSpPr>
-          <p:cNvPr id="15" name="Text 13"/>
-          <p:cNvSpPr/>
-          <p:nvPr/>
-        </p:nvSpPr>
-        <p:spPr>
-          <a:xfrm>
-            <a:off x="9208008" y="2258568"/>
-            <a:ext cx="2340864" cy="365760"/>
-          </a:xfrm>
-          <a:prstGeom prst="rect">
-            <a:avLst/>
-          </a:prstGeom>
-          <a:noFill/>
-          <a:ln/>
-        </p:spPr>
-        <p:txBody>
-          <a:bodyPr wrap="square" lIns="0" tIns="0" rIns="0" bIns="0" rtlCol="0" anchor="ctr"/>
-          <a:lstStyle/>
-          <a:p>
-            <a:pPr algn="ctr" indent="0" marL="0">
-              <a:buNone/>
-            </a:pPr>
-            <a:r>
-              <a:rPr lang="en-US" sz="1450" b="1" dirty="0">
-                <a:solidFill>
-                  <a:srgbClr val="10281E"/>
-                </a:solidFill>
-                <a:latin typeface="Calibri" pitchFamily="34" charset="0"/>
-                <a:ea typeface="Calibri" pitchFamily="34" charset="-122"/>
-                <a:cs typeface="Calibri" pitchFamily="34" charset="-120"/>
-              </a:rPr>
-              <a:t>Amazon SQS</a:t>
-            </a:r>
-            <a:endParaRPr lang="en-US" sz="1450" dirty="0"/>
-          </a:p>
-        </p:txBody>
-      </p:sp>
-      <p:sp>
-        <p:nvSpPr>
-          <p:cNvPr id="16" name="Text 14"/>
-          <p:cNvSpPr/>
-          <p:nvPr/>
-        </p:nvSpPr>
-        <p:spPr>
-          <a:xfrm>
-            <a:off x="9235440" y="2606040"/>
-            <a:ext cx="2286000" cy="411480"/>
-          </a:xfrm>
-          <a:prstGeom prst="rect">
-            <a:avLst/>
-          </a:prstGeom>
-          <a:noFill/>
-          <a:ln/>
-        </p:spPr>
-        <p:txBody>
-          <a:bodyPr wrap="square" lIns="0" tIns="0" rIns="0" bIns="0" rtlCol="0" anchor="t"/>
-          <a:lstStyle/>
-          <a:p>
-            <a:pPr algn="ctr" indent="0" marL="0">
-              <a:buNone/>
-            </a:pPr>
-            <a:r>
-              <a:rPr lang="en-US" sz="1050" dirty="0">
-                <a:solidFill>
-                  <a:srgbClr val="557064"/>
-                </a:solidFill>
-                <a:latin typeface="Calibri" pitchFamily="34" charset="0"/>
-                <a:ea typeface="Calibri" pitchFamily="34" charset="-122"/>
-                <a:cs typeface="Calibri" pitchFamily="34" charset="-120"/>
-              </a:rPr>
-              <a:t>1 aggregate / window</a:t>
-            </a:r>
-            <a:endParaRPr lang="en-US" sz="1050" dirty="0"/>
-          </a:p>
-        </p:txBody>
-      </p:sp>
-      <p:sp>
-        <p:nvSpPr>
-          <p:cNvPr id="17" name="Shape 15"/>
-          <p:cNvSpPr/>
-          <p:nvPr/>
-        </p:nvSpPr>
-        <p:spPr>
-          <a:xfrm>
-            <a:off x="9235440" y="3520440"/>
-            <a:ext cx="2286000" cy="1280160"/>
-          </a:xfrm>
-          <a:prstGeom prst="roundRect">
-            <a:avLst>
-              <a:gd name="adj" fmla="val 7143"/>
-            </a:avLst>
-          </a:prstGeom>
-          <a:solidFill>
-            <a:srgbClr val="EDF6F0"/>
-          </a:solidFill>
-          <a:ln w="19050">
-            <a:solidFill>
-              <a:srgbClr val="12703C"/>
-            </a:solidFill>
-            <a:prstDash val="solid"/>
-          </a:ln>
-        </p:spPr>
-      </p:sp>
-      <p:sp>
-        <p:nvSpPr>
-          <p:cNvPr id="18" name="Shape 16"/>
-          <p:cNvSpPr/>
-          <p:nvPr/>
-        </p:nvSpPr>
-        <p:spPr>
-          <a:xfrm>
-            <a:off x="10287000" y="3685032"/>
-            <a:ext cx="182880" cy="182880"/>
-          </a:xfrm>
-          <a:prstGeom prst="ellipse">
-            <a:avLst/>
-          </a:prstGeom>
-          <a:solidFill>
-            <a:srgbClr val="12703C"/>
-          </a:solidFill>
-          <a:ln/>
-        </p:spPr>
-      </p:sp>
-      <p:sp>
-        <p:nvSpPr>
-          <p:cNvPr id="19" name="Text 17"/>
-          <p:cNvSpPr/>
-          <p:nvPr/>
-        </p:nvSpPr>
-        <p:spPr>
-          <a:xfrm>
-            <a:off x="9208008" y="3904488"/>
-            <a:ext cx="2340864" cy="365760"/>
-          </a:xfrm>
-          <a:prstGeom prst="rect">
-            <a:avLst/>
-          </a:prstGeom>
-          <a:noFill/>
-          <a:ln/>
-        </p:spPr>
-        <p:txBody>
-          <a:bodyPr wrap="square" lIns="0" tIns="0" rIns="0" bIns="0" rtlCol="0" anchor="ctr"/>
-          <a:lstStyle/>
-          <a:p>
-            <a:pPr algn="ctr" indent="0" marL="0">
-              <a:buNone/>
-            </a:pPr>
-            <a:r>
-              <a:rPr lang="en-US" sz="1450" b="1" dirty="0">
-                <a:solidFill>
-                  <a:srgbClr val="10281E"/>
-                </a:solidFill>
-                <a:latin typeface="Calibri" pitchFamily="34" charset="0"/>
-                <a:ea typeface="Calibri" pitchFamily="34" charset="-122"/>
-                <a:cs typeface="Calibri" pitchFamily="34" charset="-120"/>
-              </a:rPr>
-              <a:t>AWS Lambda</a:t>
-            </a:r>
-            <a:endParaRPr lang="en-US" sz="1450" dirty="0"/>
-          </a:p>
-        </p:txBody>
-      </p:sp>
-      <p:sp>
-        <p:nvSpPr>
-          <p:cNvPr id="20" name="Text 18"/>
-          <p:cNvSpPr/>
-          <p:nvPr/>
-        </p:nvSpPr>
-        <p:spPr>
-          <a:xfrm>
-            <a:off x="9235440" y="4251960"/>
-            <a:ext cx="2286000" cy="411480"/>
-          </a:xfrm>
-          <a:prstGeom prst="rect">
-            <a:avLst/>
-          </a:prstGeom>
-          <a:noFill/>
-          <a:ln/>
-        </p:spPr>
-        <p:txBody>
-          <a:bodyPr wrap="square" lIns="0" tIns="0" rIns="0" bIns="0" rtlCol="0" anchor="t"/>
-          <a:lstStyle/>
-          <a:p>
-            <a:pPr algn="ctr" indent="0" marL="0">
-              <a:buNone/>
-            </a:pPr>
-            <a:r>
-              <a:rPr lang="en-US" sz="1050" dirty="0">
-                <a:solidFill>
-                  <a:srgbClr val="557064"/>
-                </a:solidFill>
-                <a:latin typeface="Calibri" pitchFamily="34" charset="0"/>
-                <a:ea typeface="Calibri" pitchFamily="34" charset="-122"/>
-                <a:cs typeface="Calibri" pitchFamily="34" charset="-120"/>
-              </a:rPr>
-              <a:t>python3.12 ingest</a:t>
-            </a:r>
-            <a:endParaRPr lang="en-US" sz="1050" dirty="0"/>
-          </a:p>
-        </p:txBody>
-      </p:sp>
-      <p:sp>
-        <p:nvSpPr>
-          <p:cNvPr id="21" name="Shape 19"/>
-          <p:cNvSpPr/>
-          <p:nvPr/>
-        </p:nvSpPr>
-        <p:spPr>
-          <a:xfrm>
-            <a:off x="7242048" y="4160520"/>
-            <a:ext cx="1975104" cy="0"/>
-          </a:xfrm>
-          <a:prstGeom prst="line">
-            <a:avLst/>
-          </a:prstGeom>
-          <a:noFill/>
-          <a:ln w="25400">
-            <a:solidFill>
-              <a:srgbClr val="4FB077"/>
-            </a:solidFill>
-            <a:prstDash val="solid"/>
-            <a:headEnd type="triangle"/>
-            <a:tailEnd type="oval"/>
-          </a:ln>
-        </p:spPr>
-      </p:sp>
-      <p:sp>
-        <p:nvSpPr>
-          <p:cNvPr id="22" name="Shape 20"/>
-          <p:cNvSpPr/>
-          <p:nvPr/>
-        </p:nvSpPr>
-        <p:spPr>
-          <a:xfrm>
-            <a:off x="4937760" y="3520440"/>
-            <a:ext cx="2286000" cy="1280160"/>
-          </a:xfrm>
-          <a:prstGeom prst="roundRect">
-            <a:avLst>
-              <a:gd name="adj" fmla="val 7143"/>
-            </a:avLst>
-          </a:prstGeom>
-          <a:solidFill>
-            <a:srgbClr val="EDF6F0"/>
-          </a:solidFill>
-          <a:ln w="19050">
-            <a:solidFill>
-              <a:srgbClr val="12703C"/>
-            </a:solidFill>
-            <a:prstDash val="solid"/>
-          </a:ln>
-        </p:spPr>
-      </p:sp>
-      <p:sp>
-        <p:nvSpPr>
-          <p:cNvPr id="23" name="Shape 21"/>
-          <p:cNvSpPr/>
-          <p:nvPr/>
-        </p:nvSpPr>
-        <p:spPr>
-          <a:xfrm>
-            <a:off x="5989320" y="3685032"/>
-            <a:ext cx="182880" cy="182880"/>
-          </a:xfrm>
-          <a:prstGeom prst="ellipse">
-            <a:avLst/>
-          </a:prstGeom>
-          <a:solidFill>
-            <a:srgbClr val="12703C"/>
-          </a:solidFill>
-          <a:ln/>
-        </p:spPr>
-      </p:sp>
-      <p:sp>
-        <p:nvSpPr>
-          <p:cNvPr id="24" name="Text 22"/>
-          <p:cNvSpPr/>
-          <p:nvPr/>
-        </p:nvSpPr>
-        <p:spPr>
-          <a:xfrm>
-            <a:off x="4910328" y="3904488"/>
-            <a:ext cx="2340864" cy="365760"/>
-          </a:xfrm>
-          <a:prstGeom prst="rect">
-            <a:avLst/>
-          </a:prstGeom>
-          <a:noFill/>
-          <a:ln/>
-        </p:spPr>
-        <p:txBody>
-          <a:bodyPr wrap="square" lIns="0" tIns="0" rIns="0" bIns="0" rtlCol="0" anchor="ctr"/>
-          <a:lstStyle/>
-          <a:p>
-            <a:pPr algn="ctr" indent="0" marL="0">
-              <a:buNone/>
-            </a:pPr>
-            <a:r>
-              <a:rPr lang="en-US" sz="1450" b="1" dirty="0">
-                <a:solidFill>
-                  <a:srgbClr val="10281E"/>
-                </a:solidFill>
-                <a:latin typeface="Calibri" pitchFamily="34" charset="0"/>
-                <a:ea typeface="Calibri" pitchFamily="34" charset="-122"/>
-                <a:cs typeface="Calibri" pitchFamily="34" charset="-120"/>
-              </a:rPr>
-              <a:t>DynamoDB</a:t>
-            </a:r>
-            <a:endParaRPr lang="en-US" sz="1450" dirty="0"/>
-          </a:p>
-        </p:txBody>
-      </p:sp>
-      <p:sp>
-        <p:nvSpPr>
-          <p:cNvPr id="25" name="Text 23"/>
-          <p:cNvSpPr/>
-          <p:nvPr/>
-        </p:nvSpPr>
-        <p:spPr>
-          <a:xfrm>
-            <a:off x="4937760" y="4251960"/>
-            <a:ext cx="2286000" cy="411480"/>
-          </a:xfrm>
-          <a:prstGeom prst="rect">
-            <a:avLst/>
-          </a:prstGeom>
-          <a:noFill/>
-          <a:ln/>
-        </p:spPr>
-        <p:txBody>
-          <a:bodyPr wrap="square" lIns="0" tIns="0" rIns="0" bIns="0" rtlCol="0" anchor="t"/>
-          <a:lstStyle/>
-          <a:p>
-            <a:pPr algn="ctr" indent="0" marL="0">
-              <a:buNone/>
-            </a:pPr>
-            <a:r>
-              <a:rPr lang="en-US" sz="1050" dirty="0">
-                <a:solidFill>
-                  <a:srgbClr val="557064"/>
-                </a:solidFill>
-                <a:latin typeface="Calibri" pitchFamily="34" charset="0"/>
-                <a:ea typeface="Calibri" pitchFamily="34" charset="-122"/>
-                <a:cs typeface="Calibri" pitchFamily="34" charset="-120"/>
-              </a:rPr>
-              <a:t>durable store</a:t>
-            </a:r>
-            <a:endParaRPr lang="en-US" sz="1050" dirty="0"/>
-          </a:p>
-        </p:txBody>
-      </p:sp>
-      <p:sp>
-        <p:nvSpPr>
-          <p:cNvPr id="26" name="Shape 24"/>
-          <p:cNvSpPr/>
-          <p:nvPr/>
-        </p:nvSpPr>
-        <p:spPr>
-          <a:xfrm>
-            <a:off x="2944368" y="4160520"/>
-            <a:ext cx="1975104" cy="0"/>
-          </a:xfrm>
-          <a:prstGeom prst="line">
-            <a:avLst/>
-          </a:prstGeom>
-          <a:noFill/>
-          <a:ln w="25400">
-            <a:solidFill>
-              <a:srgbClr val="4FB077"/>
-            </a:solidFill>
-            <a:prstDash val="solid"/>
-            <a:headEnd type="triangle"/>
-            <a:tailEnd type="oval"/>
-          </a:ln>
-        </p:spPr>
-      </p:sp>
-      <p:sp>
-        <p:nvSpPr>
-          <p:cNvPr id="27" name="Shape 25"/>
-          <p:cNvSpPr/>
-          <p:nvPr/>
-        </p:nvSpPr>
-        <p:spPr>
-          <a:xfrm>
-            <a:off x="640080" y="3520440"/>
-            <a:ext cx="2286000" cy="1280160"/>
-          </a:xfrm>
-          <a:prstGeom prst="roundRect">
-            <a:avLst>
-              <a:gd name="adj" fmla="val 7143"/>
-            </a:avLst>
-          </a:prstGeom>
-          <a:solidFill>
-            <a:srgbClr val="EDF6F0"/>
-          </a:solidFill>
-          <a:ln w="19050">
-            <a:solidFill>
-              <a:srgbClr val="1E9450"/>
-            </a:solidFill>
-            <a:prstDash val="solid"/>
-          </a:ln>
-        </p:spPr>
-      </p:sp>
-      <p:sp>
-        <p:nvSpPr>
-          <p:cNvPr id="28" name="Shape 26"/>
-          <p:cNvSpPr/>
-          <p:nvPr/>
-        </p:nvSpPr>
-        <p:spPr>
-          <a:xfrm>
-            <a:off x="1691640" y="3685032"/>
-            <a:ext cx="182880" cy="182880"/>
-          </a:xfrm>
-          <a:prstGeom prst="ellipse">
-            <a:avLst/>
-          </a:prstGeom>
-          <a:solidFill>
-            <a:srgbClr val="1E9450"/>
-          </a:solidFill>
-          <a:ln/>
-        </p:spPr>
-      </p:sp>
-      <p:sp>
-        <p:nvSpPr>
-          <p:cNvPr id="29" name="Text 27"/>
-          <p:cNvSpPr/>
-          <p:nvPr/>
-        </p:nvSpPr>
-        <p:spPr>
-          <a:xfrm>
-            <a:off x="612648" y="3904488"/>
-            <a:ext cx="2340864" cy="365760"/>
-          </a:xfrm>
-          <a:prstGeom prst="rect">
-            <a:avLst/>
-          </a:prstGeom>
-          <a:noFill/>
-          <a:ln/>
-        </p:spPr>
-        <p:txBody>
-          <a:bodyPr wrap="square" lIns="0" tIns="0" rIns="0" bIns="0" rtlCol="0" anchor="ctr"/>
-          <a:lstStyle/>
-          <a:p>
-            <a:pPr algn="ctr" indent="0" marL="0">
-              <a:buNone/>
-            </a:pPr>
-            <a:r>
-              <a:rPr lang="en-US" sz="1450" b="1" dirty="0">
-                <a:solidFill>
-                  <a:srgbClr val="10281E"/>
-                </a:solidFill>
-                <a:latin typeface="Calibri" pitchFamily="34" charset="0"/>
-                <a:ea typeface="Calibri" pitchFamily="34" charset="-122"/>
-                <a:cs typeface="Calibri" pitchFamily="34" charset="-120"/>
-              </a:rPr>
-              <a:t>API GW + S3</a:t>
-            </a:r>
-            <a:endParaRPr lang="en-US" sz="1450" dirty="0"/>
-          </a:p>
-        </p:txBody>
-      </p:sp>
-      <p:sp>
-        <p:nvSpPr>
-          <p:cNvPr id="30" name="Text 28"/>
-          <p:cNvSpPr/>
-          <p:nvPr/>
-        </p:nvSpPr>
-        <p:spPr>
-          <a:xfrm>
-            <a:off x="640080" y="4251960"/>
-            <a:ext cx="2286000" cy="411480"/>
-          </a:xfrm>
-          <a:prstGeom prst="rect">
-            <a:avLst/>
-          </a:prstGeom>
-          <a:noFill/>
-          <a:ln/>
-        </p:spPr>
-        <p:txBody>
-          <a:bodyPr wrap="square" lIns="0" tIns="0" rIns="0" bIns="0" rtlCol="0" anchor="t"/>
-          <a:lstStyle/>
-          <a:p>
-            <a:pPr algn="ctr" indent="0" marL="0">
-              <a:buNone/>
-            </a:pPr>
-            <a:r>
-              <a:rPr lang="en-US" sz="1050" dirty="0">
-                <a:solidFill>
-                  <a:srgbClr val="557064"/>
-                </a:solidFill>
-                <a:latin typeface="Calibri" pitchFamily="34" charset="0"/>
-                <a:ea typeface="Calibri" pitchFamily="34" charset="-122"/>
-                <a:cs typeface="Calibri" pitchFamily="34" charset="-120"/>
-              </a:rPr>
-              <a:t>live dashboard</a:t>
-            </a:r>
-            <a:endParaRPr lang="en-US" sz="1050" dirty="0"/>
-          </a:p>
-        </p:txBody>
-      </p:sp>
-      <p:sp>
-        <p:nvSpPr>
-          <p:cNvPr id="31" name="Shape 29"/>
-          <p:cNvSpPr/>
-          <p:nvPr/>
-        </p:nvSpPr>
-        <p:spPr>
-          <a:xfrm>
-            <a:off x="10378440" y="3154680"/>
-            <a:ext cx="0" cy="365760"/>
+            <a:off x="6095848" y="1892808"/>
+            <a:ext cx="0" cy="219456"/>
           </a:xfrm>
           <a:prstGeom prst="line">
             <a:avLst/>
@@ -2446,14 +1741,735 @@
       </p:sp>
       <p:sp>
         <p:nvSpPr>
+          <p:cNvPr id="8" name="Shape 6"/>
+          <p:cNvSpPr/>
+          <p:nvPr/>
+        </p:nvSpPr>
+        <p:spPr>
+          <a:xfrm>
+            <a:off x="3992728" y="2112264"/>
+            <a:ext cx="4206240" cy="658368"/>
+          </a:xfrm>
+          <a:prstGeom prst="roundRect">
+            <a:avLst>
+              <a:gd name="adj" fmla="val 11111"/>
+            </a:avLst>
+          </a:prstGeom>
+          <a:solidFill>
+            <a:srgbClr val="EDF6F0"/>
+          </a:solidFill>
+          <a:ln w="17780">
+            <a:solidFill>
+              <a:srgbClr val="4FB077"/>
+            </a:solidFill>
+            <a:prstDash val="solid"/>
+          </a:ln>
+        </p:spPr>
+      </p:sp>
+      <p:sp>
+        <p:nvSpPr>
+          <p:cNvPr id="9" name="Shape 7"/>
+          <p:cNvSpPr/>
+          <p:nvPr/>
+        </p:nvSpPr>
+        <p:spPr>
+          <a:xfrm>
+            <a:off x="4193896" y="2359152"/>
+            <a:ext cx="164592" cy="164592"/>
+          </a:xfrm>
+          <a:prstGeom prst="ellipse">
+            <a:avLst/>
+          </a:prstGeom>
+          <a:solidFill>
+            <a:srgbClr val="4FB077"/>
+          </a:solidFill>
+          <a:ln/>
+        </p:spPr>
+      </p:sp>
+      <p:sp>
+        <p:nvSpPr>
+          <p:cNvPr id="10" name="Text 8"/>
+          <p:cNvSpPr/>
+          <p:nvPr/>
+        </p:nvSpPr>
+        <p:spPr>
+          <a:xfrm>
+            <a:off x="4495648" y="2112264"/>
+            <a:ext cx="2194560" cy="658368"/>
+          </a:xfrm>
+          <a:prstGeom prst="rect">
+            <a:avLst/>
+          </a:prstGeom>
+          <a:noFill/>
+          <a:ln/>
+        </p:spPr>
+        <p:txBody>
+          <a:bodyPr wrap="square" lIns="0" tIns="0" rIns="0" bIns="0" rtlCol="0" anchor="ctr"/>
+          <a:lstStyle/>
+          <a:p>
+            <a:pPr indent="0" marL="0">
+              <a:buNone/>
+            </a:pPr>
+            <a:r>
+              <a:rPr lang="en-US" sz="1350" b="1" dirty="0">
+                <a:solidFill>
+                  <a:srgbClr val="10281E"/>
+                </a:solidFill>
+                <a:latin typeface="Calibri" pitchFamily="34" charset="0"/>
+                <a:ea typeface="Calibri" pitchFamily="34" charset="-122"/>
+                <a:cs typeface="Calibri" pitchFamily="34" charset="-120"/>
+              </a:rPr>
+              <a:t>Fog node</a:t>
+            </a:r>
+            <a:endParaRPr lang="en-US" sz="1350" dirty="0"/>
+          </a:p>
+        </p:txBody>
+      </p:sp>
+      <p:sp>
+        <p:nvSpPr>
+          <p:cNvPr id="11" name="Text 9"/>
+          <p:cNvSpPr/>
+          <p:nvPr/>
+        </p:nvSpPr>
+        <p:spPr>
+          <a:xfrm>
+            <a:off x="6644488" y="2112264"/>
+            <a:ext cx="1463040" cy="658368"/>
+          </a:xfrm>
+          <a:prstGeom prst="rect">
+            <a:avLst/>
+          </a:prstGeom>
+          <a:noFill/>
+          <a:ln/>
+        </p:spPr>
+        <p:txBody>
+          <a:bodyPr wrap="square" lIns="0" tIns="0" rIns="0" bIns="0" rtlCol="0" anchor="ctr"/>
+          <a:lstStyle/>
+          <a:p>
+            <a:pPr algn="r" indent="0" marL="0">
+              <a:buNone/>
+            </a:pPr>
+            <a:r>
+              <a:rPr lang="en-US" sz="950" dirty="0">
+                <a:solidFill>
+                  <a:srgbClr val="557064"/>
+                </a:solidFill>
+                <a:latin typeface="Calibri" pitchFamily="34" charset="0"/>
+                <a:ea typeface="Calibri" pitchFamily="34" charset="-122"/>
+                <a:cs typeface="Calibri" pitchFamily="34" charset="-120"/>
+              </a:rPr>
+              <a:t>windows · 4 rules</a:t>
+            </a:r>
+            <a:endParaRPr lang="en-US" sz="950" dirty="0"/>
+          </a:p>
+        </p:txBody>
+      </p:sp>
+      <p:sp>
+        <p:nvSpPr>
+          <p:cNvPr id="12" name="Shape 10"/>
+          <p:cNvSpPr/>
+          <p:nvPr/>
+        </p:nvSpPr>
+        <p:spPr>
+          <a:xfrm>
+            <a:off x="6095848" y="2770632"/>
+            <a:ext cx="0" cy="219456"/>
+          </a:xfrm>
+          <a:prstGeom prst="line">
+            <a:avLst/>
+          </a:prstGeom>
+          <a:noFill/>
+          <a:ln w="25400">
+            <a:solidFill>
+              <a:srgbClr val="4FB077"/>
+            </a:solidFill>
+            <a:prstDash val="solid"/>
+            <a:tailEnd type="triangle"/>
+          </a:ln>
+        </p:spPr>
+      </p:sp>
+      <p:sp>
+        <p:nvSpPr>
+          <p:cNvPr id="13" name="Shape 11"/>
+          <p:cNvSpPr/>
+          <p:nvPr/>
+        </p:nvSpPr>
+        <p:spPr>
+          <a:xfrm>
+            <a:off x="3992728" y="2990088"/>
+            <a:ext cx="4206240" cy="658368"/>
+          </a:xfrm>
+          <a:prstGeom prst="roundRect">
+            <a:avLst>
+              <a:gd name="adj" fmla="val 11111"/>
+            </a:avLst>
+          </a:prstGeom>
+          <a:solidFill>
+            <a:srgbClr val="EDF6F0"/>
+          </a:solidFill>
+          <a:ln w="17780">
+            <a:solidFill>
+              <a:srgbClr val="12703C"/>
+            </a:solidFill>
+            <a:prstDash val="solid"/>
+          </a:ln>
+        </p:spPr>
+      </p:sp>
+      <p:sp>
+        <p:nvSpPr>
+          <p:cNvPr id="14" name="Shape 12"/>
+          <p:cNvSpPr/>
+          <p:nvPr/>
+        </p:nvSpPr>
+        <p:spPr>
+          <a:xfrm>
+            <a:off x="4193896" y="3236976"/>
+            <a:ext cx="164592" cy="164592"/>
+          </a:xfrm>
+          <a:prstGeom prst="ellipse">
+            <a:avLst/>
+          </a:prstGeom>
+          <a:solidFill>
+            <a:srgbClr val="12703C"/>
+          </a:solidFill>
+          <a:ln/>
+        </p:spPr>
+      </p:sp>
+      <p:sp>
+        <p:nvSpPr>
+          <p:cNvPr id="15" name="Text 13"/>
+          <p:cNvSpPr/>
+          <p:nvPr/>
+        </p:nvSpPr>
+        <p:spPr>
+          <a:xfrm>
+            <a:off x="4495648" y="2990088"/>
+            <a:ext cx="2194560" cy="658368"/>
+          </a:xfrm>
+          <a:prstGeom prst="rect">
+            <a:avLst/>
+          </a:prstGeom>
+          <a:noFill/>
+          <a:ln/>
+        </p:spPr>
+        <p:txBody>
+          <a:bodyPr wrap="square" lIns="0" tIns="0" rIns="0" bIns="0" rtlCol="0" anchor="ctr"/>
+          <a:lstStyle/>
+          <a:p>
+            <a:pPr indent="0" marL="0">
+              <a:buNone/>
+            </a:pPr>
+            <a:r>
+              <a:rPr lang="en-US" sz="1350" b="1" dirty="0">
+                <a:solidFill>
+                  <a:srgbClr val="10281E"/>
+                </a:solidFill>
+                <a:latin typeface="Calibri" pitchFamily="34" charset="0"/>
+                <a:ea typeface="Calibri" pitchFamily="34" charset="-122"/>
+                <a:cs typeface="Calibri" pitchFamily="34" charset="-120"/>
+              </a:rPr>
+              <a:t>Amazon SQS</a:t>
+            </a:r>
+            <a:endParaRPr lang="en-US" sz="1350" dirty="0"/>
+          </a:p>
+        </p:txBody>
+      </p:sp>
+      <p:sp>
+        <p:nvSpPr>
+          <p:cNvPr id="16" name="Text 14"/>
+          <p:cNvSpPr/>
+          <p:nvPr/>
+        </p:nvSpPr>
+        <p:spPr>
+          <a:xfrm>
+            <a:off x="6644488" y="2990088"/>
+            <a:ext cx="1463040" cy="658368"/>
+          </a:xfrm>
+          <a:prstGeom prst="rect">
+            <a:avLst/>
+          </a:prstGeom>
+          <a:noFill/>
+          <a:ln/>
+        </p:spPr>
+        <p:txBody>
+          <a:bodyPr wrap="square" lIns="0" tIns="0" rIns="0" bIns="0" rtlCol="0" anchor="ctr"/>
+          <a:lstStyle/>
+          <a:p>
+            <a:pPr algn="r" indent="0" marL="0">
+              <a:buNone/>
+            </a:pPr>
+            <a:r>
+              <a:rPr lang="en-US" sz="950" dirty="0">
+                <a:solidFill>
+                  <a:srgbClr val="557064"/>
+                </a:solidFill>
+                <a:latin typeface="Calibri" pitchFamily="34" charset="0"/>
+                <a:ea typeface="Calibri" pitchFamily="34" charset="-122"/>
+                <a:cs typeface="Calibri" pitchFamily="34" charset="-120"/>
+              </a:rPr>
+              <a:t>1 aggregate / window</a:t>
+            </a:r>
+            <a:endParaRPr lang="en-US" sz="950" dirty="0"/>
+          </a:p>
+        </p:txBody>
+      </p:sp>
+      <p:sp>
+        <p:nvSpPr>
+          <p:cNvPr id="17" name="Shape 15"/>
+          <p:cNvSpPr/>
+          <p:nvPr/>
+        </p:nvSpPr>
+        <p:spPr>
+          <a:xfrm>
+            <a:off x="6095848" y="3648456"/>
+            <a:ext cx="0" cy="219456"/>
+          </a:xfrm>
+          <a:prstGeom prst="line">
+            <a:avLst/>
+          </a:prstGeom>
+          <a:noFill/>
+          <a:ln w="25400">
+            <a:solidFill>
+              <a:srgbClr val="4FB077"/>
+            </a:solidFill>
+            <a:prstDash val="solid"/>
+            <a:tailEnd type="triangle"/>
+          </a:ln>
+        </p:spPr>
+      </p:sp>
+      <p:sp>
+        <p:nvSpPr>
+          <p:cNvPr id="18" name="Shape 16"/>
+          <p:cNvSpPr/>
+          <p:nvPr/>
+        </p:nvSpPr>
+        <p:spPr>
+          <a:xfrm>
+            <a:off x="3992728" y="3867912"/>
+            <a:ext cx="4206240" cy="658368"/>
+          </a:xfrm>
+          <a:prstGeom prst="roundRect">
+            <a:avLst>
+              <a:gd name="adj" fmla="val 11111"/>
+            </a:avLst>
+          </a:prstGeom>
+          <a:solidFill>
+            <a:srgbClr val="EDF6F0"/>
+          </a:solidFill>
+          <a:ln w="17780">
+            <a:solidFill>
+              <a:srgbClr val="12703C"/>
+            </a:solidFill>
+            <a:prstDash val="solid"/>
+          </a:ln>
+        </p:spPr>
+      </p:sp>
+      <p:sp>
+        <p:nvSpPr>
+          <p:cNvPr id="19" name="Shape 17"/>
+          <p:cNvSpPr/>
+          <p:nvPr/>
+        </p:nvSpPr>
+        <p:spPr>
+          <a:xfrm>
+            <a:off x="4193896" y="4114800"/>
+            <a:ext cx="164592" cy="164592"/>
+          </a:xfrm>
+          <a:prstGeom prst="ellipse">
+            <a:avLst/>
+          </a:prstGeom>
+          <a:solidFill>
+            <a:srgbClr val="12703C"/>
+          </a:solidFill>
+          <a:ln/>
+        </p:spPr>
+      </p:sp>
+      <p:sp>
+        <p:nvSpPr>
+          <p:cNvPr id="20" name="Text 18"/>
+          <p:cNvSpPr/>
+          <p:nvPr/>
+        </p:nvSpPr>
+        <p:spPr>
+          <a:xfrm>
+            <a:off x="4495648" y="3867912"/>
+            <a:ext cx="2194560" cy="658368"/>
+          </a:xfrm>
+          <a:prstGeom prst="rect">
+            <a:avLst/>
+          </a:prstGeom>
+          <a:noFill/>
+          <a:ln/>
+        </p:spPr>
+        <p:txBody>
+          <a:bodyPr wrap="square" lIns="0" tIns="0" rIns="0" bIns="0" rtlCol="0" anchor="ctr"/>
+          <a:lstStyle/>
+          <a:p>
+            <a:pPr indent="0" marL="0">
+              <a:buNone/>
+            </a:pPr>
+            <a:r>
+              <a:rPr lang="en-US" sz="1350" b="1" dirty="0">
+                <a:solidFill>
+                  <a:srgbClr val="10281E"/>
+                </a:solidFill>
+                <a:latin typeface="Calibri" pitchFamily="34" charset="0"/>
+                <a:ea typeface="Calibri" pitchFamily="34" charset="-122"/>
+                <a:cs typeface="Calibri" pitchFamily="34" charset="-120"/>
+              </a:rPr>
+              <a:t>AWS Lambda</a:t>
+            </a:r>
+            <a:endParaRPr lang="en-US" sz="1350" dirty="0"/>
+          </a:p>
+        </p:txBody>
+      </p:sp>
+      <p:sp>
+        <p:nvSpPr>
+          <p:cNvPr id="21" name="Text 19"/>
+          <p:cNvSpPr/>
+          <p:nvPr/>
+        </p:nvSpPr>
+        <p:spPr>
+          <a:xfrm>
+            <a:off x="6644488" y="3867912"/>
+            <a:ext cx="1463040" cy="658368"/>
+          </a:xfrm>
+          <a:prstGeom prst="rect">
+            <a:avLst/>
+          </a:prstGeom>
+          <a:noFill/>
+          <a:ln/>
+        </p:spPr>
+        <p:txBody>
+          <a:bodyPr wrap="square" lIns="0" tIns="0" rIns="0" bIns="0" rtlCol="0" anchor="ctr"/>
+          <a:lstStyle/>
+          <a:p>
+            <a:pPr algn="r" indent="0" marL="0">
+              <a:buNone/>
+            </a:pPr>
+            <a:r>
+              <a:rPr lang="en-US" sz="950" dirty="0">
+                <a:solidFill>
+                  <a:srgbClr val="557064"/>
+                </a:solidFill>
+                <a:latin typeface="Calibri" pitchFamily="34" charset="0"/>
+                <a:ea typeface="Calibri" pitchFamily="34" charset="-122"/>
+                <a:cs typeface="Calibri" pitchFamily="34" charset="-120"/>
+              </a:rPr>
+              <a:t>python3.12 ingest</a:t>
+            </a:r>
+            <a:endParaRPr lang="en-US" sz="950" dirty="0"/>
+          </a:p>
+        </p:txBody>
+      </p:sp>
+      <p:sp>
+        <p:nvSpPr>
+          <p:cNvPr id="22" name="Shape 20"/>
+          <p:cNvSpPr/>
+          <p:nvPr/>
+        </p:nvSpPr>
+        <p:spPr>
+          <a:xfrm>
+            <a:off x="6095848" y="4526280"/>
+            <a:ext cx="0" cy="219456"/>
+          </a:xfrm>
+          <a:prstGeom prst="line">
+            <a:avLst/>
+          </a:prstGeom>
+          <a:noFill/>
+          <a:ln w="25400">
+            <a:solidFill>
+              <a:srgbClr val="4FB077"/>
+            </a:solidFill>
+            <a:prstDash val="solid"/>
+            <a:tailEnd type="triangle"/>
+          </a:ln>
+        </p:spPr>
+      </p:sp>
+      <p:sp>
+        <p:nvSpPr>
+          <p:cNvPr id="23" name="Shape 21"/>
+          <p:cNvSpPr/>
+          <p:nvPr/>
+        </p:nvSpPr>
+        <p:spPr>
+          <a:xfrm>
+            <a:off x="3992728" y="4745736"/>
+            <a:ext cx="4206240" cy="658368"/>
+          </a:xfrm>
+          <a:prstGeom prst="roundRect">
+            <a:avLst>
+              <a:gd name="adj" fmla="val 11111"/>
+            </a:avLst>
+          </a:prstGeom>
+          <a:solidFill>
+            <a:srgbClr val="EDF6F0"/>
+          </a:solidFill>
+          <a:ln w="17780">
+            <a:solidFill>
+              <a:srgbClr val="12703C"/>
+            </a:solidFill>
+            <a:prstDash val="solid"/>
+          </a:ln>
+        </p:spPr>
+      </p:sp>
+      <p:sp>
+        <p:nvSpPr>
+          <p:cNvPr id="24" name="Shape 22"/>
+          <p:cNvSpPr/>
+          <p:nvPr/>
+        </p:nvSpPr>
+        <p:spPr>
+          <a:xfrm>
+            <a:off x="4193896" y="4992624"/>
+            <a:ext cx="164592" cy="164592"/>
+          </a:xfrm>
+          <a:prstGeom prst="ellipse">
+            <a:avLst/>
+          </a:prstGeom>
+          <a:solidFill>
+            <a:srgbClr val="12703C"/>
+          </a:solidFill>
+          <a:ln/>
+        </p:spPr>
+      </p:sp>
+      <p:sp>
+        <p:nvSpPr>
+          <p:cNvPr id="25" name="Text 23"/>
+          <p:cNvSpPr/>
+          <p:nvPr/>
+        </p:nvSpPr>
+        <p:spPr>
+          <a:xfrm>
+            <a:off x="4495648" y="4745736"/>
+            <a:ext cx="2194560" cy="658368"/>
+          </a:xfrm>
+          <a:prstGeom prst="rect">
+            <a:avLst/>
+          </a:prstGeom>
+          <a:noFill/>
+          <a:ln/>
+        </p:spPr>
+        <p:txBody>
+          <a:bodyPr wrap="square" lIns="0" tIns="0" rIns="0" bIns="0" rtlCol="0" anchor="ctr"/>
+          <a:lstStyle/>
+          <a:p>
+            <a:pPr indent="0" marL="0">
+              <a:buNone/>
+            </a:pPr>
+            <a:r>
+              <a:rPr lang="en-US" sz="1350" b="1" dirty="0">
+                <a:solidFill>
+                  <a:srgbClr val="10281E"/>
+                </a:solidFill>
+                <a:latin typeface="Calibri" pitchFamily="34" charset="0"/>
+                <a:ea typeface="Calibri" pitchFamily="34" charset="-122"/>
+                <a:cs typeface="Calibri" pitchFamily="34" charset="-120"/>
+              </a:rPr>
+              <a:t>DynamoDB</a:t>
+            </a:r>
+            <a:endParaRPr lang="en-US" sz="1350" dirty="0"/>
+          </a:p>
+        </p:txBody>
+      </p:sp>
+      <p:sp>
+        <p:nvSpPr>
+          <p:cNvPr id="26" name="Text 24"/>
+          <p:cNvSpPr/>
+          <p:nvPr/>
+        </p:nvSpPr>
+        <p:spPr>
+          <a:xfrm>
+            <a:off x="6644488" y="4745736"/>
+            <a:ext cx="1463040" cy="658368"/>
+          </a:xfrm>
+          <a:prstGeom prst="rect">
+            <a:avLst/>
+          </a:prstGeom>
+          <a:noFill/>
+          <a:ln/>
+        </p:spPr>
+        <p:txBody>
+          <a:bodyPr wrap="square" lIns="0" tIns="0" rIns="0" bIns="0" rtlCol="0" anchor="ctr"/>
+          <a:lstStyle/>
+          <a:p>
+            <a:pPr algn="r" indent="0" marL="0">
+              <a:buNone/>
+            </a:pPr>
+            <a:r>
+              <a:rPr lang="en-US" sz="950" dirty="0">
+                <a:solidFill>
+                  <a:srgbClr val="557064"/>
+                </a:solidFill>
+                <a:latin typeface="Calibri" pitchFamily="34" charset="0"/>
+                <a:ea typeface="Calibri" pitchFamily="34" charset="-122"/>
+                <a:cs typeface="Calibri" pitchFamily="34" charset="-120"/>
+              </a:rPr>
+              <a:t>durable store</a:t>
+            </a:r>
+            <a:endParaRPr lang="en-US" sz="950" dirty="0"/>
+          </a:p>
+        </p:txBody>
+      </p:sp>
+      <p:sp>
+        <p:nvSpPr>
+          <p:cNvPr id="27" name="Shape 25"/>
+          <p:cNvSpPr/>
+          <p:nvPr/>
+        </p:nvSpPr>
+        <p:spPr>
+          <a:xfrm>
+            <a:off x="6095848" y="5404104"/>
+            <a:ext cx="0" cy="219456"/>
+          </a:xfrm>
+          <a:prstGeom prst="line">
+            <a:avLst/>
+          </a:prstGeom>
+          <a:noFill/>
+          <a:ln w="25400">
+            <a:solidFill>
+              <a:srgbClr val="4FB077"/>
+            </a:solidFill>
+            <a:prstDash val="solid"/>
+            <a:tailEnd type="triangle"/>
+          </a:ln>
+        </p:spPr>
+      </p:sp>
+      <p:sp>
+        <p:nvSpPr>
+          <p:cNvPr id="28" name="Shape 26"/>
+          <p:cNvSpPr/>
+          <p:nvPr/>
+        </p:nvSpPr>
+        <p:spPr>
+          <a:xfrm>
+            <a:off x="3992728" y="5623560"/>
+            <a:ext cx="4206240" cy="658368"/>
+          </a:xfrm>
+          <a:prstGeom prst="roundRect">
+            <a:avLst>
+              <a:gd name="adj" fmla="val 11111"/>
+            </a:avLst>
+          </a:prstGeom>
+          <a:solidFill>
+            <a:srgbClr val="EDF6F0"/>
+          </a:solidFill>
+          <a:ln w="17780">
+            <a:solidFill>
+              <a:srgbClr val="1E9450"/>
+            </a:solidFill>
+            <a:prstDash val="solid"/>
+          </a:ln>
+        </p:spPr>
+      </p:sp>
+      <p:sp>
+        <p:nvSpPr>
+          <p:cNvPr id="29" name="Shape 27"/>
+          <p:cNvSpPr/>
+          <p:nvPr/>
+        </p:nvSpPr>
+        <p:spPr>
+          <a:xfrm>
+            <a:off x="4193896" y="5870448"/>
+            <a:ext cx="164592" cy="164592"/>
+          </a:xfrm>
+          <a:prstGeom prst="ellipse">
+            <a:avLst/>
+          </a:prstGeom>
+          <a:solidFill>
+            <a:srgbClr val="1E9450"/>
+          </a:solidFill>
+          <a:ln/>
+        </p:spPr>
+      </p:sp>
+      <p:sp>
+        <p:nvSpPr>
+          <p:cNvPr id="30" name="Text 28"/>
+          <p:cNvSpPr/>
+          <p:nvPr/>
+        </p:nvSpPr>
+        <p:spPr>
+          <a:xfrm>
+            <a:off x="4495648" y="5623560"/>
+            <a:ext cx="2194560" cy="658368"/>
+          </a:xfrm>
+          <a:prstGeom prst="rect">
+            <a:avLst/>
+          </a:prstGeom>
+          <a:noFill/>
+          <a:ln/>
+        </p:spPr>
+        <p:txBody>
+          <a:bodyPr wrap="square" lIns="0" tIns="0" rIns="0" bIns="0" rtlCol="0" anchor="ctr"/>
+          <a:lstStyle/>
+          <a:p>
+            <a:pPr indent="0" marL="0">
+              <a:buNone/>
+            </a:pPr>
+            <a:r>
+              <a:rPr lang="en-US" sz="1350" b="1" dirty="0">
+                <a:solidFill>
+                  <a:srgbClr val="10281E"/>
+                </a:solidFill>
+                <a:latin typeface="Calibri" pitchFamily="34" charset="0"/>
+                <a:ea typeface="Calibri" pitchFamily="34" charset="-122"/>
+                <a:cs typeface="Calibri" pitchFamily="34" charset="-120"/>
+              </a:rPr>
+              <a:t>API GW + S3</a:t>
+            </a:r>
+            <a:endParaRPr lang="en-US" sz="1350" dirty="0"/>
+          </a:p>
+        </p:txBody>
+      </p:sp>
+      <p:sp>
+        <p:nvSpPr>
+          <p:cNvPr id="31" name="Text 29"/>
+          <p:cNvSpPr/>
+          <p:nvPr/>
+        </p:nvSpPr>
+        <p:spPr>
+          <a:xfrm>
+            <a:off x="6644488" y="5623560"/>
+            <a:ext cx="1463040" cy="658368"/>
+          </a:xfrm>
+          <a:prstGeom prst="rect">
+            <a:avLst/>
+          </a:prstGeom>
+          <a:noFill/>
+          <a:ln/>
+        </p:spPr>
+        <p:txBody>
+          <a:bodyPr wrap="square" lIns="0" tIns="0" rIns="0" bIns="0" rtlCol="0" anchor="ctr"/>
+          <a:lstStyle/>
+          <a:p>
+            <a:pPr algn="r" indent="0" marL="0">
+              <a:buNone/>
+            </a:pPr>
+            <a:r>
+              <a:rPr lang="en-US" sz="950" dirty="0">
+                <a:solidFill>
+                  <a:srgbClr val="557064"/>
+                </a:solidFill>
+                <a:latin typeface="Calibri" pitchFamily="34" charset="0"/>
+                <a:ea typeface="Calibri" pitchFamily="34" charset="-122"/>
+                <a:cs typeface="Calibri" pitchFamily="34" charset="-120"/>
+              </a:rPr>
+              <a:t>live dashboard</a:t>
+            </a:r>
+            <a:endParaRPr lang="en-US" sz="950" dirty="0"/>
+          </a:p>
+        </p:txBody>
+      </p:sp>
+      <p:sp>
+        <p:nvSpPr>
           <p:cNvPr id="32" name="Text 30"/>
           <p:cNvSpPr/>
           <p:nvPr/>
         </p:nvSpPr>
         <p:spPr>
           <a:xfrm>
-            <a:off x="640080" y="5257800"/>
-            <a:ext cx="10972800" cy="731520"/>
+            <a:off x="2438248" y="1234440"/>
+            <a:ext cx="1371600" cy="365760"/>
           </a:xfrm>
           <a:prstGeom prst="rect">
             <a:avLst/>
@@ -2465,7 +2481,85 @@
           <a:bodyPr wrap="square" rtlCol="0" anchor="ctr"/>
           <a:lstStyle/>
           <a:p>
-            <a:pPr algn="ctr" indent="0" marL="0">
+            <a:pPr algn="r" indent="0" marL="0">
+              <a:buNone/>
+            </a:pPr>
+            <a:r>
+              <a:rPr lang="en-US" sz="1100" b="1" spc="200" kern="0" dirty="0">
+                <a:solidFill>
+                  <a:srgbClr val="4FB077"/>
+                </a:solidFill>
+                <a:latin typeface="Calibri" pitchFamily="34" charset="0"/>
+                <a:ea typeface="Calibri" pitchFamily="34" charset="-122"/>
+                <a:cs typeface="Calibri" pitchFamily="34" charset="-120"/>
+              </a:rPr>
+              <a:t>EDGE</a:t>
+            </a:r>
+            <a:endParaRPr lang="en-US" sz="1100" dirty="0"/>
+          </a:p>
+        </p:txBody>
+      </p:sp>
+      <p:sp>
+        <p:nvSpPr>
+          <p:cNvPr id="33" name="Text 31"/>
+          <p:cNvSpPr/>
+          <p:nvPr/>
+        </p:nvSpPr>
+        <p:spPr>
+          <a:xfrm>
+            <a:off x="2438248" y="2990088"/>
+            <a:ext cx="1371600" cy="365760"/>
+          </a:xfrm>
+          <a:prstGeom prst="rect">
+            <a:avLst/>
+          </a:prstGeom>
+          <a:noFill/>
+          <a:ln/>
+        </p:spPr>
+        <p:txBody>
+          <a:bodyPr wrap="square" rtlCol="0" anchor="ctr"/>
+          <a:lstStyle/>
+          <a:p>
+            <a:pPr algn="r" indent="0" marL="0">
+              <a:buNone/>
+            </a:pPr>
+            <a:r>
+              <a:rPr lang="en-US" sz="1100" b="1" spc="200" kern="0" dirty="0">
+                <a:solidFill>
+                  <a:srgbClr val="12703C"/>
+                </a:solidFill>
+                <a:latin typeface="Calibri" pitchFamily="34" charset="0"/>
+                <a:ea typeface="Calibri" pitchFamily="34" charset="-122"/>
+                <a:cs typeface="Calibri" pitchFamily="34" charset="-120"/>
+              </a:rPr>
+              <a:t>CLOUD</a:t>
+            </a:r>
+            <a:endParaRPr lang="en-US" sz="1100" dirty="0"/>
+          </a:p>
+        </p:txBody>
+      </p:sp>
+      <p:sp>
+        <p:nvSpPr>
+          <p:cNvPr id="34" name="Text 32"/>
+          <p:cNvSpPr/>
+          <p:nvPr/>
+        </p:nvSpPr>
+        <p:spPr>
+          <a:xfrm>
+            <a:off x="8656168" y="2743200"/>
+            <a:ext cx="3291840" cy="2194560"/>
+          </a:xfrm>
+          <a:prstGeom prst="rect">
+            <a:avLst/>
+          </a:prstGeom>
+          <a:noFill/>
+          <a:ln/>
+        </p:spPr>
+        <p:txBody>
+          <a:bodyPr wrap="square" rtlCol="0" anchor="ctr"/>
+          <a:lstStyle/>
+          <a:p>
+            <a:pPr indent="0" marL="0">
               <a:buNone/>
             </a:pPr>
             <a:r>

--- a/ppt/NemiIshwarlalVikani_X24303046_ev-charging-network.pptx
+++ b/ppt/NemiIshwarlalVikani_X24303046_ev-charging-network.pptx
@@ -2695,12 +2695,12 @@
         </p:nvSpPr>
         <p:spPr>
           <a:xfrm>
-            <a:off x="640080" y="1874520"/>
-            <a:ext cx="3502152" cy="3657600"/>
+            <a:off x="640080" y="1828800"/>
+            <a:ext cx="10881360" cy="1371600"/>
           </a:xfrm>
           <a:prstGeom prst="roundRect">
             <a:avLst>
-              <a:gd name="adj" fmla="val 2611"/>
+              <a:gd name="adj" fmla="val 6667"/>
             </a:avLst>
           </a:prstGeom>
           <a:solidFill>
@@ -2722,8 +2722,8 @@
         </p:nvSpPr>
         <p:spPr>
           <a:xfrm>
-            <a:off x="914400" y="2194560"/>
-            <a:ext cx="640080" cy="640080"/>
+            <a:off x="960120" y="2203704"/>
+            <a:ext cx="621792" cy="621792"/>
           </a:xfrm>
           <a:prstGeom prst="ellipse">
             <a:avLst/>
@@ -2742,8 +2742,8 @@
         </p:nvSpPr>
         <p:spPr>
           <a:xfrm>
-            <a:off x="914400" y="2194560"/>
-            <a:ext cx="640080" cy="640080"/>
+            <a:off x="960120" y="2203704"/>
+            <a:ext cx="621792" cy="621792"/>
           </a:xfrm>
           <a:prstGeom prst="rect">
             <a:avLst/>
@@ -2759,7 +2759,7 @@
               <a:buNone/>
             </a:pPr>
             <a:r>
-              <a:rPr lang="en-US" sz="2400" b="1" dirty="0">
+              <a:rPr lang="en-US" sz="2200" b="1" dirty="0">
                 <a:solidFill>
                   <a:srgbClr val="FFFFFF"/>
                 </a:solidFill>
@@ -2769,7 +2769,7 @@
               </a:rPr>
               <a:t>1</a:t>
             </a:r>
-            <a:endParaRPr lang="en-US" sz="2400" dirty="0"/>
+            <a:endParaRPr lang="en-US" sz="2200" dirty="0"/>
           </a:p>
         </p:txBody>
       </p:sp>
@@ -2781,8 +2781,8 @@
         </p:nvSpPr>
         <p:spPr>
           <a:xfrm>
-            <a:off x="914400" y="3017520"/>
-            <a:ext cx="2953512" cy="822960"/>
+            <a:off x="1828800" y="2029968"/>
+            <a:ext cx="9418320" cy="411480"/>
           </a:xfrm>
           <a:prstGeom prst="rect">
             <a:avLst/>
@@ -2820,8 +2820,8 @@
         </p:nvSpPr>
         <p:spPr>
           <a:xfrm>
-            <a:off x="914400" y="3794760"/>
-            <a:ext cx="2953512" cy="1554480"/>
+            <a:off x="1828800" y="2450592"/>
+            <a:ext cx="9418320" cy="594360"/>
           </a:xfrm>
           <a:prstGeom prst="rect">
             <a:avLst/>
@@ -2862,12 +2862,12 @@
         </p:nvSpPr>
         <p:spPr>
           <a:xfrm>
-            <a:off x="4416552" y="1874520"/>
-            <a:ext cx="3502152" cy="3657600"/>
+            <a:off x="640080" y="3346704"/>
+            <a:ext cx="10881360" cy="1371600"/>
           </a:xfrm>
           <a:prstGeom prst="roundRect">
             <a:avLst>
-              <a:gd name="adj" fmla="val 2611"/>
+              <a:gd name="adj" fmla="val 6667"/>
             </a:avLst>
           </a:prstGeom>
           <a:solidFill>
@@ -2889,8 +2889,8 @@
         </p:nvSpPr>
         <p:spPr>
           <a:xfrm>
-            <a:off x="4690872" y="2194560"/>
-            <a:ext cx="640080" cy="640080"/>
+            <a:off x="960120" y="3721608"/>
+            <a:ext cx="621792" cy="621792"/>
           </a:xfrm>
           <a:prstGeom prst="ellipse">
             <a:avLst/>
@@ -2909,8 +2909,8 @@
         </p:nvSpPr>
         <p:spPr>
           <a:xfrm>
-            <a:off x="4690872" y="2194560"/>
-            <a:ext cx="640080" cy="640080"/>
+            <a:off x="960120" y="3721608"/>
+            <a:ext cx="621792" cy="621792"/>
           </a:xfrm>
           <a:prstGeom prst="rect">
             <a:avLst/>
@@ -2926,7 +2926,7 @@
               <a:buNone/>
             </a:pPr>
             <a:r>
-              <a:rPr lang="en-US" sz="2400" b="1" dirty="0">
+              <a:rPr lang="en-US" sz="2200" b="1" dirty="0">
                 <a:solidFill>
                   <a:srgbClr val="FFFFFF"/>
                 </a:solidFill>
@@ -2936,7 +2936,7 @@
               </a:rPr>
               <a:t>2</a:t>
             </a:r>
-            <a:endParaRPr lang="en-US" sz="2400" dirty="0"/>
+            <a:endParaRPr lang="en-US" sz="2200" dirty="0"/>
           </a:p>
         </p:txBody>
       </p:sp>
@@ -2948,8 +2948,8 @@
         </p:nvSpPr>
         <p:spPr>
           <a:xfrm>
-            <a:off x="4690872" y="3017520"/>
-            <a:ext cx="2953512" cy="822960"/>
+            <a:off x="1828800" y="3547872"/>
+            <a:ext cx="9418320" cy="411480"/>
           </a:xfrm>
           <a:prstGeom prst="rect">
             <a:avLst/>
@@ -2987,8 +2987,8 @@
         </p:nvSpPr>
         <p:spPr>
           <a:xfrm>
-            <a:off x="4690872" y="3794760"/>
-            <a:ext cx="2953512" cy="1554480"/>
+            <a:off x="1828800" y="3968496"/>
+            <a:ext cx="9418320" cy="594360"/>
           </a:xfrm>
           <a:prstGeom prst="rect">
             <a:avLst/>
@@ -3029,12 +3029,12 @@
         </p:nvSpPr>
         <p:spPr>
           <a:xfrm>
-            <a:off x="8193024" y="1874520"/>
-            <a:ext cx="3502152" cy="3657600"/>
+            <a:off x="640080" y="4864608"/>
+            <a:ext cx="10881360" cy="1371600"/>
           </a:xfrm>
           <a:prstGeom prst="roundRect">
             <a:avLst>
-              <a:gd name="adj" fmla="val 2611"/>
+              <a:gd name="adj" fmla="val 6667"/>
             </a:avLst>
           </a:prstGeom>
           <a:solidFill>
@@ -3056,8 +3056,8 @@
         </p:nvSpPr>
         <p:spPr>
           <a:xfrm>
-            <a:off x="8467344" y="2194560"/>
-            <a:ext cx="640080" cy="640080"/>
+            <a:off x="960120" y="5239512"/>
+            <a:ext cx="621792" cy="621792"/>
           </a:xfrm>
           <a:prstGeom prst="ellipse">
             <a:avLst/>
@@ -3076,8 +3076,8 @@
         </p:nvSpPr>
         <p:spPr>
           <a:xfrm>
-            <a:off x="8467344" y="2194560"/>
-            <a:ext cx="640080" cy="640080"/>
+            <a:off x="960120" y="5239512"/>
+            <a:ext cx="621792" cy="621792"/>
           </a:xfrm>
           <a:prstGeom prst="rect">
             <a:avLst/>
@@ -3093,7 +3093,7 @@
               <a:buNone/>
             </a:pPr>
             <a:r>
-              <a:rPr lang="en-US" sz="2400" b="1" dirty="0">
+              <a:rPr lang="en-US" sz="2200" b="1" dirty="0">
                 <a:solidFill>
                   <a:srgbClr val="FFFFFF"/>
                 </a:solidFill>
@@ -3103,7 +3103,7 @@
               </a:rPr>
               <a:t>3</a:t>
             </a:r>
-            <a:endParaRPr lang="en-US" sz="2400" dirty="0"/>
+            <a:endParaRPr lang="en-US" sz="2200" dirty="0"/>
           </a:p>
         </p:txBody>
       </p:sp>
@@ -3115,8 +3115,8 @@
         </p:nvSpPr>
         <p:spPr>
           <a:xfrm>
-            <a:off x="8467344" y="3017520"/>
-            <a:ext cx="2953512" cy="822960"/>
+            <a:off x="1828800" y="5065776"/>
+            <a:ext cx="9418320" cy="411480"/>
           </a:xfrm>
           <a:prstGeom prst="rect">
             <a:avLst/>
@@ -3154,8 +3154,8 @@
         </p:nvSpPr>
         <p:spPr>
           <a:xfrm>
-            <a:off x="8467344" y="3794760"/>
-            <a:ext cx="2953512" cy="1554480"/>
+            <a:off x="1828800" y="5486400"/>
+            <a:ext cx="9418320" cy="594360"/>
           </a:xfrm>
           <a:prstGeom prst="rect">
             <a:avLst/>
@@ -3183,45 +3183,6 @@
                 <a:cs typeface="Calibri" pitchFamily="34" charset="-120"/>
               </a:rPr>
               <a:t>The stored-record count runs from 26 to 289 across the verification window, confirming genuinely live data.</a:t>
-            </a:r>
-            <a:endParaRPr lang="en-US" sz="1300" dirty="0"/>
-          </a:p>
-        </p:txBody>
-      </p:sp>
-      <p:sp>
-        <p:nvSpPr>
-          <p:cNvPr id="19" name="Text 17"/>
-          <p:cNvSpPr/>
-          <p:nvPr/>
-        </p:nvSpPr>
-        <p:spPr>
-          <a:xfrm>
-            <a:off x="640080" y="6263640"/>
-            <a:ext cx="10972800" cy="365760"/>
-          </a:xfrm>
-          <a:prstGeom prst="rect">
-            <a:avLst/>
-          </a:prstGeom>
-          <a:noFill/>
-          <a:ln/>
-        </p:spPr>
-        <p:txBody>
-          <a:bodyPr wrap="square" rtlCol="0" anchor="ctr"/>
-          <a:lstStyle/>
-          <a:p>
-            <a:pPr indent="0" marL="0">
-              <a:buNone/>
-            </a:pPr>
-            <a:r>
-              <a:rPr lang="en-US" sz="1300" i="1" dirty="0">
-                <a:solidFill>
-                  <a:srgbClr val="4FB077"/>
-                </a:solidFill>
-                <a:latin typeface="Calibri" pitchFamily="34" charset="0"/>
-                <a:ea typeface="Calibri" pitchFamily="34" charset="-122"/>
-                <a:cs typeface="Calibri" pitchFamily="34" charset="-120"/>
-              </a:rPr>
-              <a:t>Switch to the live dashboard here — backup video ready.</a:t>
             </a:r>
             <a:endParaRPr lang="en-US" sz="1300" dirty="0"/>
           </a:p>

--- a/ppt/NemiIshwarlalVikani_X24303046_ev-charging-network.pptx
+++ b/ppt/NemiIshwarlalVikani_X24303046_ev-charging-network.pptx
@@ -1299,14 +1299,9 @@
             </a:avLst>
           </a:prstGeom>
           <a:solidFill>
-            <a:srgbClr val="153A27"/>
-          </a:solidFill>
-          <a:ln w="12700">
-            <a:solidFill>
-              <a:srgbClr val="E3A83C"/>
-            </a:solidFill>
-            <a:prstDash val="solid"/>
-          </a:ln>
+            <a:srgbClr val="1E9450"/>
+          </a:solidFill>
+          <a:ln/>
         </p:spPr>
       </p:sp>
       <p:sp>
@@ -1336,7 +1331,7 @@
             <a:r>
               <a:rPr lang="en-US" sz="1350" b="1" dirty="0">
                 <a:solidFill>
-                  <a:srgbClr val="E3A83C"/>
+                  <a:srgbClr val="10281F"/>
                 </a:solidFill>
                 <a:latin typeface="Calibri" pitchFamily="34" charset="0"/>
                 <a:ea typeface="Calibri" pitchFamily="34" charset="-122"/>
@@ -1356,7 +1351,7 @@
         </p:nvSpPr>
         <p:spPr>
           <a:xfrm>
-            <a:off x="548640" y="4709160"/>
+            <a:off x="548640" y="4681728"/>
             <a:ext cx="2926080" cy="566928"/>
           </a:xfrm>
           <a:prstGeom prst="roundRect">
@@ -1365,14 +1360,9 @@
             </a:avLst>
           </a:prstGeom>
           <a:solidFill>
-            <a:srgbClr val="153A27"/>
-          </a:solidFill>
-          <a:ln w="12700">
-            <a:solidFill>
-              <a:srgbClr val="E3A83C"/>
-            </a:solidFill>
-            <a:prstDash val="solid"/>
-          </a:ln>
+            <a:srgbClr val="1E9450"/>
+          </a:solidFill>
+          <a:ln/>
         </p:spPr>
       </p:sp>
       <p:sp>
@@ -1383,7 +1373,7 @@
         </p:nvSpPr>
         <p:spPr>
           <a:xfrm>
-            <a:off x="548640" y="4709160"/>
+            <a:off x="548640" y="4681728"/>
             <a:ext cx="2926080" cy="566928"/>
           </a:xfrm>
           <a:prstGeom prst="rect">
@@ -1402,7 +1392,7 @@
             <a:r>
               <a:rPr lang="en-US" sz="1350" b="1" dirty="0">
                 <a:solidFill>
-                  <a:srgbClr val="E3A83C"/>
+                  <a:srgbClr val="10281F"/>
                 </a:solidFill>
                 <a:latin typeface="Calibri" pitchFamily="34" charset="0"/>
                 <a:ea typeface="Calibri" pitchFamily="34" charset="-122"/>
@@ -1422,7 +1412,7 @@
         </p:nvSpPr>
         <p:spPr>
           <a:xfrm>
-            <a:off x="548640" y="5394960"/>
+            <a:off x="548640" y="5340096"/>
             <a:ext cx="2926080" cy="566928"/>
           </a:xfrm>
           <a:prstGeom prst="roundRect">
@@ -1431,14 +1421,9 @@
             </a:avLst>
           </a:prstGeom>
           <a:solidFill>
-            <a:srgbClr val="153A27"/>
-          </a:solidFill>
-          <a:ln w="12700">
-            <a:solidFill>
-              <a:srgbClr val="E3A83C"/>
-            </a:solidFill>
-            <a:prstDash val="solid"/>
-          </a:ln>
+            <a:srgbClr val="1E9450"/>
+          </a:solidFill>
+          <a:ln/>
         </p:spPr>
       </p:sp>
       <p:sp>
@@ -1449,7 +1434,7 @@
         </p:nvSpPr>
         <p:spPr>
           <a:xfrm>
-            <a:off x="548640" y="5394960"/>
+            <a:off x="548640" y="5340096"/>
             <a:ext cx="2926080" cy="566928"/>
           </a:xfrm>
           <a:prstGeom prst="rect">
@@ -1468,7 +1453,7 @@
             <a:r>
               <a:rPr lang="en-US" sz="1350" b="1" dirty="0">
                 <a:solidFill>
-                  <a:srgbClr val="E3A83C"/>
+                  <a:srgbClr val="10281F"/>
                 </a:solidFill>
                 <a:latin typeface="Calibri" pitchFamily="34" charset="0"/>
                 <a:ea typeface="Calibri" pitchFamily="34" charset="-122"/>
@@ -1504,17 +1489,6 @@
             <a:pPr indent="0" marL="0">
               <a:buNone/>
             </a:pPr>
-            <a:r>
-              <a:rPr lang="en-US" sz="1250" dirty="0">
-                <a:solidFill>
-                  <a:srgbClr val="557064"/>
-                </a:solidFill>
-                <a:latin typeface="Calibri" pitchFamily="34" charset="0"/>
-                <a:ea typeface="Calibri" pitchFamily="34" charset="-122"/>
-                <a:cs typeface="Calibri" pitchFamily="34" charset="-120"/>
-              </a:rPr>
-              <a:t>Fog &amp; Edge Computing (H9FECC)   ·   deployed live on AWS</a:t>
-            </a:r>
             <a:endParaRPr lang="en-US" sz="1250" dirty="0"/>
           </a:p>
         </p:txBody>

--- a/ppt/NemiIshwarlalVikani_X24303046_ev-charging-network.pptx
+++ b/ppt/NemiIshwarlalVikani_X24303046_ev-charging-network.pptx
@@ -1124,7 +1124,7 @@
     <p:bg>
       <p:bgPr>
         <a:solidFill>
-          <a:srgbClr val="10281F"/>
+          <a:srgbClr val="0F1412"/>
         </a:solidFill>
       </p:bgPr>
     </p:bg>
@@ -1150,28 +1150,206 @@
         </p:nvSpPr>
         <p:spPr>
           <a:xfrm>
-            <a:off x="7528255" y="0"/>
-            <a:ext cx="4663440" cy="6858000"/>
-          </a:xfrm>
-          <a:prstGeom prst="rect">
-            <a:avLst/>
-          </a:prstGeom>
-          <a:solidFill>
-            <a:srgbClr val="12703C"/>
-          </a:solidFill>
-          <a:ln/>
-        </p:spPr>
-      </p:sp>
-      <p:sp>
-        <p:nvSpPr>
-          <p:cNvPr id="3" name="Text 1"/>
-          <p:cNvSpPr/>
-          <p:nvPr/>
-        </p:nvSpPr>
-        <p:spPr>
-          <a:xfrm>
-            <a:off x="7939735" y="1280160"/>
-            <a:ext cx="3749040" cy="2377440"/>
+            <a:off x="777240" y="6309360"/>
+            <a:ext cx="10637215" cy="0"/>
+          </a:xfrm>
+          <a:prstGeom prst="line">
+            <a:avLst/>
+          </a:prstGeom>
+          <a:noFill/>
+          <a:ln w="12700">
+            <a:solidFill>
+              <a:srgbClr val="27E881"/>
+            </a:solidFill>
+            <a:prstDash val="solid"/>
+          </a:ln>
+        </p:spPr>
+      </p:sp>
+      <p:sp>
+        <p:nvSpPr>
+          <p:cNvPr id="3" name="Shape 1"/>
+          <p:cNvSpPr/>
+          <p:nvPr/>
+        </p:nvSpPr>
+        <p:spPr>
+          <a:xfrm>
+            <a:off x="1033272" y="6245352"/>
+            <a:ext cx="128016" cy="128016"/>
+          </a:xfrm>
+          <a:prstGeom prst="ellipse">
+            <a:avLst/>
+          </a:prstGeom>
+          <a:solidFill>
+            <a:srgbClr val="0F1412"/>
+          </a:solidFill>
+          <a:ln w="12700">
+            <a:solidFill>
+              <a:srgbClr val="27E881"/>
+            </a:solidFill>
+            <a:prstDash val="solid"/>
+          </a:ln>
+        </p:spPr>
+      </p:sp>
+      <p:sp>
+        <p:nvSpPr>
+          <p:cNvPr id="4" name="Shape 2"/>
+          <p:cNvSpPr/>
+          <p:nvPr/>
+        </p:nvSpPr>
+        <p:spPr>
+          <a:xfrm>
+            <a:off x="2699461" y="6245352"/>
+            <a:ext cx="128016" cy="128016"/>
+          </a:xfrm>
+          <a:prstGeom prst="ellipse">
+            <a:avLst/>
+          </a:prstGeom>
+          <a:solidFill>
+            <a:srgbClr val="27E881"/>
+          </a:solidFill>
+          <a:ln w="12700">
+            <a:solidFill>
+              <a:srgbClr val="27E881"/>
+            </a:solidFill>
+            <a:prstDash val="solid"/>
+          </a:ln>
+        </p:spPr>
+      </p:sp>
+      <p:sp>
+        <p:nvSpPr>
+          <p:cNvPr id="5" name="Shape 3"/>
+          <p:cNvSpPr/>
+          <p:nvPr/>
+        </p:nvSpPr>
+        <p:spPr>
+          <a:xfrm>
+            <a:off x="4365650" y="6245352"/>
+            <a:ext cx="128016" cy="128016"/>
+          </a:xfrm>
+          <a:prstGeom prst="ellipse">
+            <a:avLst/>
+          </a:prstGeom>
+          <a:solidFill>
+            <a:srgbClr val="0F1412"/>
+          </a:solidFill>
+          <a:ln w="12700">
+            <a:solidFill>
+              <a:srgbClr val="27E881"/>
+            </a:solidFill>
+            <a:prstDash val="solid"/>
+          </a:ln>
+        </p:spPr>
+      </p:sp>
+      <p:sp>
+        <p:nvSpPr>
+          <p:cNvPr id="6" name="Shape 4"/>
+          <p:cNvSpPr/>
+          <p:nvPr/>
+        </p:nvSpPr>
+        <p:spPr>
+          <a:xfrm>
+            <a:off x="6031840" y="6245352"/>
+            <a:ext cx="128016" cy="128016"/>
+          </a:xfrm>
+          <a:prstGeom prst="ellipse">
+            <a:avLst/>
+          </a:prstGeom>
+          <a:solidFill>
+            <a:srgbClr val="27E881"/>
+          </a:solidFill>
+          <a:ln w="12700">
+            <a:solidFill>
+              <a:srgbClr val="27E881"/>
+            </a:solidFill>
+            <a:prstDash val="solid"/>
+          </a:ln>
+        </p:spPr>
+      </p:sp>
+      <p:sp>
+        <p:nvSpPr>
+          <p:cNvPr id="7" name="Shape 5"/>
+          <p:cNvSpPr/>
+          <p:nvPr/>
+        </p:nvSpPr>
+        <p:spPr>
+          <a:xfrm>
+            <a:off x="7698029" y="6245352"/>
+            <a:ext cx="128016" cy="128016"/>
+          </a:xfrm>
+          <a:prstGeom prst="ellipse">
+            <a:avLst/>
+          </a:prstGeom>
+          <a:solidFill>
+            <a:srgbClr val="0F1412"/>
+          </a:solidFill>
+          <a:ln w="12700">
+            <a:solidFill>
+              <a:srgbClr val="27E881"/>
+            </a:solidFill>
+            <a:prstDash val="solid"/>
+          </a:ln>
+        </p:spPr>
+      </p:sp>
+      <p:sp>
+        <p:nvSpPr>
+          <p:cNvPr id="8" name="Shape 6"/>
+          <p:cNvSpPr/>
+          <p:nvPr/>
+        </p:nvSpPr>
+        <p:spPr>
+          <a:xfrm>
+            <a:off x="9364218" y="6245352"/>
+            <a:ext cx="128016" cy="128016"/>
+          </a:xfrm>
+          <a:prstGeom prst="ellipse">
+            <a:avLst/>
+          </a:prstGeom>
+          <a:solidFill>
+            <a:srgbClr val="27E881"/>
+          </a:solidFill>
+          <a:ln w="12700">
+            <a:solidFill>
+              <a:srgbClr val="27E881"/>
+            </a:solidFill>
+            <a:prstDash val="solid"/>
+          </a:ln>
+        </p:spPr>
+      </p:sp>
+      <p:sp>
+        <p:nvSpPr>
+          <p:cNvPr id="9" name="Shape 7"/>
+          <p:cNvSpPr/>
+          <p:nvPr/>
+        </p:nvSpPr>
+        <p:spPr>
+          <a:xfrm>
+            <a:off x="11030407" y="6245352"/>
+            <a:ext cx="128016" cy="128016"/>
+          </a:xfrm>
+          <a:prstGeom prst="ellipse">
+            <a:avLst/>
+          </a:prstGeom>
+          <a:solidFill>
+            <a:srgbClr val="0F1412"/>
+          </a:solidFill>
+          <a:ln w="12700">
+            <a:solidFill>
+              <a:srgbClr val="27E881"/>
+            </a:solidFill>
+            <a:prstDash val="solid"/>
+          </a:ln>
+        </p:spPr>
+      </p:sp>
+      <p:sp>
+        <p:nvSpPr>
+          <p:cNvPr id="10" name="Text 8"/>
+          <p:cNvSpPr/>
+          <p:nvPr/>
+        </p:nvSpPr>
+        <p:spPr>
+          <a:xfrm>
+            <a:off x="758952" y="1645920"/>
+            <a:ext cx="10637215" cy="1645920"/>
           </a:xfrm>
           <a:prstGeom prst="rect">
             <a:avLst/>
@@ -1181,54 +1359,57 @@
         </p:spPr>
         <p:txBody>
           <a:bodyPr wrap="square" rtlCol="0" anchor="t"/>
+          <a:lstStyle/>
+          <a:p>
+            <a:pPr indent="0" marL="0">
+              <a:lnSpc>
+                <a:spcPct val="98000"/>
+              </a:lnSpc>
+              <a:buNone/>
+            </a:pPr>
+            <a:r>
+              <a:rPr lang="en-US" sz="3800" b="1" dirty="0">
+                <a:solidFill>
+                  <a:srgbClr val="EAF3EE"/>
+                </a:solidFill>
+                <a:latin typeface="Calibri" pitchFamily="34" charset="0"/>
+                <a:ea typeface="Calibri" pitchFamily="34" charset="-122"/>
+                <a:cs typeface="Calibri" pitchFamily="34" charset="-120"/>
+              </a:rPr>
+              <a:t>EV Charging Network Monitoring</a:t>
+            </a:r>
+            <a:endParaRPr lang="en-US" sz="3800" dirty="0"/>
+          </a:p>
+        </p:txBody>
+      </p:sp>
+      <p:sp>
+        <p:nvSpPr>
+          <p:cNvPr id="11" name="Text 9"/>
+          <p:cNvSpPr/>
+          <p:nvPr/>
+        </p:nvSpPr>
+        <p:spPr>
+          <a:xfrm>
+            <a:off x="777240" y="3337560"/>
+            <a:ext cx="10637215" cy="365760"/>
+          </a:xfrm>
+          <a:prstGeom prst="rect">
+            <a:avLst/>
+          </a:prstGeom>
+          <a:noFill/>
+          <a:ln/>
+        </p:spPr>
+        <p:txBody>
+          <a:bodyPr wrap="square" rtlCol="0" anchor="ctr"/>
           <a:lstStyle/>
           <a:p>
             <a:pPr indent="0" marL="0">
               <a:buNone/>
             </a:pPr>
             <a:r>
-              <a:rPr lang="en-US" sz="3400" b="1" dirty="0">
+              <a:rPr lang="en-US" sz="1450" dirty="0">
                 <a:solidFill>
-                  <a:srgbClr val="FFFFFF"/>
-                </a:solidFill>
-                <a:latin typeface="Times New Roman" pitchFamily="34" charset="0"/>
-                <a:ea typeface="Times New Roman" pitchFamily="34" charset="-122"/>
-                <a:cs typeface="Times New Roman" pitchFamily="34" charset="-120"/>
-              </a:rPr>
-              <a:t>EV Charging Network Monitoring</a:t>
-            </a:r>
-            <a:endParaRPr lang="en-US" sz="3400" dirty="0"/>
-          </a:p>
-        </p:txBody>
-      </p:sp>
-      <p:sp>
-        <p:nvSpPr>
-          <p:cNvPr id="4" name="Text 2"/>
-          <p:cNvSpPr/>
-          <p:nvPr/>
-        </p:nvSpPr>
-        <p:spPr>
-          <a:xfrm>
-            <a:off x="7958023" y="5394960"/>
-            <a:ext cx="3840480" cy="731520"/>
-          </a:xfrm>
-          <a:prstGeom prst="rect">
-            <a:avLst/>
-          </a:prstGeom>
-          <a:noFill/>
-          <a:ln/>
-        </p:spPr>
-        <p:txBody>
-          <a:bodyPr wrap="square" rtlCol="0" anchor="ctr"/>
-          <a:lstStyle/>
-          <a:p>
-            <a:pPr indent="0" marL="0">
-              <a:buNone/>
-            </a:pPr>
-            <a:r>
-              <a:rPr lang="en-US" sz="1500" dirty="0">
-                <a:solidFill>
-                  <a:srgbClr val="CDE9D8"/>
+                  <a:srgbClr val="8B98A6"/>
                 </a:solidFill>
                 <a:latin typeface="Calibri" pitchFamily="34" charset="0"/>
                 <a:ea typeface="Calibri" pitchFamily="34" charset="-122"/>
@@ -1236,41 +1417,41 @@
               </a:rPr>
               <a:t>Nemi Ishwarlal Vikani   ·   X24303046</a:t>
             </a:r>
-            <a:endParaRPr lang="en-US" sz="1500" dirty="0"/>
-          </a:p>
-        </p:txBody>
-      </p:sp>
-      <p:sp>
-        <p:nvSpPr>
-          <p:cNvPr id="5" name="Text 3"/>
-          <p:cNvSpPr/>
-          <p:nvPr/>
-        </p:nvSpPr>
-        <p:spPr>
-          <a:xfrm>
-            <a:off x="548640" y="1371600"/>
-            <a:ext cx="6492240" cy="2011680"/>
-          </a:xfrm>
-          <a:prstGeom prst="rect">
-            <a:avLst/>
-          </a:prstGeom>
-          <a:noFill/>
-          <a:ln/>
-        </p:spPr>
-        <p:txBody>
-          <a:bodyPr wrap="square" rtlCol="0" anchor="ctr"/>
+            <a:endParaRPr lang="en-US" sz="1450" dirty="0"/>
+          </a:p>
+        </p:txBody>
+      </p:sp>
+      <p:sp>
+        <p:nvSpPr>
+          <p:cNvPr id="12" name="Text 10"/>
+          <p:cNvSpPr/>
+          <p:nvPr/>
+        </p:nvSpPr>
+        <p:spPr>
+          <a:xfrm>
+            <a:off x="777240" y="3931920"/>
+            <a:ext cx="8138160" cy="1325880"/>
+          </a:xfrm>
+          <a:prstGeom prst="rect">
+            <a:avLst/>
+          </a:prstGeom>
+          <a:noFill/>
+          <a:ln/>
+        </p:spPr>
+        <p:txBody>
+          <a:bodyPr wrap="square" rtlCol="0" anchor="t"/>
           <a:lstStyle/>
           <a:p>
             <a:pPr indent="0" marL="0">
               <a:lnSpc>
-                <a:spcPct val="112000"/>
+                <a:spcPct val="130000"/>
               </a:lnSpc>
               <a:buNone/>
             </a:pPr>
             <a:r>
-              <a:rPr lang="en-US" sz="2000" dirty="0">
+              <a:rPr lang="en-US" sz="1400" dirty="0">
                 <a:solidFill>
-                  <a:srgbClr val="CDE9D8"/>
+                  <a:srgbClr val="EAF3EE"/>
                 </a:solidFill>
                 <a:latin typeface="Calibri" pitchFamily="34" charset="0"/>
                 <a:ea typeface="Calibri" pitchFamily="34" charset="-122"/>
@@ -1278,218 +1459,7 @@
               </a:rPr>
               <a:t>Conditions at a charging hub move in seconds — a manual round or an hourly poll leaves an overloaded or overheating bay unnoticed for the whole gap between checks.</a:t>
             </a:r>
-            <a:endParaRPr lang="en-US" sz="2000" dirty="0"/>
-          </a:p>
-        </p:txBody>
-      </p:sp>
-      <p:sp>
-        <p:nvSpPr>
-          <p:cNvPr id="6" name="Shape 4"/>
-          <p:cNvSpPr/>
-          <p:nvPr/>
-        </p:nvSpPr>
-        <p:spPr>
-          <a:xfrm>
-            <a:off x="548640" y="4023360"/>
-            <a:ext cx="2926080" cy="566928"/>
-          </a:xfrm>
-          <a:prstGeom prst="roundRect">
-            <a:avLst>
-              <a:gd name="adj" fmla="val 50000"/>
-            </a:avLst>
-          </a:prstGeom>
-          <a:solidFill>
-            <a:srgbClr val="1E9450"/>
-          </a:solidFill>
-          <a:ln/>
-        </p:spPr>
-      </p:sp>
-      <p:sp>
-        <p:nvSpPr>
-          <p:cNvPr id="7" name="Text 5"/>
-          <p:cNvSpPr/>
-          <p:nvPr/>
-        </p:nvSpPr>
-        <p:spPr>
-          <a:xfrm>
-            <a:off x="548640" y="4023360"/>
-            <a:ext cx="2926080" cy="566928"/>
-          </a:xfrm>
-          <a:prstGeom prst="rect">
-            <a:avLst/>
-          </a:prstGeom>
-          <a:noFill/>
-          <a:ln/>
-        </p:spPr>
-        <p:txBody>
-          <a:bodyPr wrap="square" lIns="0" tIns="0" rIns="0" bIns="0" rtlCol="0" anchor="ctr"/>
-          <a:lstStyle/>
-          <a:p>
-            <a:pPr algn="ctr" indent="0" marL="0">
-              <a:buNone/>
-            </a:pPr>
-            <a:r>
-              <a:rPr lang="en-US" sz="1350" b="1" dirty="0">
-                <a:solidFill>
-                  <a:srgbClr val="10281F"/>
-                </a:solidFill>
-                <a:latin typeface="Calibri" pitchFamily="34" charset="0"/>
-                <a:ea typeface="Calibri" pitchFamily="34" charset="-122"/>
-                <a:cs typeface="Calibri" pitchFamily="34" charset="-120"/>
-              </a:rPr>
-              <a:t>Current &gt; 32 A</a:t>
-            </a:r>
-            <a:endParaRPr lang="en-US" sz="1350" dirty="0"/>
-          </a:p>
-        </p:txBody>
-      </p:sp>
-      <p:sp>
-        <p:nvSpPr>
-          <p:cNvPr id="8" name="Shape 6"/>
-          <p:cNvSpPr/>
-          <p:nvPr/>
-        </p:nvSpPr>
-        <p:spPr>
-          <a:xfrm>
-            <a:off x="548640" y="4681728"/>
-            <a:ext cx="2926080" cy="566928"/>
-          </a:xfrm>
-          <a:prstGeom prst="roundRect">
-            <a:avLst>
-              <a:gd name="adj" fmla="val 50000"/>
-            </a:avLst>
-          </a:prstGeom>
-          <a:solidFill>
-            <a:srgbClr val="1E9450"/>
-          </a:solidFill>
-          <a:ln/>
-        </p:spPr>
-      </p:sp>
-      <p:sp>
-        <p:nvSpPr>
-          <p:cNvPr id="9" name="Text 7"/>
-          <p:cNvSpPr/>
-          <p:nvPr/>
-        </p:nvSpPr>
-        <p:spPr>
-          <a:xfrm>
-            <a:off x="548640" y="4681728"/>
-            <a:ext cx="2926080" cy="566928"/>
-          </a:xfrm>
-          <a:prstGeom prst="rect">
-            <a:avLst/>
-          </a:prstGeom>
-          <a:noFill/>
-          <a:ln/>
-        </p:spPr>
-        <p:txBody>
-          <a:bodyPr wrap="square" lIns="0" tIns="0" rIns="0" bIns="0" rtlCol="0" anchor="ctr"/>
-          <a:lstStyle/>
-          <a:p>
-            <a:pPr algn="ctr" indent="0" marL="0">
-              <a:buNone/>
-            </a:pPr>
-            <a:r>
-              <a:rPr lang="en-US" sz="1350" b="1" dirty="0">
-                <a:solidFill>
-                  <a:srgbClr val="10281F"/>
-                </a:solidFill>
-                <a:latin typeface="Calibri" pitchFamily="34" charset="0"/>
-                <a:ea typeface="Calibri" pitchFamily="34" charset="-122"/>
-                <a:cs typeface="Calibri" pitchFamily="34" charset="-120"/>
-              </a:rPr>
-              <a:t>Station &gt; 45 °C</a:t>
-            </a:r>
-            <a:endParaRPr lang="en-US" sz="1350" dirty="0"/>
-          </a:p>
-        </p:txBody>
-      </p:sp>
-      <p:sp>
-        <p:nvSpPr>
-          <p:cNvPr id="10" name="Shape 8"/>
-          <p:cNvSpPr/>
-          <p:nvPr/>
-        </p:nvSpPr>
-        <p:spPr>
-          <a:xfrm>
-            <a:off x="548640" y="5340096"/>
-            <a:ext cx="2926080" cy="566928"/>
-          </a:xfrm>
-          <a:prstGeom prst="roundRect">
-            <a:avLst>
-              <a:gd name="adj" fmla="val 50000"/>
-            </a:avLst>
-          </a:prstGeom>
-          <a:solidFill>
-            <a:srgbClr val="1E9450"/>
-          </a:solidFill>
-          <a:ln/>
-        </p:spPr>
-      </p:sp>
-      <p:sp>
-        <p:nvSpPr>
-          <p:cNvPr id="11" name="Text 9"/>
-          <p:cNvSpPr/>
-          <p:nvPr/>
-        </p:nvSpPr>
-        <p:spPr>
-          <a:xfrm>
-            <a:off x="548640" y="5340096"/>
-            <a:ext cx="2926080" cy="566928"/>
-          </a:xfrm>
-          <a:prstGeom prst="rect">
-            <a:avLst/>
-          </a:prstGeom>
-          <a:noFill/>
-          <a:ln/>
-        </p:spPr>
-        <p:txBody>
-          <a:bodyPr wrap="square" lIns="0" tIns="0" rIns="0" bIns="0" rtlCol="0" anchor="ctr"/>
-          <a:lstStyle/>
-          <a:p>
-            <a:pPr algn="ctr" indent="0" marL="0">
-              <a:buNone/>
-            </a:pPr>
-            <a:r>
-              <a:rPr lang="en-US" sz="1350" b="1" dirty="0">
-                <a:solidFill>
-                  <a:srgbClr val="10281F"/>
-                </a:solidFill>
-                <a:latin typeface="Calibri" pitchFamily="34" charset="0"/>
-                <a:ea typeface="Calibri" pitchFamily="34" charset="-122"/>
-                <a:cs typeface="Calibri" pitchFamily="34" charset="-120"/>
-              </a:rPr>
-              <a:t>Grid draw &gt; 80 kW</a:t>
-            </a:r>
-            <a:endParaRPr lang="en-US" sz="1350" dirty="0"/>
-          </a:p>
-        </p:txBody>
-      </p:sp>
-      <p:sp>
-        <p:nvSpPr>
-          <p:cNvPr id="12" name="Text 10"/>
-          <p:cNvSpPr/>
-          <p:nvPr/>
-        </p:nvSpPr>
-        <p:spPr>
-          <a:xfrm>
-            <a:off x="548640" y="6172200"/>
-            <a:ext cx="6217920" cy="365760"/>
-          </a:xfrm>
-          <a:prstGeom prst="rect">
-            <a:avLst/>
-          </a:prstGeom>
-          <a:noFill/>
-          <a:ln/>
-        </p:spPr>
-        <p:txBody>
-          <a:bodyPr wrap="square" rtlCol="0" anchor="ctr"/>
-          <a:lstStyle/>
-          <a:p>
-            <a:pPr indent="0" marL="0">
-              <a:buNone/>
-            </a:pPr>
-            <a:endParaRPr lang="en-US" sz="1250" dirty="0"/>
+            <a:endParaRPr lang="en-US" sz="1400" dirty="0"/>
           </a:p>
         </p:txBody>
       </p:sp>
@@ -1507,7 +1477,7 @@
     <p:bg>
       <p:bgPr>
         <a:solidFill>
-          <a:srgbClr val="FFFFFF"/>
+          <a:srgbClr val="0F1412"/>
         </a:solidFill>
       </p:bgPr>
     </p:bg>
@@ -1527,23 +1497,221 @@
       </p:grpSpPr>
       <p:sp>
         <p:nvSpPr>
-          <p:cNvPr id="2" name="Text 0"/>
-          <p:cNvSpPr/>
-          <p:nvPr/>
-        </p:nvSpPr>
-        <p:spPr>
-          <a:xfrm>
-            <a:off x="640080" y="457200"/>
-            <a:ext cx="10972800" cy="640080"/>
-          </a:xfrm>
-          <a:prstGeom prst="rect">
-            <a:avLst/>
-          </a:prstGeom>
-          <a:noFill/>
-          <a:ln/>
-        </p:spPr>
-        <p:txBody>
-          <a:bodyPr wrap="square" rtlCol="0" anchor="ctr"/>
+          <p:cNvPr id="2" name="Shape 0"/>
+          <p:cNvSpPr/>
+          <p:nvPr/>
+        </p:nvSpPr>
+        <p:spPr>
+          <a:xfrm>
+            <a:off x="777240" y="6309360"/>
+            <a:ext cx="10637215" cy="0"/>
+          </a:xfrm>
+          <a:prstGeom prst="line">
+            <a:avLst/>
+          </a:prstGeom>
+          <a:noFill/>
+          <a:ln w="12700">
+            <a:solidFill>
+              <a:srgbClr val="27E881"/>
+            </a:solidFill>
+            <a:prstDash val="solid"/>
+          </a:ln>
+        </p:spPr>
+      </p:sp>
+      <p:sp>
+        <p:nvSpPr>
+          <p:cNvPr id="3" name="Shape 1"/>
+          <p:cNvSpPr/>
+          <p:nvPr/>
+        </p:nvSpPr>
+        <p:spPr>
+          <a:xfrm>
+            <a:off x="1033272" y="6245352"/>
+            <a:ext cx="128016" cy="128016"/>
+          </a:xfrm>
+          <a:prstGeom prst="ellipse">
+            <a:avLst/>
+          </a:prstGeom>
+          <a:solidFill>
+            <a:srgbClr val="0F1412"/>
+          </a:solidFill>
+          <a:ln w="12700">
+            <a:solidFill>
+              <a:srgbClr val="27E881"/>
+            </a:solidFill>
+            <a:prstDash val="solid"/>
+          </a:ln>
+        </p:spPr>
+      </p:sp>
+      <p:sp>
+        <p:nvSpPr>
+          <p:cNvPr id="4" name="Shape 2"/>
+          <p:cNvSpPr/>
+          <p:nvPr/>
+        </p:nvSpPr>
+        <p:spPr>
+          <a:xfrm>
+            <a:off x="2699461" y="6245352"/>
+            <a:ext cx="128016" cy="128016"/>
+          </a:xfrm>
+          <a:prstGeom prst="ellipse">
+            <a:avLst/>
+          </a:prstGeom>
+          <a:solidFill>
+            <a:srgbClr val="27E881"/>
+          </a:solidFill>
+          <a:ln w="12700">
+            <a:solidFill>
+              <a:srgbClr val="27E881"/>
+            </a:solidFill>
+            <a:prstDash val="solid"/>
+          </a:ln>
+        </p:spPr>
+      </p:sp>
+      <p:sp>
+        <p:nvSpPr>
+          <p:cNvPr id="5" name="Shape 3"/>
+          <p:cNvSpPr/>
+          <p:nvPr/>
+        </p:nvSpPr>
+        <p:spPr>
+          <a:xfrm>
+            <a:off x="4365650" y="6245352"/>
+            <a:ext cx="128016" cy="128016"/>
+          </a:xfrm>
+          <a:prstGeom prst="ellipse">
+            <a:avLst/>
+          </a:prstGeom>
+          <a:solidFill>
+            <a:srgbClr val="0F1412"/>
+          </a:solidFill>
+          <a:ln w="12700">
+            <a:solidFill>
+              <a:srgbClr val="27E881"/>
+            </a:solidFill>
+            <a:prstDash val="solid"/>
+          </a:ln>
+        </p:spPr>
+      </p:sp>
+      <p:sp>
+        <p:nvSpPr>
+          <p:cNvPr id="6" name="Shape 4"/>
+          <p:cNvSpPr/>
+          <p:nvPr/>
+        </p:nvSpPr>
+        <p:spPr>
+          <a:xfrm>
+            <a:off x="6031840" y="6245352"/>
+            <a:ext cx="128016" cy="128016"/>
+          </a:xfrm>
+          <a:prstGeom prst="ellipse">
+            <a:avLst/>
+          </a:prstGeom>
+          <a:solidFill>
+            <a:srgbClr val="27E881"/>
+          </a:solidFill>
+          <a:ln w="12700">
+            <a:solidFill>
+              <a:srgbClr val="27E881"/>
+            </a:solidFill>
+            <a:prstDash val="solid"/>
+          </a:ln>
+        </p:spPr>
+      </p:sp>
+      <p:sp>
+        <p:nvSpPr>
+          <p:cNvPr id="7" name="Shape 5"/>
+          <p:cNvSpPr/>
+          <p:nvPr/>
+        </p:nvSpPr>
+        <p:spPr>
+          <a:xfrm>
+            <a:off x="7698029" y="6245352"/>
+            <a:ext cx="128016" cy="128016"/>
+          </a:xfrm>
+          <a:prstGeom prst="ellipse">
+            <a:avLst/>
+          </a:prstGeom>
+          <a:solidFill>
+            <a:srgbClr val="0F1412"/>
+          </a:solidFill>
+          <a:ln w="12700">
+            <a:solidFill>
+              <a:srgbClr val="27E881"/>
+            </a:solidFill>
+            <a:prstDash val="solid"/>
+          </a:ln>
+        </p:spPr>
+      </p:sp>
+      <p:sp>
+        <p:nvSpPr>
+          <p:cNvPr id="8" name="Shape 6"/>
+          <p:cNvSpPr/>
+          <p:nvPr/>
+        </p:nvSpPr>
+        <p:spPr>
+          <a:xfrm>
+            <a:off x="9364218" y="6245352"/>
+            <a:ext cx="128016" cy="128016"/>
+          </a:xfrm>
+          <a:prstGeom prst="ellipse">
+            <a:avLst/>
+          </a:prstGeom>
+          <a:solidFill>
+            <a:srgbClr val="27E881"/>
+          </a:solidFill>
+          <a:ln w="12700">
+            <a:solidFill>
+              <a:srgbClr val="27E881"/>
+            </a:solidFill>
+            <a:prstDash val="solid"/>
+          </a:ln>
+        </p:spPr>
+      </p:sp>
+      <p:sp>
+        <p:nvSpPr>
+          <p:cNvPr id="9" name="Shape 7"/>
+          <p:cNvSpPr/>
+          <p:nvPr/>
+        </p:nvSpPr>
+        <p:spPr>
+          <a:xfrm>
+            <a:off x="11030407" y="6245352"/>
+            <a:ext cx="128016" cy="128016"/>
+          </a:xfrm>
+          <a:prstGeom prst="ellipse">
+            <a:avLst/>
+          </a:prstGeom>
+          <a:solidFill>
+            <a:srgbClr val="0F1412"/>
+          </a:solidFill>
+          <a:ln w="12700">
+            <a:solidFill>
+              <a:srgbClr val="27E881"/>
+            </a:solidFill>
+            <a:prstDash val="solid"/>
+          </a:ln>
+        </p:spPr>
+      </p:sp>
+      <p:sp>
+        <p:nvSpPr>
+          <p:cNvPr id="10" name="Text 8"/>
+          <p:cNvSpPr/>
+          <p:nvPr/>
+        </p:nvSpPr>
+        <p:spPr>
+          <a:xfrm>
+            <a:off x="777240" y="731520"/>
+            <a:ext cx="914400" cy="640080"/>
+          </a:xfrm>
+          <a:prstGeom prst="rect">
+            <a:avLst/>
+          </a:prstGeom>
+          <a:noFill/>
+          <a:ln/>
+        </p:spPr>
+        <p:txBody>
+          <a:bodyPr wrap="square" lIns="0" tIns="0" rIns="0" bIns="0" rtlCol="0" anchor="ctr"/>
           <a:lstStyle/>
           <a:p>
             <a:pPr indent="0" marL="0">
@@ -1552,40 +1720,118 @@
             <a:r>
               <a:rPr lang="en-US" sz="3000" b="1" dirty="0">
                 <a:solidFill>
-                  <a:srgbClr val="10281E"/>
+                  <a:srgbClr val="27E881"/>
                 </a:solidFill>
-                <a:latin typeface="Times New Roman" pitchFamily="34" charset="0"/>
-                <a:ea typeface="Times New Roman" pitchFamily="34" charset="-122"/>
-                <a:cs typeface="Times New Roman" pitchFamily="34" charset="-120"/>
+                <a:latin typeface="Calibri" pitchFamily="34" charset="0"/>
+                <a:ea typeface="Calibri" pitchFamily="34" charset="-122"/>
+                <a:cs typeface="Calibri" pitchFamily="34" charset="-120"/>
+              </a:rPr>
+              <a:t>01</a:t>
+            </a:r>
+            <a:endParaRPr lang="en-US" sz="3000" dirty="0"/>
+          </a:p>
+        </p:txBody>
+      </p:sp>
+      <p:sp>
+        <p:nvSpPr>
+          <p:cNvPr id="11" name="Text 9"/>
+          <p:cNvSpPr/>
+          <p:nvPr/>
+        </p:nvSpPr>
+        <p:spPr>
+          <a:xfrm>
+            <a:off x="1645920" y="905256"/>
+            <a:ext cx="9768535" cy="274320"/>
+          </a:xfrm>
+          <a:prstGeom prst="rect">
+            <a:avLst/>
+          </a:prstGeom>
+          <a:noFill/>
+          <a:ln/>
+        </p:spPr>
+        <p:txBody>
+          <a:bodyPr wrap="square" lIns="0" tIns="0" rIns="0" bIns="0" rtlCol="0" anchor="ctr"/>
+          <a:lstStyle/>
+          <a:p>
+            <a:pPr indent="0" marL="0">
+              <a:buNone/>
+            </a:pPr>
+            <a:r>
+              <a:rPr lang="en-US" sz="1100" b="1" spc="200" kern="0" dirty="0">
+                <a:solidFill>
+                  <a:srgbClr val="8B98A6"/>
+                </a:solidFill>
+                <a:latin typeface="Calibri" pitchFamily="34" charset="0"/>
+                <a:ea typeface="Calibri" pitchFamily="34" charset="-122"/>
+                <a:cs typeface="Calibri" pitchFamily="34" charset="-120"/>
+              </a:rPr>
+              <a:t>ARCHITECTURE</a:t>
+            </a:r>
+            <a:endParaRPr lang="en-US" sz="1100" dirty="0"/>
+          </a:p>
+        </p:txBody>
+      </p:sp>
+      <p:sp>
+        <p:nvSpPr>
+          <p:cNvPr id="12" name="Text 10"/>
+          <p:cNvSpPr/>
+          <p:nvPr/>
+        </p:nvSpPr>
+        <p:spPr>
+          <a:xfrm>
+            <a:off x="777240" y="1380744"/>
+            <a:ext cx="10637215" cy="640080"/>
+          </a:xfrm>
+          <a:prstGeom prst="rect">
+            <a:avLst/>
+          </a:prstGeom>
+          <a:noFill/>
+          <a:ln/>
+        </p:spPr>
+        <p:txBody>
+          <a:bodyPr wrap="square" lIns="0" tIns="0" rIns="0" bIns="0" rtlCol="0" anchor="ctr"/>
+          <a:lstStyle/>
+          <a:p>
+            <a:pPr indent="0" marL="0">
+              <a:buNone/>
+            </a:pPr>
+            <a:r>
+              <a:rPr lang="en-US" sz="2300" b="1" dirty="0">
+                <a:solidFill>
+                  <a:srgbClr val="EAF3EE"/>
+                </a:solidFill>
+                <a:latin typeface="Calibri" pitchFamily="34" charset="0"/>
+                <a:ea typeface="Calibri" pitchFamily="34" charset="-122"/>
+                <a:cs typeface="Calibri" pitchFamily="34" charset="-120"/>
               </a:rPr>
               <a:t>What I Built — Edge to Cloud</a:t>
             </a:r>
-            <a:endParaRPr lang="en-US" sz="3000" dirty="0"/>
-          </a:p>
-        </p:txBody>
-      </p:sp>
-      <p:sp>
-        <p:nvSpPr>
-          <p:cNvPr id="3" name="Shape 1"/>
-          <p:cNvSpPr/>
-          <p:nvPr/>
-        </p:nvSpPr>
-        <p:spPr>
-          <a:xfrm>
-            <a:off x="3992728" y="1234440"/>
-            <a:ext cx="4206240" cy="658368"/>
+            <a:endParaRPr lang="en-US" sz="2300" dirty="0"/>
+          </a:p>
+        </p:txBody>
+      </p:sp>
+      <p:sp>
+        <p:nvSpPr>
+          <p:cNvPr id="13" name="Shape 11"/>
+          <p:cNvSpPr/>
+          <p:nvPr/>
+        </p:nvSpPr>
+        <p:spPr>
+          <a:xfrm>
+            <a:off x="777240" y="2971800"/>
+            <a:ext cx="1391869" cy="1965960"/>
           </a:xfrm>
           <a:prstGeom prst="roundRect">
             <a:avLst>
-              <a:gd name="adj" fmla="val 11111"/>
+              <a:gd name="adj" fmla="val 2628"/>
             </a:avLst>
           </a:prstGeom>
           <a:solidFill>
-            <a:srgbClr val="EDF6F0"/>
-          </a:solidFill>
-          <a:ln w="17780">
+            <a:srgbClr val="27E881"/>
+          </a:solidFill>
+          <a:ln w="12700">
             <a:solidFill>
-              <a:srgbClr val="4FB077"/>
+              <a:srgbClr val="27E881"/>
             </a:solidFill>
             <a:prstDash val="solid"/>
           </a:ln>
@@ -1593,34 +1839,14 @@
       </p:sp>
       <p:sp>
         <p:nvSpPr>
-          <p:cNvPr id="4" name="Shape 2"/>
-          <p:cNvSpPr/>
-          <p:nvPr/>
-        </p:nvSpPr>
-        <p:spPr>
-          <a:xfrm>
-            <a:off x="4193896" y="1481328"/>
-            <a:ext cx="164592" cy="164592"/>
-          </a:xfrm>
-          <a:prstGeom prst="ellipse">
-            <a:avLst/>
-          </a:prstGeom>
-          <a:solidFill>
-            <a:srgbClr val="4FB077"/>
-          </a:solidFill>
-          <a:ln/>
-        </p:spPr>
-      </p:sp>
-      <p:sp>
-        <p:nvSpPr>
-          <p:cNvPr id="5" name="Text 3"/>
-          <p:cNvSpPr/>
-          <p:nvPr/>
-        </p:nvSpPr>
-        <p:spPr>
-          <a:xfrm>
-            <a:off x="4495648" y="1234440"/>
-            <a:ext cx="2194560" cy="658368"/>
+          <p:cNvPr id="14" name="Text 12"/>
+          <p:cNvSpPr/>
+          <p:nvPr/>
+        </p:nvSpPr>
+        <p:spPr>
+          <a:xfrm>
+            <a:off x="923544" y="3154680"/>
+            <a:ext cx="1099261" cy="320040"/>
           </a:xfrm>
           <a:prstGeom prst="rect">
             <a:avLst/>
@@ -1636,9 +1862,51 @@
               <a:buNone/>
             </a:pPr>
             <a:r>
-              <a:rPr lang="en-US" sz="1350" b="1" dirty="0">
+              <a:rPr lang="en-US" sz="1100" dirty="0">
                 <a:solidFill>
-                  <a:srgbClr val="10281E"/>
+                  <a:srgbClr val="111111"/>
+                </a:solidFill>
+                <a:latin typeface="Consolas" pitchFamily="34" charset="0"/>
+                <a:ea typeface="Consolas" pitchFamily="34" charset="-122"/>
+                <a:cs typeface="Consolas" pitchFamily="34" charset="-120"/>
+              </a:rPr>
+              <a:t>01</a:t>
+            </a:r>
+            <a:endParaRPr lang="en-US" sz="1100" dirty="0"/>
+          </a:p>
+        </p:txBody>
+      </p:sp>
+      <p:sp>
+        <p:nvSpPr>
+          <p:cNvPr id="15" name="Text 13"/>
+          <p:cNvSpPr/>
+          <p:nvPr/>
+        </p:nvSpPr>
+        <p:spPr>
+          <a:xfrm>
+            <a:off x="923544" y="3593592"/>
+            <a:ext cx="1099261" cy="868680"/>
+          </a:xfrm>
+          <a:prstGeom prst="rect">
+            <a:avLst/>
+          </a:prstGeom>
+          <a:noFill/>
+          <a:ln/>
+        </p:spPr>
+        <p:txBody>
+          <a:bodyPr wrap="square" lIns="0" tIns="0" rIns="0" bIns="0" rtlCol="0" anchor="t"/>
+          <a:lstStyle/>
+          <a:p>
+            <a:pPr indent="0" marL="0">
+              <a:lnSpc>
+                <a:spcPct val="96000"/>
+              </a:lnSpc>
+              <a:buNone/>
+            </a:pPr>
+            <a:r>
+              <a:rPr lang="en-US" sz="1300" b="1" dirty="0">
+                <a:solidFill>
+                  <a:srgbClr val="111111"/>
                 </a:solidFill>
                 <a:latin typeface="Calibri" pitchFamily="34" charset="0"/>
                 <a:ea typeface="Calibri" pitchFamily="34" charset="-122"/>
@@ -1646,20 +1914,20 @@
               </a:rPr>
               <a:t>Hub sensors</a:t>
             </a:r>
-            <a:endParaRPr lang="en-US" sz="1350" dirty="0"/>
-          </a:p>
-        </p:txBody>
-      </p:sp>
-      <p:sp>
-        <p:nvSpPr>
-          <p:cNvPr id="6" name="Text 4"/>
-          <p:cNvSpPr/>
-          <p:nvPr/>
-        </p:nvSpPr>
-        <p:spPr>
-          <a:xfrm>
-            <a:off x="6644488" y="1234440"/>
-            <a:ext cx="1463040" cy="658368"/>
+            <a:endParaRPr lang="en-US" sz="1300" dirty="0"/>
+          </a:p>
+        </p:txBody>
+      </p:sp>
+      <p:sp>
+        <p:nvSpPr>
+          <p:cNvPr id="16" name="Text 14"/>
+          <p:cNvSpPr/>
+          <p:nvPr/>
+        </p:nvSpPr>
+        <p:spPr>
+          <a:xfrm>
+            <a:off x="923544" y="4453128"/>
+            <a:ext cx="1099261" cy="365760"/>
           </a:xfrm>
           <a:prstGeom prst="rect">
             <a:avLst/>
@@ -1671,13 +1939,13 @@
           <a:bodyPr wrap="square" lIns="0" tIns="0" rIns="0" bIns="0" rtlCol="0" anchor="ctr"/>
           <a:lstStyle/>
           <a:p>
-            <a:pPr algn="r" indent="0" marL="0">
+            <a:pPr indent="0" marL="0">
               <a:buNone/>
             </a:pPr>
             <a:r>
-              <a:rPr lang="en-US" sz="950" dirty="0">
+              <a:rPr lang="en-US" sz="900" dirty="0">
                 <a:solidFill>
-                  <a:srgbClr val="557064"/>
+                  <a:srgbClr val="111111"/>
                 </a:solidFill>
                 <a:latin typeface="Calibri" pitchFamily="34" charset="0"/>
                 <a:ea typeface="Calibri" pitchFamily="34" charset="-122"/>
@@ -1685,56 +1953,52 @@
               </a:rPr>
               <a:t>10 · 2 hubs · 5 metrics</a:t>
             </a:r>
-            <a:endParaRPr lang="en-US" sz="950" dirty="0"/>
-          </a:p>
-        </p:txBody>
-      </p:sp>
-      <p:sp>
-        <p:nvSpPr>
-          <p:cNvPr id="7" name="Shape 5"/>
-          <p:cNvSpPr/>
-          <p:nvPr/>
-        </p:nvSpPr>
-        <p:spPr>
-          <a:xfrm>
-            <a:off x="6095848" y="1892808"/>
-            <a:ext cx="0" cy="219456"/>
-          </a:xfrm>
-          <a:prstGeom prst="line">
-            <a:avLst/>
-          </a:prstGeom>
-          <a:noFill/>
-          <a:ln w="25400">
-            <a:solidFill>
-              <a:srgbClr val="4FB077"/>
-            </a:solidFill>
-            <a:prstDash val="solid"/>
-            <a:tailEnd type="triangle"/>
-          </a:ln>
-        </p:spPr>
-      </p:sp>
-      <p:sp>
-        <p:nvSpPr>
-          <p:cNvPr id="8" name="Shape 6"/>
-          <p:cNvSpPr/>
-          <p:nvPr/>
-        </p:nvSpPr>
-        <p:spPr>
-          <a:xfrm>
-            <a:off x="3992728" y="2112264"/>
-            <a:ext cx="4206240" cy="658368"/>
+            <a:endParaRPr lang="en-US" sz="900" dirty="0"/>
+          </a:p>
+        </p:txBody>
+      </p:sp>
+      <p:sp>
+        <p:nvSpPr>
+          <p:cNvPr id="17" name="Shape 15"/>
+          <p:cNvSpPr/>
+          <p:nvPr/>
+        </p:nvSpPr>
+        <p:spPr>
+          <a:xfrm>
+            <a:off x="2242261" y="3845052"/>
+            <a:ext cx="310896" cy="219456"/>
+          </a:xfrm>
+          <a:prstGeom prst="rightArrow">
+            <a:avLst/>
+          </a:prstGeom>
+          <a:solidFill>
+            <a:srgbClr val="8B98A6"/>
+          </a:solidFill>
+          <a:ln/>
+        </p:spPr>
+      </p:sp>
+      <p:sp>
+        <p:nvSpPr>
+          <p:cNvPr id="18" name="Shape 16"/>
+          <p:cNvSpPr/>
+          <p:nvPr/>
+        </p:nvSpPr>
+        <p:spPr>
+          <a:xfrm>
+            <a:off x="2626309" y="2971800"/>
+            <a:ext cx="1391869" cy="1965960"/>
           </a:xfrm>
           <a:prstGeom prst="roundRect">
             <a:avLst>
-              <a:gd name="adj" fmla="val 11111"/>
+              <a:gd name="adj" fmla="val 2628"/>
             </a:avLst>
           </a:prstGeom>
           <a:solidFill>
-            <a:srgbClr val="EDF6F0"/>
-          </a:solidFill>
-          <a:ln w="17780">
+            <a:srgbClr val="27E881"/>
+          </a:solidFill>
+          <a:ln w="12700">
             <a:solidFill>
-              <a:srgbClr val="4FB077"/>
+              <a:srgbClr val="27E881"/>
             </a:solidFill>
             <a:prstDash val="solid"/>
           </a:ln>
@@ -1742,34 +2006,14 @@
       </p:sp>
       <p:sp>
         <p:nvSpPr>
-          <p:cNvPr id="9" name="Shape 7"/>
-          <p:cNvSpPr/>
-          <p:nvPr/>
-        </p:nvSpPr>
-        <p:spPr>
-          <a:xfrm>
-            <a:off x="4193896" y="2359152"/>
-            <a:ext cx="164592" cy="164592"/>
-          </a:xfrm>
-          <a:prstGeom prst="ellipse">
-            <a:avLst/>
-          </a:prstGeom>
-          <a:solidFill>
-            <a:srgbClr val="4FB077"/>
-          </a:solidFill>
-          <a:ln/>
-        </p:spPr>
-      </p:sp>
-      <p:sp>
-        <p:nvSpPr>
-          <p:cNvPr id="10" name="Text 8"/>
-          <p:cNvSpPr/>
-          <p:nvPr/>
-        </p:nvSpPr>
-        <p:spPr>
-          <a:xfrm>
-            <a:off x="4495648" y="2112264"/>
-            <a:ext cx="2194560" cy="658368"/>
+          <p:cNvPr id="19" name="Text 17"/>
+          <p:cNvSpPr/>
+          <p:nvPr/>
+        </p:nvSpPr>
+        <p:spPr>
+          <a:xfrm>
+            <a:off x="2772613" y="3154680"/>
+            <a:ext cx="1099261" cy="320040"/>
           </a:xfrm>
           <a:prstGeom prst="rect">
             <a:avLst/>
@@ -1785,9 +2029,51 @@
               <a:buNone/>
             </a:pPr>
             <a:r>
-              <a:rPr lang="en-US" sz="1350" b="1" dirty="0">
+              <a:rPr lang="en-US" sz="1100" dirty="0">
                 <a:solidFill>
-                  <a:srgbClr val="10281E"/>
+                  <a:srgbClr val="111111"/>
+                </a:solidFill>
+                <a:latin typeface="Consolas" pitchFamily="34" charset="0"/>
+                <a:ea typeface="Consolas" pitchFamily="34" charset="-122"/>
+                <a:cs typeface="Consolas" pitchFamily="34" charset="-120"/>
+              </a:rPr>
+              <a:t>02</a:t>
+            </a:r>
+            <a:endParaRPr lang="en-US" sz="1100" dirty="0"/>
+          </a:p>
+        </p:txBody>
+      </p:sp>
+      <p:sp>
+        <p:nvSpPr>
+          <p:cNvPr id="20" name="Text 18"/>
+          <p:cNvSpPr/>
+          <p:nvPr/>
+        </p:nvSpPr>
+        <p:spPr>
+          <a:xfrm>
+            <a:off x="2772613" y="3593592"/>
+            <a:ext cx="1099261" cy="868680"/>
+          </a:xfrm>
+          <a:prstGeom prst="rect">
+            <a:avLst/>
+          </a:prstGeom>
+          <a:noFill/>
+          <a:ln/>
+        </p:spPr>
+        <p:txBody>
+          <a:bodyPr wrap="square" lIns="0" tIns="0" rIns="0" bIns="0" rtlCol="0" anchor="t"/>
+          <a:lstStyle/>
+          <a:p>
+            <a:pPr indent="0" marL="0">
+              <a:lnSpc>
+                <a:spcPct val="96000"/>
+              </a:lnSpc>
+              <a:buNone/>
+            </a:pPr>
+            <a:r>
+              <a:rPr lang="en-US" sz="1300" b="1" dirty="0">
+                <a:solidFill>
+                  <a:srgbClr val="111111"/>
                 </a:solidFill>
                 <a:latin typeface="Calibri" pitchFamily="34" charset="0"/>
                 <a:ea typeface="Calibri" pitchFamily="34" charset="-122"/>
@@ -1795,20 +2081,20 @@
               </a:rPr>
               <a:t>Fog node</a:t>
             </a:r>
-            <a:endParaRPr lang="en-US" sz="1350" dirty="0"/>
-          </a:p>
-        </p:txBody>
-      </p:sp>
-      <p:sp>
-        <p:nvSpPr>
-          <p:cNvPr id="11" name="Text 9"/>
-          <p:cNvSpPr/>
-          <p:nvPr/>
-        </p:nvSpPr>
-        <p:spPr>
-          <a:xfrm>
-            <a:off x="6644488" y="2112264"/>
-            <a:ext cx="1463040" cy="658368"/>
+            <a:endParaRPr lang="en-US" sz="1300" dirty="0"/>
+          </a:p>
+        </p:txBody>
+      </p:sp>
+      <p:sp>
+        <p:nvSpPr>
+          <p:cNvPr id="21" name="Text 19"/>
+          <p:cNvSpPr/>
+          <p:nvPr/>
+        </p:nvSpPr>
+        <p:spPr>
+          <a:xfrm>
+            <a:off x="2772613" y="4453128"/>
+            <a:ext cx="1099261" cy="365760"/>
           </a:xfrm>
           <a:prstGeom prst="rect">
             <a:avLst/>
@@ -1820,13 +2106,13 @@
           <a:bodyPr wrap="square" lIns="0" tIns="0" rIns="0" bIns="0" rtlCol="0" anchor="ctr"/>
           <a:lstStyle/>
           <a:p>
-            <a:pPr algn="r" indent="0" marL="0">
+            <a:pPr indent="0" marL="0">
               <a:buNone/>
             </a:pPr>
             <a:r>
-              <a:rPr lang="en-US" sz="950" dirty="0">
+              <a:rPr lang="en-US" sz="900" dirty="0">
                 <a:solidFill>
-                  <a:srgbClr val="557064"/>
+                  <a:srgbClr val="111111"/>
                 </a:solidFill>
                 <a:latin typeface="Calibri" pitchFamily="34" charset="0"/>
                 <a:ea typeface="Calibri" pitchFamily="34" charset="-122"/>
@@ -1834,56 +2120,52 @@
               </a:rPr>
               <a:t>windows · 4 rules</a:t>
             </a:r>
-            <a:endParaRPr lang="en-US" sz="950" dirty="0"/>
-          </a:p>
-        </p:txBody>
-      </p:sp>
-      <p:sp>
-        <p:nvSpPr>
-          <p:cNvPr id="12" name="Shape 10"/>
-          <p:cNvSpPr/>
-          <p:nvPr/>
-        </p:nvSpPr>
-        <p:spPr>
-          <a:xfrm>
-            <a:off x="6095848" y="2770632"/>
-            <a:ext cx="0" cy="219456"/>
-          </a:xfrm>
-          <a:prstGeom prst="line">
-            <a:avLst/>
-          </a:prstGeom>
-          <a:noFill/>
-          <a:ln w="25400">
-            <a:solidFill>
-              <a:srgbClr val="4FB077"/>
-            </a:solidFill>
-            <a:prstDash val="solid"/>
-            <a:tailEnd type="triangle"/>
-          </a:ln>
-        </p:spPr>
-      </p:sp>
-      <p:sp>
-        <p:nvSpPr>
-          <p:cNvPr id="13" name="Shape 11"/>
-          <p:cNvSpPr/>
-          <p:nvPr/>
-        </p:nvSpPr>
-        <p:spPr>
-          <a:xfrm>
-            <a:off x="3992728" y="2990088"/>
-            <a:ext cx="4206240" cy="658368"/>
+            <a:endParaRPr lang="en-US" sz="900" dirty="0"/>
+          </a:p>
+        </p:txBody>
+      </p:sp>
+      <p:sp>
+        <p:nvSpPr>
+          <p:cNvPr id="22" name="Shape 20"/>
+          <p:cNvSpPr/>
+          <p:nvPr/>
+        </p:nvSpPr>
+        <p:spPr>
+          <a:xfrm>
+            <a:off x="4091330" y="3845052"/>
+            <a:ext cx="310896" cy="219456"/>
+          </a:xfrm>
+          <a:prstGeom prst="rightArrow">
+            <a:avLst/>
+          </a:prstGeom>
+          <a:solidFill>
+            <a:srgbClr val="8B98A6"/>
+          </a:solidFill>
+          <a:ln/>
+        </p:spPr>
+      </p:sp>
+      <p:sp>
+        <p:nvSpPr>
+          <p:cNvPr id="23" name="Shape 21"/>
+          <p:cNvSpPr/>
+          <p:nvPr/>
+        </p:nvSpPr>
+        <p:spPr>
+          <a:xfrm>
+            <a:off x="4475378" y="2971800"/>
+            <a:ext cx="1391869" cy="1965960"/>
           </a:xfrm>
           <a:prstGeom prst="roundRect">
             <a:avLst>
-              <a:gd name="adj" fmla="val 11111"/>
+              <a:gd name="adj" fmla="val 2628"/>
             </a:avLst>
           </a:prstGeom>
           <a:solidFill>
-            <a:srgbClr val="EDF6F0"/>
-          </a:solidFill>
-          <a:ln w="17780">
+            <a:srgbClr val="1B221E"/>
+          </a:solidFill>
+          <a:ln w="12700">
             <a:solidFill>
-              <a:srgbClr val="12703C"/>
+              <a:srgbClr val="2F3632"/>
             </a:solidFill>
             <a:prstDash val="solid"/>
           </a:ln>
@@ -1891,34 +2173,14 @@
       </p:sp>
       <p:sp>
         <p:nvSpPr>
-          <p:cNvPr id="14" name="Shape 12"/>
-          <p:cNvSpPr/>
-          <p:nvPr/>
-        </p:nvSpPr>
-        <p:spPr>
-          <a:xfrm>
-            <a:off x="4193896" y="3236976"/>
-            <a:ext cx="164592" cy="164592"/>
-          </a:xfrm>
-          <a:prstGeom prst="ellipse">
-            <a:avLst/>
-          </a:prstGeom>
-          <a:solidFill>
-            <a:srgbClr val="12703C"/>
-          </a:solidFill>
-          <a:ln/>
-        </p:spPr>
-      </p:sp>
-      <p:sp>
-        <p:nvSpPr>
-          <p:cNvPr id="15" name="Text 13"/>
-          <p:cNvSpPr/>
-          <p:nvPr/>
-        </p:nvSpPr>
-        <p:spPr>
-          <a:xfrm>
-            <a:off x="4495648" y="2990088"/>
-            <a:ext cx="2194560" cy="658368"/>
+          <p:cNvPr id="24" name="Text 22"/>
+          <p:cNvSpPr/>
+          <p:nvPr/>
+        </p:nvSpPr>
+        <p:spPr>
+          <a:xfrm>
+            <a:off x="4621682" y="3154680"/>
+            <a:ext cx="1099261" cy="320040"/>
           </a:xfrm>
           <a:prstGeom prst="rect">
             <a:avLst/>
@@ -1934,9 +2196,51 @@
               <a:buNone/>
             </a:pPr>
             <a:r>
-              <a:rPr lang="en-US" sz="1350" b="1" dirty="0">
+              <a:rPr lang="en-US" sz="1100" dirty="0">
                 <a:solidFill>
-                  <a:srgbClr val="10281E"/>
+                  <a:srgbClr val="27E881"/>
+                </a:solidFill>
+                <a:latin typeface="Consolas" pitchFamily="34" charset="0"/>
+                <a:ea typeface="Consolas" pitchFamily="34" charset="-122"/>
+                <a:cs typeface="Consolas" pitchFamily="34" charset="-120"/>
+              </a:rPr>
+              <a:t>03</a:t>
+            </a:r>
+            <a:endParaRPr lang="en-US" sz="1100" dirty="0"/>
+          </a:p>
+        </p:txBody>
+      </p:sp>
+      <p:sp>
+        <p:nvSpPr>
+          <p:cNvPr id="25" name="Text 23"/>
+          <p:cNvSpPr/>
+          <p:nvPr/>
+        </p:nvSpPr>
+        <p:spPr>
+          <a:xfrm>
+            <a:off x="4621682" y="3593592"/>
+            <a:ext cx="1099261" cy="868680"/>
+          </a:xfrm>
+          <a:prstGeom prst="rect">
+            <a:avLst/>
+          </a:prstGeom>
+          <a:noFill/>
+          <a:ln/>
+        </p:spPr>
+        <p:txBody>
+          <a:bodyPr wrap="square" lIns="0" tIns="0" rIns="0" bIns="0" rtlCol="0" anchor="t"/>
+          <a:lstStyle/>
+          <a:p>
+            <a:pPr indent="0" marL="0">
+              <a:lnSpc>
+                <a:spcPct val="96000"/>
+              </a:lnSpc>
+              <a:buNone/>
+            </a:pPr>
+            <a:r>
+              <a:rPr lang="en-US" sz="1300" b="1" dirty="0">
+                <a:solidFill>
+                  <a:srgbClr val="EAF3EE"/>
                 </a:solidFill>
                 <a:latin typeface="Calibri" pitchFamily="34" charset="0"/>
                 <a:ea typeface="Calibri" pitchFamily="34" charset="-122"/>
@@ -1944,20 +2248,20 @@
               </a:rPr>
               <a:t>Amazon SQS</a:t>
             </a:r>
-            <a:endParaRPr lang="en-US" sz="1350" dirty="0"/>
-          </a:p>
-        </p:txBody>
-      </p:sp>
-      <p:sp>
-        <p:nvSpPr>
-          <p:cNvPr id="16" name="Text 14"/>
-          <p:cNvSpPr/>
-          <p:nvPr/>
-        </p:nvSpPr>
-        <p:spPr>
-          <a:xfrm>
-            <a:off x="6644488" y="2990088"/>
-            <a:ext cx="1463040" cy="658368"/>
+            <a:endParaRPr lang="en-US" sz="1300" dirty="0"/>
+          </a:p>
+        </p:txBody>
+      </p:sp>
+      <p:sp>
+        <p:nvSpPr>
+          <p:cNvPr id="26" name="Text 24"/>
+          <p:cNvSpPr/>
+          <p:nvPr/>
+        </p:nvSpPr>
+        <p:spPr>
+          <a:xfrm>
+            <a:off x="4621682" y="4453128"/>
+            <a:ext cx="1099261" cy="365760"/>
           </a:xfrm>
           <a:prstGeom prst="rect">
             <a:avLst/>
@@ -1969,13 +2273,13 @@
           <a:bodyPr wrap="square" lIns="0" tIns="0" rIns="0" bIns="0" rtlCol="0" anchor="ctr"/>
           <a:lstStyle/>
           <a:p>
-            <a:pPr algn="r" indent="0" marL="0">
+            <a:pPr indent="0" marL="0">
               <a:buNone/>
             </a:pPr>
             <a:r>
-              <a:rPr lang="en-US" sz="950" dirty="0">
+              <a:rPr lang="en-US" sz="900" dirty="0">
                 <a:solidFill>
-                  <a:srgbClr val="557064"/>
+                  <a:srgbClr val="8B98A6"/>
                 </a:solidFill>
                 <a:latin typeface="Calibri" pitchFamily="34" charset="0"/>
                 <a:ea typeface="Calibri" pitchFamily="34" charset="-122"/>
@@ -1983,56 +2287,52 @@
               </a:rPr>
               <a:t>1 aggregate / window</a:t>
             </a:r>
-            <a:endParaRPr lang="en-US" sz="950" dirty="0"/>
-          </a:p>
-        </p:txBody>
-      </p:sp>
-      <p:sp>
-        <p:nvSpPr>
-          <p:cNvPr id="17" name="Shape 15"/>
-          <p:cNvSpPr/>
-          <p:nvPr/>
-        </p:nvSpPr>
-        <p:spPr>
-          <a:xfrm>
-            <a:off x="6095848" y="3648456"/>
-            <a:ext cx="0" cy="219456"/>
-          </a:xfrm>
-          <a:prstGeom prst="line">
-            <a:avLst/>
-          </a:prstGeom>
-          <a:noFill/>
-          <a:ln w="25400">
-            <a:solidFill>
-              <a:srgbClr val="4FB077"/>
-            </a:solidFill>
-            <a:prstDash val="solid"/>
-            <a:tailEnd type="triangle"/>
-          </a:ln>
-        </p:spPr>
-      </p:sp>
-      <p:sp>
-        <p:nvSpPr>
-          <p:cNvPr id="18" name="Shape 16"/>
-          <p:cNvSpPr/>
-          <p:nvPr/>
-        </p:nvSpPr>
-        <p:spPr>
-          <a:xfrm>
-            <a:off x="3992728" y="3867912"/>
-            <a:ext cx="4206240" cy="658368"/>
+            <a:endParaRPr lang="en-US" sz="900" dirty="0"/>
+          </a:p>
+        </p:txBody>
+      </p:sp>
+      <p:sp>
+        <p:nvSpPr>
+          <p:cNvPr id="27" name="Shape 25"/>
+          <p:cNvSpPr/>
+          <p:nvPr/>
+        </p:nvSpPr>
+        <p:spPr>
+          <a:xfrm>
+            <a:off x="5940400" y="3845052"/>
+            <a:ext cx="310896" cy="219456"/>
+          </a:xfrm>
+          <a:prstGeom prst="rightArrow">
+            <a:avLst/>
+          </a:prstGeom>
+          <a:solidFill>
+            <a:srgbClr val="8B98A6"/>
+          </a:solidFill>
+          <a:ln/>
+        </p:spPr>
+      </p:sp>
+      <p:sp>
+        <p:nvSpPr>
+          <p:cNvPr id="28" name="Shape 26"/>
+          <p:cNvSpPr/>
+          <p:nvPr/>
+        </p:nvSpPr>
+        <p:spPr>
+          <a:xfrm>
+            <a:off x="6324448" y="2971800"/>
+            <a:ext cx="1391869" cy="1965960"/>
           </a:xfrm>
           <a:prstGeom prst="roundRect">
             <a:avLst>
-              <a:gd name="adj" fmla="val 11111"/>
+              <a:gd name="adj" fmla="val 2628"/>
             </a:avLst>
           </a:prstGeom>
           <a:solidFill>
-            <a:srgbClr val="EDF6F0"/>
-          </a:solidFill>
-          <a:ln w="17780">
+            <a:srgbClr val="1B221E"/>
+          </a:solidFill>
+          <a:ln w="12700">
             <a:solidFill>
-              <a:srgbClr val="12703C"/>
+              <a:srgbClr val="2F3632"/>
             </a:solidFill>
             <a:prstDash val="solid"/>
           </a:ln>
@@ -2040,34 +2340,14 @@
       </p:sp>
       <p:sp>
         <p:nvSpPr>
-          <p:cNvPr id="19" name="Shape 17"/>
-          <p:cNvSpPr/>
-          <p:nvPr/>
-        </p:nvSpPr>
-        <p:spPr>
-          <a:xfrm>
-            <a:off x="4193896" y="4114800"/>
-            <a:ext cx="164592" cy="164592"/>
-          </a:xfrm>
-          <a:prstGeom prst="ellipse">
-            <a:avLst/>
-          </a:prstGeom>
-          <a:solidFill>
-            <a:srgbClr val="12703C"/>
-          </a:solidFill>
-          <a:ln/>
-        </p:spPr>
-      </p:sp>
-      <p:sp>
-        <p:nvSpPr>
-          <p:cNvPr id="20" name="Text 18"/>
-          <p:cNvSpPr/>
-          <p:nvPr/>
-        </p:nvSpPr>
-        <p:spPr>
-          <a:xfrm>
-            <a:off x="4495648" y="3867912"/>
-            <a:ext cx="2194560" cy="658368"/>
+          <p:cNvPr id="29" name="Text 27"/>
+          <p:cNvSpPr/>
+          <p:nvPr/>
+        </p:nvSpPr>
+        <p:spPr>
+          <a:xfrm>
+            <a:off x="6470752" y="3154680"/>
+            <a:ext cx="1099261" cy="320040"/>
           </a:xfrm>
           <a:prstGeom prst="rect">
             <a:avLst/>
@@ -2083,9 +2363,51 @@
               <a:buNone/>
             </a:pPr>
             <a:r>
-              <a:rPr lang="en-US" sz="1350" b="1" dirty="0">
+              <a:rPr lang="en-US" sz="1100" dirty="0">
                 <a:solidFill>
-                  <a:srgbClr val="10281E"/>
+                  <a:srgbClr val="27E881"/>
+                </a:solidFill>
+                <a:latin typeface="Consolas" pitchFamily="34" charset="0"/>
+                <a:ea typeface="Consolas" pitchFamily="34" charset="-122"/>
+                <a:cs typeface="Consolas" pitchFamily="34" charset="-120"/>
+              </a:rPr>
+              <a:t>04</a:t>
+            </a:r>
+            <a:endParaRPr lang="en-US" sz="1100" dirty="0"/>
+          </a:p>
+        </p:txBody>
+      </p:sp>
+      <p:sp>
+        <p:nvSpPr>
+          <p:cNvPr id="30" name="Text 28"/>
+          <p:cNvSpPr/>
+          <p:nvPr/>
+        </p:nvSpPr>
+        <p:spPr>
+          <a:xfrm>
+            <a:off x="6470752" y="3593592"/>
+            <a:ext cx="1099261" cy="868680"/>
+          </a:xfrm>
+          <a:prstGeom prst="rect">
+            <a:avLst/>
+          </a:prstGeom>
+          <a:noFill/>
+          <a:ln/>
+        </p:spPr>
+        <p:txBody>
+          <a:bodyPr wrap="square" lIns="0" tIns="0" rIns="0" bIns="0" rtlCol="0" anchor="t"/>
+          <a:lstStyle/>
+          <a:p>
+            <a:pPr indent="0" marL="0">
+              <a:lnSpc>
+                <a:spcPct val="96000"/>
+              </a:lnSpc>
+              <a:buNone/>
+            </a:pPr>
+            <a:r>
+              <a:rPr lang="en-US" sz="1300" b="1" dirty="0">
+                <a:solidFill>
+                  <a:srgbClr val="EAF3EE"/>
                 </a:solidFill>
                 <a:latin typeface="Calibri" pitchFamily="34" charset="0"/>
                 <a:ea typeface="Calibri" pitchFamily="34" charset="-122"/>
@@ -2093,20 +2415,20 @@
               </a:rPr>
               <a:t>AWS Lambda</a:t>
             </a:r>
-            <a:endParaRPr lang="en-US" sz="1350" dirty="0"/>
-          </a:p>
-        </p:txBody>
-      </p:sp>
-      <p:sp>
-        <p:nvSpPr>
-          <p:cNvPr id="21" name="Text 19"/>
-          <p:cNvSpPr/>
-          <p:nvPr/>
-        </p:nvSpPr>
-        <p:spPr>
-          <a:xfrm>
-            <a:off x="6644488" y="3867912"/>
-            <a:ext cx="1463040" cy="658368"/>
+            <a:endParaRPr lang="en-US" sz="1300" dirty="0"/>
+          </a:p>
+        </p:txBody>
+      </p:sp>
+      <p:sp>
+        <p:nvSpPr>
+          <p:cNvPr id="31" name="Text 29"/>
+          <p:cNvSpPr/>
+          <p:nvPr/>
+        </p:nvSpPr>
+        <p:spPr>
+          <a:xfrm>
+            <a:off x="6470752" y="4453128"/>
+            <a:ext cx="1099261" cy="365760"/>
           </a:xfrm>
           <a:prstGeom prst="rect">
             <a:avLst/>
@@ -2118,13 +2440,13 @@
           <a:bodyPr wrap="square" lIns="0" tIns="0" rIns="0" bIns="0" rtlCol="0" anchor="ctr"/>
           <a:lstStyle/>
           <a:p>
-            <a:pPr algn="r" indent="0" marL="0">
+            <a:pPr indent="0" marL="0">
               <a:buNone/>
             </a:pPr>
             <a:r>
-              <a:rPr lang="en-US" sz="950" dirty="0">
+              <a:rPr lang="en-US" sz="900" dirty="0">
                 <a:solidFill>
-                  <a:srgbClr val="557064"/>
+                  <a:srgbClr val="8B98A6"/>
                 </a:solidFill>
                 <a:latin typeface="Calibri" pitchFamily="34" charset="0"/>
                 <a:ea typeface="Calibri" pitchFamily="34" charset="-122"/>
@@ -2132,56 +2454,52 @@
               </a:rPr>
               <a:t>python3.12 ingest</a:t>
             </a:r>
-            <a:endParaRPr lang="en-US" sz="950" dirty="0"/>
-          </a:p>
-        </p:txBody>
-      </p:sp>
-      <p:sp>
-        <p:nvSpPr>
-          <p:cNvPr id="22" name="Shape 20"/>
-          <p:cNvSpPr/>
-          <p:nvPr/>
-        </p:nvSpPr>
-        <p:spPr>
-          <a:xfrm>
-            <a:off x="6095848" y="4526280"/>
-            <a:ext cx="0" cy="219456"/>
-          </a:xfrm>
-          <a:prstGeom prst="line">
-            <a:avLst/>
-          </a:prstGeom>
-          <a:noFill/>
-          <a:ln w="25400">
-            <a:solidFill>
-              <a:srgbClr val="4FB077"/>
-            </a:solidFill>
-            <a:prstDash val="solid"/>
-            <a:tailEnd type="triangle"/>
-          </a:ln>
-        </p:spPr>
-      </p:sp>
-      <p:sp>
-        <p:nvSpPr>
-          <p:cNvPr id="23" name="Shape 21"/>
-          <p:cNvSpPr/>
-          <p:nvPr/>
-        </p:nvSpPr>
-        <p:spPr>
-          <a:xfrm>
-            <a:off x="3992728" y="4745736"/>
-            <a:ext cx="4206240" cy="658368"/>
+            <a:endParaRPr lang="en-US" sz="900" dirty="0"/>
+          </a:p>
+        </p:txBody>
+      </p:sp>
+      <p:sp>
+        <p:nvSpPr>
+          <p:cNvPr id="32" name="Shape 30"/>
+          <p:cNvSpPr/>
+          <p:nvPr/>
+        </p:nvSpPr>
+        <p:spPr>
+          <a:xfrm>
+            <a:off x="7789469" y="3845052"/>
+            <a:ext cx="310896" cy="219456"/>
+          </a:xfrm>
+          <a:prstGeom prst="rightArrow">
+            <a:avLst/>
+          </a:prstGeom>
+          <a:solidFill>
+            <a:srgbClr val="8B98A6"/>
+          </a:solidFill>
+          <a:ln/>
+        </p:spPr>
+      </p:sp>
+      <p:sp>
+        <p:nvSpPr>
+          <p:cNvPr id="33" name="Shape 31"/>
+          <p:cNvSpPr/>
+          <p:nvPr/>
+        </p:nvSpPr>
+        <p:spPr>
+          <a:xfrm>
+            <a:off x="8173517" y="2971800"/>
+            <a:ext cx="1391869" cy="1965960"/>
           </a:xfrm>
           <a:prstGeom prst="roundRect">
             <a:avLst>
-              <a:gd name="adj" fmla="val 11111"/>
+              <a:gd name="adj" fmla="val 2628"/>
             </a:avLst>
           </a:prstGeom>
           <a:solidFill>
-            <a:srgbClr val="EDF6F0"/>
-          </a:solidFill>
-          <a:ln w="17780">
+            <a:srgbClr val="1B221E"/>
+          </a:solidFill>
+          <a:ln w="12700">
             <a:solidFill>
-              <a:srgbClr val="12703C"/>
+              <a:srgbClr val="2F3632"/>
             </a:solidFill>
             <a:prstDash val="solid"/>
           </a:ln>
@@ -2189,34 +2507,14 @@
       </p:sp>
       <p:sp>
         <p:nvSpPr>
-          <p:cNvPr id="24" name="Shape 22"/>
-          <p:cNvSpPr/>
-          <p:nvPr/>
-        </p:nvSpPr>
-        <p:spPr>
-          <a:xfrm>
-            <a:off x="4193896" y="4992624"/>
-            <a:ext cx="164592" cy="164592"/>
-          </a:xfrm>
-          <a:prstGeom prst="ellipse">
-            <a:avLst/>
-          </a:prstGeom>
-          <a:solidFill>
-            <a:srgbClr val="12703C"/>
-          </a:solidFill>
-          <a:ln/>
-        </p:spPr>
-      </p:sp>
-      <p:sp>
-        <p:nvSpPr>
-          <p:cNvPr id="25" name="Text 23"/>
-          <p:cNvSpPr/>
-          <p:nvPr/>
-        </p:nvSpPr>
-        <p:spPr>
-          <a:xfrm>
-            <a:off x="4495648" y="4745736"/>
-            <a:ext cx="2194560" cy="658368"/>
+          <p:cNvPr id="34" name="Text 32"/>
+          <p:cNvSpPr/>
+          <p:nvPr/>
+        </p:nvSpPr>
+        <p:spPr>
+          <a:xfrm>
+            <a:off x="8319821" y="3154680"/>
+            <a:ext cx="1099261" cy="320040"/>
           </a:xfrm>
           <a:prstGeom prst="rect">
             <a:avLst/>
@@ -2232,9 +2530,51 @@
               <a:buNone/>
             </a:pPr>
             <a:r>
-              <a:rPr lang="en-US" sz="1350" b="1" dirty="0">
+              <a:rPr lang="en-US" sz="1100" dirty="0">
                 <a:solidFill>
-                  <a:srgbClr val="10281E"/>
+                  <a:srgbClr val="27E881"/>
+                </a:solidFill>
+                <a:latin typeface="Consolas" pitchFamily="34" charset="0"/>
+                <a:ea typeface="Consolas" pitchFamily="34" charset="-122"/>
+                <a:cs typeface="Consolas" pitchFamily="34" charset="-120"/>
+              </a:rPr>
+              <a:t>05</a:t>
+            </a:r>
+            <a:endParaRPr lang="en-US" sz="1100" dirty="0"/>
+          </a:p>
+        </p:txBody>
+      </p:sp>
+      <p:sp>
+        <p:nvSpPr>
+          <p:cNvPr id="35" name="Text 33"/>
+          <p:cNvSpPr/>
+          <p:nvPr/>
+        </p:nvSpPr>
+        <p:spPr>
+          <a:xfrm>
+            <a:off x="8319821" y="3593592"/>
+            <a:ext cx="1099261" cy="868680"/>
+          </a:xfrm>
+          <a:prstGeom prst="rect">
+            <a:avLst/>
+          </a:prstGeom>
+          <a:noFill/>
+          <a:ln/>
+        </p:spPr>
+        <p:txBody>
+          <a:bodyPr wrap="square" lIns="0" tIns="0" rIns="0" bIns="0" rtlCol="0" anchor="t"/>
+          <a:lstStyle/>
+          <a:p>
+            <a:pPr indent="0" marL="0">
+              <a:lnSpc>
+                <a:spcPct val="96000"/>
+              </a:lnSpc>
+              <a:buNone/>
+            </a:pPr>
+            <a:r>
+              <a:rPr lang="en-US" sz="1300" b="1" dirty="0">
+                <a:solidFill>
+                  <a:srgbClr val="EAF3EE"/>
                 </a:solidFill>
                 <a:latin typeface="Calibri" pitchFamily="34" charset="0"/>
                 <a:ea typeface="Calibri" pitchFamily="34" charset="-122"/>
@@ -2242,20 +2582,20 @@
               </a:rPr>
               <a:t>DynamoDB</a:t>
             </a:r>
-            <a:endParaRPr lang="en-US" sz="1350" dirty="0"/>
-          </a:p>
-        </p:txBody>
-      </p:sp>
-      <p:sp>
-        <p:nvSpPr>
-          <p:cNvPr id="26" name="Text 24"/>
-          <p:cNvSpPr/>
-          <p:nvPr/>
-        </p:nvSpPr>
-        <p:spPr>
-          <a:xfrm>
-            <a:off x="6644488" y="4745736"/>
-            <a:ext cx="1463040" cy="658368"/>
+            <a:endParaRPr lang="en-US" sz="1300" dirty="0"/>
+          </a:p>
+        </p:txBody>
+      </p:sp>
+      <p:sp>
+        <p:nvSpPr>
+          <p:cNvPr id="36" name="Text 34"/>
+          <p:cNvSpPr/>
+          <p:nvPr/>
+        </p:nvSpPr>
+        <p:spPr>
+          <a:xfrm>
+            <a:off x="8319821" y="4453128"/>
+            <a:ext cx="1099261" cy="365760"/>
           </a:xfrm>
           <a:prstGeom prst="rect">
             <a:avLst/>
@@ -2267,13 +2607,13 @@
           <a:bodyPr wrap="square" lIns="0" tIns="0" rIns="0" bIns="0" rtlCol="0" anchor="ctr"/>
           <a:lstStyle/>
           <a:p>
-            <a:pPr algn="r" indent="0" marL="0">
+            <a:pPr indent="0" marL="0">
               <a:buNone/>
             </a:pPr>
             <a:r>
-              <a:rPr lang="en-US" sz="950" dirty="0">
+              <a:rPr lang="en-US" sz="900" dirty="0">
                 <a:solidFill>
-                  <a:srgbClr val="557064"/>
+                  <a:srgbClr val="8B98A6"/>
                 </a:solidFill>
                 <a:latin typeface="Calibri" pitchFamily="34" charset="0"/>
                 <a:ea typeface="Calibri" pitchFamily="34" charset="-122"/>
@@ -2281,56 +2621,52 @@
               </a:rPr>
               <a:t>durable store</a:t>
             </a:r>
-            <a:endParaRPr lang="en-US" sz="950" dirty="0"/>
-          </a:p>
-        </p:txBody>
-      </p:sp>
-      <p:sp>
-        <p:nvSpPr>
-          <p:cNvPr id="27" name="Shape 25"/>
-          <p:cNvSpPr/>
-          <p:nvPr/>
-        </p:nvSpPr>
-        <p:spPr>
-          <a:xfrm>
-            <a:off x="6095848" y="5404104"/>
-            <a:ext cx="0" cy="219456"/>
-          </a:xfrm>
-          <a:prstGeom prst="line">
-            <a:avLst/>
-          </a:prstGeom>
-          <a:noFill/>
-          <a:ln w="25400">
-            <a:solidFill>
-              <a:srgbClr val="4FB077"/>
-            </a:solidFill>
-            <a:prstDash val="solid"/>
-            <a:tailEnd type="triangle"/>
-          </a:ln>
-        </p:spPr>
-      </p:sp>
-      <p:sp>
-        <p:nvSpPr>
-          <p:cNvPr id="28" name="Shape 26"/>
-          <p:cNvSpPr/>
-          <p:nvPr/>
-        </p:nvSpPr>
-        <p:spPr>
-          <a:xfrm>
-            <a:off x="3992728" y="5623560"/>
-            <a:ext cx="4206240" cy="658368"/>
+            <a:endParaRPr lang="en-US" sz="900" dirty="0"/>
+          </a:p>
+        </p:txBody>
+      </p:sp>
+      <p:sp>
+        <p:nvSpPr>
+          <p:cNvPr id="37" name="Shape 35"/>
+          <p:cNvSpPr/>
+          <p:nvPr/>
+        </p:nvSpPr>
+        <p:spPr>
+          <a:xfrm>
+            <a:off x="9638538" y="3845052"/>
+            <a:ext cx="310896" cy="219456"/>
+          </a:xfrm>
+          <a:prstGeom prst="rightArrow">
+            <a:avLst/>
+          </a:prstGeom>
+          <a:solidFill>
+            <a:srgbClr val="8B98A6"/>
+          </a:solidFill>
+          <a:ln/>
+        </p:spPr>
+      </p:sp>
+      <p:sp>
+        <p:nvSpPr>
+          <p:cNvPr id="38" name="Shape 36"/>
+          <p:cNvSpPr/>
+          <p:nvPr/>
+        </p:nvSpPr>
+        <p:spPr>
+          <a:xfrm>
+            <a:off x="10022586" y="2971800"/>
+            <a:ext cx="1391869" cy="1965960"/>
           </a:xfrm>
           <a:prstGeom prst="roundRect">
             <a:avLst>
-              <a:gd name="adj" fmla="val 11111"/>
+              <a:gd name="adj" fmla="val 2628"/>
             </a:avLst>
           </a:prstGeom>
           <a:solidFill>
-            <a:srgbClr val="EDF6F0"/>
-          </a:solidFill>
-          <a:ln w="17780">
+            <a:srgbClr val="1B221E"/>
+          </a:solidFill>
+          <a:ln w="12700">
             <a:solidFill>
-              <a:srgbClr val="1E9450"/>
+              <a:srgbClr val="2F3632"/>
             </a:solidFill>
             <a:prstDash val="solid"/>
           </a:ln>
@@ -2338,34 +2674,14 @@
       </p:sp>
       <p:sp>
         <p:nvSpPr>
-          <p:cNvPr id="29" name="Shape 27"/>
-          <p:cNvSpPr/>
-          <p:nvPr/>
-        </p:nvSpPr>
-        <p:spPr>
-          <a:xfrm>
-            <a:off x="4193896" y="5870448"/>
-            <a:ext cx="164592" cy="164592"/>
-          </a:xfrm>
-          <a:prstGeom prst="ellipse">
-            <a:avLst/>
-          </a:prstGeom>
-          <a:solidFill>
-            <a:srgbClr val="1E9450"/>
-          </a:solidFill>
-          <a:ln/>
-        </p:spPr>
-      </p:sp>
-      <p:sp>
-        <p:nvSpPr>
-          <p:cNvPr id="30" name="Text 28"/>
-          <p:cNvSpPr/>
-          <p:nvPr/>
-        </p:nvSpPr>
-        <p:spPr>
-          <a:xfrm>
-            <a:off x="4495648" y="5623560"/>
-            <a:ext cx="2194560" cy="658368"/>
+          <p:cNvPr id="39" name="Text 37"/>
+          <p:cNvSpPr/>
+          <p:nvPr/>
+        </p:nvSpPr>
+        <p:spPr>
+          <a:xfrm>
+            <a:off x="10168890" y="3154680"/>
+            <a:ext cx="1099261" cy="320040"/>
           </a:xfrm>
           <a:prstGeom prst="rect">
             <a:avLst/>
@@ -2381,9 +2697,51 @@
               <a:buNone/>
             </a:pPr>
             <a:r>
-              <a:rPr lang="en-US" sz="1350" b="1" dirty="0">
+              <a:rPr lang="en-US" sz="1100" dirty="0">
                 <a:solidFill>
-                  <a:srgbClr val="10281E"/>
+                  <a:srgbClr val="27E881"/>
+                </a:solidFill>
+                <a:latin typeface="Consolas" pitchFamily="34" charset="0"/>
+                <a:ea typeface="Consolas" pitchFamily="34" charset="-122"/>
+                <a:cs typeface="Consolas" pitchFamily="34" charset="-120"/>
+              </a:rPr>
+              <a:t>06</a:t>
+            </a:r>
+            <a:endParaRPr lang="en-US" sz="1100" dirty="0"/>
+          </a:p>
+        </p:txBody>
+      </p:sp>
+      <p:sp>
+        <p:nvSpPr>
+          <p:cNvPr id="40" name="Text 38"/>
+          <p:cNvSpPr/>
+          <p:nvPr/>
+        </p:nvSpPr>
+        <p:spPr>
+          <a:xfrm>
+            <a:off x="10168890" y="3593592"/>
+            <a:ext cx="1099261" cy="868680"/>
+          </a:xfrm>
+          <a:prstGeom prst="rect">
+            <a:avLst/>
+          </a:prstGeom>
+          <a:noFill/>
+          <a:ln/>
+        </p:spPr>
+        <p:txBody>
+          <a:bodyPr wrap="square" lIns="0" tIns="0" rIns="0" bIns="0" rtlCol="0" anchor="t"/>
+          <a:lstStyle/>
+          <a:p>
+            <a:pPr indent="0" marL="0">
+              <a:lnSpc>
+                <a:spcPct val="96000"/>
+              </a:lnSpc>
+              <a:buNone/>
+            </a:pPr>
+            <a:r>
+              <a:rPr lang="en-US" sz="1300" b="1" dirty="0">
+                <a:solidFill>
+                  <a:srgbClr val="EAF3EE"/>
                 </a:solidFill>
                 <a:latin typeface="Calibri" pitchFamily="34" charset="0"/>
                 <a:ea typeface="Calibri" pitchFamily="34" charset="-122"/>
@@ -2391,20 +2749,20 @@
               </a:rPr>
               <a:t>API GW + S3</a:t>
             </a:r>
-            <a:endParaRPr lang="en-US" sz="1350" dirty="0"/>
-          </a:p>
-        </p:txBody>
-      </p:sp>
-      <p:sp>
-        <p:nvSpPr>
-          <p:cNvPr id="31" name="Text 29"/>
-          <p:cNvSpPr/>
-          <p:nvPr/>
-        </p:nvSpPr>
-        <p:spPr>
-          <a:xfrm>
-            <a:off x="6644488" y="5623560"/>
-            <a:ext cx="1463040" cy="658368"/>
+            <a:endParaRPr lang="en-US" sz="1300" dirty="0"/>
+          </a:p>
+        </p:txBody>
+      </p:sp>
+      <p:sp>
+        <p:nvSpPr>
+          <p:cNvPr id="41" name="Text 39"/>
+          <p:cNvSpPr/>
+          <p:nvPr/>
+        </p:nvSpPr>
+        <p:spPr>
+          <a:xfrm>
+            <a:off x="10168890" y="4453128"/>
+            <a:ext cx="1099261" cy="365760"/>
           </a:xfrm>
           <a:prstGeom prst="rect">
             <a:avLst/>
@@ -2416,13 +2774,13 @@
           <a:bodyPr wrap="square" lIns="0" tIns="0" rIns="0" bIns="0" rtlCol="0" anchor="ctr"/>
           <a:lstStyle/>
           <a:p>
-            <a:pPr algn="r" indent="0" marL="0">
+            <a:pPr indent="0" marL="0">
               <a:buNone/>
             </a:pPr>
             <a:r>
-              <a:rPr lang="en-US" sz="950" dirty="0">
+              <a:rPr lang="en-US" sz="900" dirty="0">
                 <a:solidFill>
-                  <a:srgbClr val="557064"/>
+                  <a:srgbClr val="8B98A6"/>
                 </a:solidFill>
                 <a:latin typeface="Calibri" pitchFamily="34" charset="0"/>
                 <a:ea typeface="Calibri" pitchFamily="34" charset="-122"/>
@@ -2430,124 +2788,7 @@
               </a:rPr>
               <a:t>live dashboard</a:t>
             </a:r>
-            <a:endParaRPr lang="en-US" sz="950" dirty="0"/>
-          </a:p>
-        </p:txBody>
-      </p:sp>
-      <p:sp>
-        <p:nvSpPr>
-          <p:cNvPr id="32" name="Text 30"/>
-          <p:cNvSpPr/>
-          <p:nvPr/>
-        </p:nvSpPr>
-        <p:spPr>
-          <a:xfrm>
-            <a:off x="2438248" y="1234440"/>
-            <a:ext cx="1371600" cy="365760"/>
-          </a:xfrm>
-          <a:prstGeom prst="rect">
-            <a:avLst/>
-          </a:prstGeom>
-          <a:noFill/>
-          <a:ln/>
-        </p:spPr>
-        <p:txBody>
-          <a:bodyPr wrap="square" rtlCol="0" anchor="ctr"/>
-          <a:lstStyle/>
-          <a:p>
-            <a:pPr algn="r" indent="0" marL="0">
-              <a:buNone/>
-            </a:pPr>
-            <a:r>
-              <a:rPr lang="en-US" sz="1100" b="1" spc="200" kern="0" dirty="0">
-                <a:solidFill>
-                  <a:srgbClr val="4FB077"/>
-                </a:solidFill>
-                <a:latin typeface="Calibri" pitchFamily="34" charset="0"/>
-                <a:ea typeface="Calibri" pitchFamily="34" charset="-122"/>
-                <a:cs typeface="Calibri" pitchFamily="34" charset="-120"/>
-              </a:rPr>
-              <a:t>EDGE</a:t>
-            </a:r>
-            <a:endParaRPr lang="en-US" sz="1100" dirty="0"/>
-          </a:p>
-        </p:txBody>
-      </p:sp>
-      <p:sp>
-        <p:nvSpPr>
-          <p:cNvPr id="33" name="Text 31"/>
-          <p:cNvSpPr/>
-          <p:nvPr/>
-        </p:nvSpPr>
-        <p:spPr>
-          <a:xfrm>
-            <a:off x="2438248" y="2990088"/>
-            <a:ext cx="1371600" cy="365760"/>
-          </a:xfrm>
-          <a:prstGeom prst="rect">
-            <a:avLst/>
-          </a:prstGeom>
-          <a:noFill/>
-          <a:ln/>
-        </p:spPr>
-        <p:txBody>
-          <a:bodyPr wrap="square" rtlCol="0" anchor="ctr"/>
-          <a:lstStyle/>
-          <a:p>
-            <a:pPr algn="r" indent="0" marL="0">
-              <a:buNone/>
-            </a:pPr>
-            <a:r>
-              <a:rPr lang="en-US" sz="1100" b="1" spc="200" kern="0" dirty="0">
-                <a:solidFill>
-                  <a:srgbClr val="12703C"/>
-                </a:solidFill>
-                <a:latin typeface="Calibri" pitchFamily="34" charset="0"/>
-                <a:ea typeface="Calibri" pitchFamily="34" charset="-122"/>
-                <a:cs typeface="Calibri" pitchFamily="34" charset="-120"/>
-              </a:rPr>
-              <a:t>CLOUD</a:t>
-            </a:r>
-            <a:endParaRPr lang="en-US" sz="1100" dirty="0"/>
-          </a:p>
-        </p:txBody>
-      </p:sp>
-      <p:sp>
-        <p:nvSpPr>
-          <p:cNvPr id="34" name="Text 32"/>
-          <p:cNvSpPr/>
-          <p:nvPr/>
-        </p:nvSpPr>
-        <p:spPr>
-          <a:xfrm>
-            <a:off x="8656168" y="2743200"/>
-            <a:ext cx="3291840" cy="2194560"/>
-          </a:xfrm>
-          <a:prstGeom prst="rect">
-            <a:avLst/>
-          </a:prstGeom>
-          <a:noFill/>
-          <a:ln/>
-        </p:spPr>
-        <p:txBody>
-          <a:bodyPr wrap="square" rtlCol="0" anchor="ctr"/>
-          <a:lstStyle/>
-          <a:p>
-            <a:pPr indent="0" marL="0">
-              <a:buNone/>
-            </a:pPr>
-            <a:r>
-              <a:rPr lang="en-US" sz="1500" i="1" dirty="0">
-                <a:solidFill>
-                  <a:srgbClr val="12703C"/>
-                </a:solidFill>
-                <a:latin typeface="Calibri" pitchFamily="34" charset="0"/>
-                <a:ea typeface="Calibri" pitchFamily="34" charset="-122"/>
-                <a:cs typeface="Calibri" pitchFamily="34" charset="-120"/>
-              </a:rPr>
-              <a:t>Raw readings stay at the edge; the fog node sends one aggregate per sensor per window, so alerts fire next to the hardware.</a:t>
-            </a:r>
-            <a:endParaRPr lang="en-US" sz="1500" dirty="0"/>
+            <a:endParaRPr lang="en-US" sz="900" dirty="0"/>
           </a:p>
         </p:txBody>
       </p:sp>
@@ -2565,7 +2806,7 @@
     <p:bg>
       <p:bgPr>
         <a:solidFill>
-          <a:srgbClr val="FFFFFF"/>
+          <a:srgbClr val="0F1412"/>
         </a:solidFill>
       </p:bgPr>
     </p:bg>
@@ -2585,23 +2826,221 @@
       </p:grpSpPr>
       <p:sp>
         <p:nvSpPr>
-          <p:cNvPr id="2" name="Text 0"/>
-          <p:cNvSpPr/>
-          <p:nvPr/>
-        </p:nvSpPr>
-        <p:spPr>
-          <a:xfrm>
-            <a:off x="640080" y="457200"/>
-            <a:ext cx="7315200" cy="640080"/>
-          </a:xfrm>
-          <a:prstGeom prst="rect">
-            <a:avLst/>
-          </a:prstGeom>
-          <a:noFill/>
-          <a:ln/>
-        </p:spPr>
-        <p:txBody>
-          <a:bodyPr wrap="square" rtlCol="0" anchor="ctr"/>
+          <p:cNvPr id="2" name="Shape 0"/>
+          <p:cNvSpPr/>
+          <p:nvPr/>
+        </p:nvSpPr>
+        <p:spPr>
+          <a:xfrm>
+            <a:off x="777240" y="6309360"/>
+            <a:ext cx="10637215" cy="0"/>
+          </a:xfrm>
+          <a:prstGeom prst="line">
+            <a:avLst/>
+          </a:prstGeom>
+          <a:noFill/>
+          <a:ln w="12700">
+            <a:solidFill>
+              <a:srgbClr val="27E881"/>
+            </a:solidFill>
+            <a:prstDash val="solid"/>
+          </a:ln>
+        </p:spPr>
+      </p:sp>
+      <p:sp>
+        <p:nvSpPr>
+          <p:cNvPr id="3" name="Shape 1"/>
+          <p:cNvSpPr/>
+          <p:nvPr/>
+        </p:nvSpPr>
+        <p:spPr>
+          <a:xfrm>
+            <a:off x="1033272" y="6245352"/>
+            <a:ext cx="128016" cy="128016"/>
+          </a:xfrm>
+          <a:prstGeom prst="ellipse">
+            <a:avLst/>
+          </a:prstGeom>
+          <a:solidFill>
+            <a:srgbClr val="0F1412"/>
+          </a:solidFill>
+          <a:ln w="12700">
+            <a:solidFill>
+              <a:srgbClr val="27E881"/>
+            </a:solidFill>
+            <a:prstDash val="solid"/>
+          </a:ln>
+        </p:spPr>
+      </p:sp>
+      <p:sp>
+        <p:nvSpPr>
+          <p:cNvPr id="4" name="Shape 2"/>
+          <p:cNvSpPr/>
+          <p:nvPr/>
+        </p:nvSpPr>
+        <p:spPr>
+          <a:xfrm>
+            <a:off x="2699461" y="6245352"/>
+            <a:ext cx="128016" cy="128016"/>
+          </a:xfrm>
+          <a:prstGeom prst="ellipse">
+            <a:avLst/>
+          </a:prstGeom>
+          <a:solidFill>
+            <a:srgbClr val="27E881"/>
+          </a:solidFill>
+          <a:ln w="12700">
+            <a:solidFill>
+              <a:srgbClr val="27E881"/>
+            </a:solidFill>
+            <a:prstDash val="solid"/>
+          </a:ln>
+        </p:spPr>
+      </p:sp>
+      <p:sp>
+        <p:nvSpPr>
+          <p:cNvPr id="5" name="Shape 3"/>
+          <p:cNvSpPr/>
+          <p:nvPr/>
+        </p:nvSpPr>
+        <p:spPr>
+          <a:xfrm>
+            <a:off x="4365650" y="6245352"/>
+            <a:ext cx="128016" cy="128016"/>
+          </a:xfrm>
+          <a:prstGeom prst="ellipse">
+            <a:avLst/>
+          </a:prstGeom>
+          <a:solidFill>
+            <a:srgbClr val="0F1412"/>
+          </a:solidFill>
+          <a:ln w="12700">
+            <a:solidFill>
+              <a:srgbClr val="27E881"/>
+            </a:solidFill>
+            <a:prstDash val="solid"/>
+          </a:ln>
+        </p:spPr>
+      </p:sp>
+      <p:sp>
+        <p:nvSpPr>
+          <p:cNvPr id="6" name="Shape 4"/>
+          <p:cNvSpPr/>
+          <p:nvPr/>
+        </p:nvSpPr>
+        <p:spPr>
+          <a:xfrm>
+            <a:off x="6031840" y="6245352"/>
+            <a:ext cx="128016" cy="128016"/>
+          </a:xfrm>
+          <a:prstGeom prst="ellipse">
+            <a:avLst/>
+          </a:prstGeom>
+          <a:solidFill>
+            <a:srgbClr val="27E881"/>
+          </a:solidFill>
+          <a:ln w="12700">
+            <a:solidFill>
+              <a:srgbClr val="27E881"/>
+            </a:solidFill>
+            <a:prstDash val="solid"/>
+          </a:ln>
+        </p:spPr>
+      </p:sp>
+      <p:sp>
+        <p:nvSpPr>
+          <p:cNvPr id="7" name="Shape 5"/>
+          <p:cNvSpPr/>
+          <p:nvPr/>
+        </p:nvSpPr>
+        <p:spPr>
+          <a:xfrm>
+            <a:off x="7698029" y="6245352"/>
+            <a:ext cx="128016" cy="128016"/>
+          </a:xfrm>
+          <a:prstGeom prst="ellipse">
+            <a:avLst/>
+          </a:prstGeom>
+          <a:solidFill>
+            <a:srgbClr val="0F1412"/>
+          </a:solidFill>
+          <a:ln w="12700">
+            <a:solidFill>
+              <a:srgbClr val="27E881"/>
+            </a:solidFill>
+            <a:prstDash val="solid"/>
+          </a:ln>
+        </p:spPr>
+      </p:sp>
+      <p:sp>
+        <p:nvSpPr>
+          <p:cNvPr id="8" name="Shape 6"/>
+          <p:cNvSpPr/>
+          <p:nvPr/>
+        </p:nvSpPr>
+        <p:spPr>
+          <a:xfrm>
+            <a:off x="9364218" y="6245352"/>
+            <a:ext cx="128016" cy="128016"/>
+          </a:xfrm>
+          <a:prstGeom prst="ellipse">
+            <a:avLst/>
+          </a:prstGeom>
+          <a:solidFill>
+            <a:srgbClr val="27E881"/>
+          </a:solidFill>
+          <a:ln w="12700">
+            <a:solidFill>
+              <a:srgbClr val="27E881"/>
+            </a:solidFill>
+            <a:prstDash val="solid"/>
+          </a:ln>
+        </p:spPr>
+      </p:sp>
+      <p:sp>
+        <p:nvSpPr>
+          <p:cNvPr id="9" name="Shape 7"/>
+          <p:cNvSpPr/>
+          <p:nvPr/>
+        </p:nvSpPr>
+        <p:spPr>
+          <a:xfrm>
+            <a:off x="11030407" y="6245352"/>
+            <a:ext cx="128016" cy="128016"/>
+          </a:xfrm>
+          <a:prstGeom prst="ellipse">
+            <a:avLst/>
+          </a:prstGeom>
+          <a:solidFill>
+            <a:srgbClr val="0F1412"/>
+          </a:solidFill>
+          <a:ln w="12700">
+            <a:solidFill>
+              <a:srgbClr val="27E881"/>
+            </a:solidFill>
+            <a:prstDash val="solid"/>
+          </a:ln>
+        </p:spPr>
+      </p:sp>
+      <p:sp>
+        <p:nvSpPr>
+          <p:cNvPr id="10" name="Text 8"/>
+          <p:cNvSpPr/>
+          <p:nvPr/>
+        </p:nvSpPr>
+        <p:spPr>
+          <a:xfrm>
+            <a:off x="777240" y="731520"/>
+            <a:ext cx="914400" cy="640080"/>
+          </a:xfrm>
+          <a:prstGeom prst="rect">
+            <a:avLst/>
+          </a:prstGeom>
+          <a:noFill/>
+          <a:ln/>
+        </p:spPr>
+        <p:txBody>
+          <a:bodyPr wrap="square" lIns="0" tIns="0" rIns="0" bIns="0" rtlCol="0" anchor="ctr"/>
           <a:lstStyle/>
           <a:p>
             <a:pPr indent="0" marL="0">
@@ -2610,13 +3049,13 @@
             <a:r>
               <a:rPr lang="en-US" sz="3000" b="1" dirty="0">
                 <a:solidFill>
-                  <a:srgbClr val="10281E"/>
+                  <a:srgbClr val="27E881"/>
                 </a:solidFill>
-                <a:latin typeface="Times New Roman" pitchFamily="34" charset="0"/>
-                <a:ea typeface="Times New Roman" pitchFamily="34" charset="-122"/>
-                <a:cs typeface="Times New Roman" pitchFamily="34" charset="-120"/>
+                <a:latin typeface="Calibri" pitchFamily="34" charset="0"/>
+                <a:ea typeface="Calibri" pitchFamily="34" charset="-122"/>
+                <a:cs typeface="Calibri" pitchFamily="34" charset="-120"/>
               </a:rPr>
-              <a:t>Live Demo</a:t>
+              <a:t>02</a:t>
             </a:r>
             <a:endParaRPr lang="en-US" sz="3000" dirty="0"/>
           </a:p>
@@ -2624,32 +3063,110 @@
       </p:sp>
       <p:sp>
         <p:nvSpPr>
-          <p:cNvPr id="3" name="Text 1"/>
-          <p:cNvSpPr/>
-          <p:nvPr/>
-        </p:nvSpPr>
-        <p:spPr>
-          <a:xfrm>
-            <a:off x="658368" y="1143000"/>
-            <a:ext cx="10972800" cy="365760"/>
-          </a:xfrm>
-          <a:prstGeom prst="rect">
-            <a:avLst/>
-          </a:prstGeom>
-          <a:noFill/>
-          <a:ln/>
-        </p:spPr>
-        <p:txBody>
-          <a:bodyPr wrap="square" rtlCol="0" anchor="ctr"/>
+          <p:cNvPr id="11" name="Text 9"/>
+          <p:cNvSpPr/>
+          <p:nvPr/>
+        </p:nvSpPr>
+        <p:spPr>
+          <a:xfrm>
+            <a:off x="1645920" y="905256"/>
+            <a:ext cx="9768535" cy="274320"/>
+          </a:xfrm>
+          <a:prstGeom prst="rect">
+            <a:avLst/>
+          </a:prstGeom>
+          <a:noFill/>
+          <a:ln/>
+        </p:spPr>
+        <p:txBody>
+          <a:bodyPr wrap="square" lIns="0" tIns="0" rIns="0" bIns="0" rtlCol="0" anchor="ctr"/>
           <a:lstStyle/>
           <a:p>
             <a:pPr indent="0" marL="0">
               <a:buNone/>
             </a:pPr>
             <a:r>
-              <a:rPr lang="en-US" sz="1400" dirty="0">
+              <a:rPr lang="en-US" sz="1100" b="1" spc="200" kern="0" dirty="0">
                 <a:solidFill>
-                  <a:srgbClr val="1E9450"/>
+                  <a:srgbClr val="8B98A6"/>
+                </a:solidFill>
+                <a:latin typeface="Calibri" pitchFamily="34" charset="0"/>
+                <a:ea typeface="Calibri" pitchFamily="34" charset="-122"/>
+                <a:cs typeface="Calibri" pitchFamily="34" charset="-120"/>
+              </a:rPr>
+              <a:t>LIVE DEMO</a:t>
+            </a:r>
+            <a:endParaRPr lang="en-US" sz="1100" dirty="0"/>
+          </a:p>
+        </p:txBody>
+      </p:sp>
+      <p:sp>
+        <p:nvSpPr>
+          <p:cNvPr id="12" name="Text 10"/>
+          <p:cNvSpPr/>
+          <p:nvPr/>
+        </p:nvSpPr>
+        <p:spPr>
+          <a:xfrm>
+            <a:off x="777240" y="1380744"/>
+            <a:ext cx="10637215" cy="640080"/>
+          </a:xfrm>
+          <a:prstGeom prst="rect">
+            <a:avLst/>
+          </a:prstGeom>
+          <a:noFill/>
+          <a:ln/>
+        </p:spPr>
+        <p:txBody>
+          <a:bodyPr wrap="square" lIns="0" tIns="0" rIns="0" bIns="0" rtlCol="0" anchor="ctr"/>
+          <a:lstStyle/>
+          <a:p>
+            <a:pPr indent="0" marL="0">
+              <a:buNone/>
+            </a:pPr>
+            <a:r>
+              <a:rPr lang="en-US" sz="2300" b="1" dirty="0">
+                <a:solidFill>
+                  <a:srgbClr val="EAF3EE"/>
+                </a:solidFill>
+                <a:latin typeface="Calibri" pitchFamily="34" charset="0"/>
+                <a:ea typeface="Calibri" pitchFamily="34" charset="-122"/>
+                <a:cs typeface="Calibri" pitchFamily="34" charset="-120"/>
+              </a:rPr>
+              <a:t>See it running on AWS</a:t>
+            </a:r>
+            <a:endParaRPr lang="en-US" sz="2300" dirty="0"/>
+          </a:p>
+        </p:txBody>
+      </p:sp>
+      <p:sp>
+        <p:nvSpPr>
+          <p:cNvPr id="13" name="Text 11"/>
+          <p:cNvSpPr/>
+          <p:nvPr/>
+        </p:nvSpPr>
+        <p:spPr>
+          <a:xfrm>
+            <a:off x="777240" y="1901952"/>
+            <a:ext cx="10637215" cy="274320"/>
+          </a:xfrm>
+          <a:prstGeom prst="rect">
+            <a:avLst/>
+          </a:prstGeom>
+          <a:noFill/>
+          <a:ln/>
+        </p:spPr>
+        <p:txBody>
+          <a:bodyPr wrap="square" rtlCol="0" anchor="ctr"/>
+          <a:lstStyle/>
+          <a:p>
+            <a:pPr indent="0" marL="0">
+              <a:buNone/>
+            </a:pPr>
+            <a:r>
+              <a:rPr lang="en-US" sz="1100" dirty="0">
+                <a:solidFill>
+                  <a:srgbClr val="27E881"/>
                 </a:solidFill>
                 <a:latin typeface="Consolas" pitchFamily="34" charset="0"/>
                 <a:ea typeface="Consolas" pitchFamily="34" charset="-122"/>
@@ -2657,32 +3174,32 @@
               </a:rPr>
               <a:t>ecn-frontend-350600740537.s3.us-east-1.amazonaws.com</a:t>
             </a:r>
-            <a:endParaRPr lang="en-US" sz="1400" dirty="0"/>
-          </a:p>
-        </p:txBody>
-      </p:sp>
-      <p:sp>
-        <p:nvSpPr>
-          <p:cNvPr id="4" name="Shape 2"/>
-          <p:cNvSpPr/>
-          <p:nvPr/>
-        </p:nvSpPr>
-        <p:spPr>
-          <a:xfrm>
-            <a:off x="640080" y="1828800"/>
-            <a:ext cx="10881360" cy="1371600"/>
+            <a:endParaRPr lang="en-US" sz="1100" dirty="0"/>
+          </a:p>
+        </p:txBody>
+      </p:sp>
+      <p:sp>
+        <p:nvSpPr>
+          <p:cNvPr id="14" name="Shape 12"/>
+          <p:cNvSpPr/>
+          <p:nvPr/>
+        </p:nvSpPr>
+        <p:spPr>
+          <a:xfrm>
+            <a:off x="777240" y="2514600"/>
+            <a:ext cx="3301898" cy="3200400"/>
           </a:xfrm>
           <a:prstGeom prst="roundRect">
             <a:avLst>
-              <a:gd name="adj" fmla="val 6667"/>
+              <a:gd name="adj" fmla="val 1143"/>
             </a:avLst>
           </a:prstGeom>
           <a:solidFill>
-            <a:srgbClr val="EDF6F0"/>
-          </a:solidFill>
-          <a:ln w="15240">
+            <a:srgbClr val="1B221E"/>
+          </a:solidFill>
+          <a:ln w="12700">
             <a:solidFill>
-              <a:srgbClr val="1E9450"/>
+              <a:srgbClr val="2F3632"/>
             </a:solidFill>
             <a:prstDash val="solid"/>
           </a:ln>
@@ -2690,73 +3207,14 @@
       </p:sp>
       <p:sp>
         <p:nvSpPr>
-          <p:cNvPr id="5" name="Shape 3"/>
-          <p:cNvSpPr/>
-          <p:nvPr/>
-        </p:nvSpPr>
-        <p:spPr>
-          <a:xfrm>
-            <a:off x="960120" y="2203704"/>
-            <a:ext cx="621792" cy="621792"/>
-          </a:xfrm>
-          <a:prstGeom prst="ellipse">
-            <a:avLst/>
-          </a:prstGeom>
-          <a:solidFill>
-            <a:srgbClr val="12703C"/>
-          </a:solidFill>
-          <a:ln/>
-        </p:spPr>
-      </p:sp>
-      <p:sp>
-        <p:nvSpPr>
-          <p:cNvPr id="6" name="Text 4"/>
-          <p:cNvSpPr/>
-          <p:nvPr/>
-        </p:nvSpPr>
-        <p:spPr>
-          <a:xfrm>
-            <a:off x="960120" y="2203704"/>
-            <a:ext cx="621792" cy="621792"/>
-          </a:xfrm>
-          <a:prstGeom prst="rect">
-            <a:avLst/>
-          </a:prstGeom>
-          <a:noFill/>
-          <a:ln/>
-        </p:spPr>
-        <p:txBody>
-          <a:bodyPr wrap="square" lIns="0" tIns="0" rIns="0" bIns="0" rtlCol="0" anchor="ctr"/>
-          <a:lstStyle/>
-          <a:p>
-            <a:pPr algn="ctr" indent="0" marL="0">
-              <a:buNone/>
-            </a:pPr>
-            <a:r>
-              <a:rPr lang="en-US" sz="2200" b="1" dirty="0">
-                <a:solidFill>
-                  <a:srgbClr val="FFFFFF"/>
-                </a:solidFill>
-                <a:latin typeface="Times New Roman" pitchFamily="34" charset="0"/>
-                <a:ea typeface="Times New Roman" pitchFamily="34" charset="-122"/>
-                <a:cs typeface="Times New Roman" pitchFamily="34" charset="-120"/>
-              </a:rPr>
-              <a:t>1</a:t>
-            </a:r>
-            <a:endParaRPr lang="en-US" sz="2200" dirty="0"/>
-          </a:p>
-        </p:txBody>
-      </p:sp>
-      <p:sp>
-        <p:nvSpPr>
-          <p:cNvPr id="7" name="Text 5"/>
-          <p:cNvSpPr/>
-          <p:nvPr/>
-        </p:nvSpPr>
-        <p:spPr>
-          <a:xfrm>
-            <a:off x="1828800" y="2029968"/>
-            <a:ext cx="9418320" cy="411480"/>
+          <p:cNvPr id="15" name="Text 13"/>
+          <p:cNvSpPr/>
+          <p:nvPr/>
+        </p:nvSpPr>
+        <p:spPr>
+          <a:xfrm>
+            <a:off x="1051560" y="2752344"/>
+            <a:ext cx="1828800" cy="777240"/>
           </a:xfrm>
           <a:prstGeom prst="rect">
             <a:avLst/>
@@ -2772,9 +3230,51 @@
               <a:buNone/>
             </a:pPr>
             <a:r>
-              <a:rPr lang="en-US" sz="1700" b="1" dirty="0">
+              <a:rPr lang="en-US" sz="3800" b="1" dirty="0">
                 <a:solidFill>
-                  <a:srgbClr val="10281E"/>
+                  <a:srgbClr val="27E881"/>
+                </a:solidFill>
+                <a:latin typeface="Calibri" pitchFamily="34" charset="0"/>
+                <a:ea typeface="Calibri" pitchFamily="34" charset="-122"/>
+                <a:cs typeface="Calibri" pitchFamily="34" charset="-120"/>
+              </a:rPr>
+              <a:t>01</a:t>
+            </a:r>
+            <a:endParaRPr lang="en-US" sz="3800" dirty="0"/>
+          </a:p>
+        </p:txBody>
+      </p:sp>
+      <p:sp>
+        <p:nvSpPr>
+          <p:cNvPr id="16" name="Text 14"/>
+          <p:cNvSpPr/>
+          <p:nvPr/>
+        </p:nvSpPr>
+        <p:spPr>
+          <a:xfrm>
+            <a:off x="1069848" y="3566160"/>
+            <a:ext cx="2753258" cy="868680"/>
+          </a:xfrm>
+          <a:prstGeom prst="rect">
+            <a:avLst/>
+          </a:prstGeom>
+          <a:noFill/>
+          <a:ln/>
+        </p:spPr>
+        <p:txBody>
+          <a:bodyPr wrap="square" lIns="0" tIns="0" rIns="0" bIns="0" rtlCol="0" anchor="t"/>
+          <a:lstStyle/>
+          <a:p>
+            <a:pPr indent="0" marL="0">
+              <a:lnSpc>
+                <a:spcPct val="100000"/>
+              </a:lnSpc>
+              <a:buNone/>
+            </a:pPr>
+            <a:r>
+              <a:rPr lang="en-US" sz="1550" b="1" dirty="0">
+                <a:solidFill>
+                  <a:srgbClr val="EAF3EE"/>
                 </a:solidFill>
                 <a:latin typeface="Calibri" pitchFamily="34" charset="0"/>
                 <a:ea typeface="Calibri" pitchFamily="34" charset="-122"/>
@@ -2782,20 +3282,20 @@
               </a:rPr>
               <a:t>Two hubs, five charging metrics</a:t>
             </a:r>
-            <a:endParaRPr lang="en-US" sz="1700" dirty="0"/>
-          </a:p>
-        </p:txBody>
-      </p:sp>
-      <p:sp>
-        <p:nvSpPr>
-          <p:cNvPr id="8" name="Text 6"/>
-          <p:cNvSpPr/>
-          <p:nvPr/>
-        </p:nvSpPr>
-        <p:spPr>
-          <a:xfrm>
-            <a:off x="1828800" y="2450592"/>
-            <a:ext cx="9418320" cy="594360"/>
+            <a:endParaRPr lang="en-US" sz="1550" dirty="0"/>
+          </a:p>
+        </p:txBody>
+      </p:sp>
+      <p:sp>
+        <p:nvSpPr>
+          <p:cNvPr id="17" name="Text 15"/>
+          <p:cNvSpPr/>
+          <p:nvPr/>
+        </p:nvSpPr>
+        <p:spPr>
+          <a:xfrm>
+            <a:off x="1069848" y="4434840"/>
+            <a:ext cx="2753258" cy="1097280"/>
           </a:xfrm>
           <a:prstGeom prst="rect">
             <a:avLst/>
@@ -2809,14 +3309,14 @@
           <a:p>
             <a:pPr indent="0" marL="0">
               <a:lnSpc>
-                <a:spcPct val="105000"/>
+                <a:spcPct val="120000"/>
               </a:lnSpc>
               <a:buNone/>
             </a:pPr>
             <a:r>
-              <a:rPr lang="en-US" sz="1300" dirty="0">
+              <a:rPr lang="en-US" sz="1200" dirty="0">
                 <a:solidFill>
-                  <a:srgbClr val="557064"/>
+                  <a:srgbClr val="8B98A6"/>
                 </a:solidFill>
                 <a:latin typeface="Calibri" pitchFamily="34" charset="0"/>
                 <a:ea typeface="Calibri" pitchFamily="34" charset="-122"/>
@@ -2824,32 +3324,32 @@
               </a:rPr>
               <a:t>Current, battery charge, temperature, grid load and session time live for both hubs, freshest reading a few seconds old.</a:t>
             </a:r>
-            <a:endParaRPr lang="en-US" sz="1300" dirty="0"/>
-          </a:p>
-        </p:txBody>
-      </p:sp>
-      <p:sp>
-        <p:nvSpPr>
-          <p:cNvPr id="9" name="Shape 7"/>
-          <p:cNvSpPr/>
-          <p:nvPr/>
-        </p:nvSpPr>
-        <p:spPr>
-          <a:xfrm>
-            <a:off x="640080" y="3346704"/>
-            <a:ext cx="10881360" cy="1371600"/>
+            <a:endParaRPr lang="en-US" sz="1200" dirty="0"/>
+          </a:p>
+        </p:txBody>
+      </p:sp>
+      <p:sp>
+        <p:nvSpPr>
+          <p:cNvPr id="18" name="Shape 16"/>
+          <p:cNvSpPr/>
+          <p:nvPr/>
+        </p:nvSpPr>
+        <p:spPr>
+          <a:xfrm>
+            <a:off x="4444898" y="2514600"/>
+            <a:ext cx="3301898" cy="3200400"/>
           </a:xfrm>
           <a:prstGeom prst="roundRect">
             <a:avLst>
-              <a:gd name="adj" fmla="val 6667"/>
+              <a:gd name="adj" fmla="val 1143"/>
             </a:avLst>
           </a:prstGeom>
           <a:solidFill>
-            <a:srgbClr val="EDF6F0"/>
-          </a:solidFill>
-          <a:ln w="15240">
+            <a:srgbClr val="1B221E"/>
+          </a:solidFill>
+          <a:ln w="12700">
             <a:solidFill>
-              <a:srgbClr val="1E9450"/>
+              <a:srgbClr val="2F3632"/>
             </a:solidFill>
             <a:prstDash val="solid"/>
           </a:ln>
@@ -2857,73 +3357,14 @@
       </p:sp>
       <p:sp>
         <p:nvSpPr>
-          <p:cNvPr id="10" name="Shape 8"/>
-          <p:cNvSpPr/>
-          <p:nvPr/>
-        </p:nvSpPr>
-        <p:spPr>
-          <a:xfrm>
-            <a:off x="960120" y="3721608"/>
-            <a:ext cx="621792" cy="621792"/>
-          </a:xfrm>
-          <a:prstGeom prst="ellipse">
-            <a:avLst/>
-          </a:prstGeom>
-          <a:solidFill>
-            <a:srgbClr val="12703C"/>
-          </a:solidFill>
-          <a:ln/>
-        </p:spPr>
-      </p:sp>
-      <p:sp>
-        <p:nvSpPr>
-          <p:cNvPr id="11" name="Text 9"/>
-          <p:cNvSpPr/>
-          <p:nvPr/>
-        </p:nvSpPr>
-        <p:spPr>
-          <a:xfrm>
-            <a:off x="960120" y="3721608"/>
-            <a:ext cx="621792" cy="621792"/>
-          </a:xfrm>
-          <a:prstGeom prst="rect">
-            <a:avLst/>
-          </a:prstGeom>
-          <a:noFill/>
-          <a:ln/>
-        </p:spPr>
-        <p:txBody>
-          <a:bodyPr wrap="square" lIns="0" tIns="0" rIns="0" bIns="0" rtlCol="0" anchor="ctr"/>
-          <a:lstStyle/>
-          <a:p>
-            <a:pPr algn="ctr" indent="0" marL="0">
-              <a:buNone/>
-            </a:pPr>
-            <a:r>
-              <a:rPr lang="en-US" sz="2200" b="1" dirty="0">
-                <a:solidFill>
-                  <a:srgbClr val="FFFFFF"/>
-                </a:solidFill>
-                <a:latin typeface="Times New Roman" pitchFamily="34" charset="0"/>
-                <a:ea typeface="Times New Roman" pitchFamily="34" charset="-122"/>
-                <a:cs typeface="Times New Roman" pitchFamily="34" charset="-120"/>
-              </a:rPr>
-              <a:t>2</a:t>
-            </a:r>
-            <a:endParaRPr lang="en-US" sz="2200" dirty="0"/>
-          </a:p>
-        </p:txBody>
-      </p:sp>
-      <p:sp>
-        <p:nvSpPr>
-          <p:cNvPr id="12" name="Text 10"/>
-          <p:cNvSpPr/>
-          <p:nvPr/>
-        </p:nvSpPr>
-        <p:spPr>
-          <a:xfrm>
-            <a:off x="1828800" y="3547872"/>
-            <a:ext cx="9418320" cy="411480"/>
+          <p:cNvPr id="19" name="Text 17"/>
+          <p:cNvSpPr/>
+          <p:nvPr/>
+        </p:nvSpPr>
+        <p:spPr>
+          <a:xfrm>
+            <a:off x="4719218" y="2752344"/>
+            <a:ext cx="1828800" cy="777240"/>
           </a:xfrm>
           <a:prstGeom prst="rect">
             <a:avLst/>
@@ -2939,9 +3380,51 @@
               <a:buNone/>
             </a:pPr>
             <a:r>
-              <a:rPr lang="en-US" sz="1700" b="1" dirty="0">
+              <a:rPr lang="en-US" sz="3800" b="1" dirty="0">
                 <a:solidFill>
-                  <a:srgbClr val="10281E"/>
+                  <a:srgbClr val="27E881"/>
+                </a:solidFill>
+                <a:latin typeface="Calibri" pitchFamily="34" charset="0"/>
+                <a:ea typeface="Calibri" pitchFamily="34" charset="-122"/>
+                <a:cs typeface="Calibri" pitchFamily="34" charset="-120"/>
+              </a:rPr>
+              <a:t>02</a:t>
+            </a:r>
+            <a:endParaRPr lang="en-US" sz="3800" dirty="0"/>
+          </a:p>
+        </p:txBody>
+      </p:sp>
+      <p:sp>
+        <p:nvSpPr>
+          <p:cNvPr id="20" name="Text 18"/>
+          <p:cNvSpPr/>
+          <p:nvPr/>
+        </p:nvSpPr>
+        <p:spPr>
+          <a:xfrm>
+            <a:off x="4737506" y="3566160"/>
+            <a:ext cx="2753258" cy="868680"/>
+          </a:xfrm>
+          <a:prstGeom prst="rect">
+            <a:avLst/>
+          </a:prstGeom>
+          <a:noFill/>
+          <a:ln/>
+        </p:spPr>
+        <p:txBody>
+          <a:bodyPr wrap="square" lIns="0" tIns="0" rIns="0" bIns="0" rtlCol="0" anchor="t"/>
+          <a:lstStyle/>
+          <a:p>
+            <a:pPr indent="0" marL="0">
+              <a:lnSpc>
+                <a:spcPct val="100000"/>
+              </a:lnSpc>
+              <a:buNone/>
+            </a:pPr>
+            <a:r>
+              <a:rPr lang="en-US" sz="1550" b="1" dirty="0">
+                <a:solidFill>
+                  <a:srgbClr val="EAF3EE"/>
                 </a:solidFill>
                 <a:latin typeface="Calibri" pitchFamily="34" charset="0"/>
                 <a:ea typeface="Calibri" pitchFamily="34" charset="-122"/>
@@ -2949,20 +3432,20 @@
               </a:rPr>
               <a:t>Two safety alerts on hub-1</a:t>
             </a:r>
-            <a:endParaRPr lang="en-US" sz="1700" dirty="0"/>
-          </a:p>
-        </p:txBody>
-      </p:sp>
-      <p:sp>
-        <p:nvSpPr>
-          <p:cNvPr id="13" name="Text 11"/>
-          <p:cNvSpPr/>
-          <p:nvPr/>
-        </p:nvSpPr>
-        <p:spPr>
-          <a:xfrm>
-            <a:off x="1828800" y="3968496"/>
-            <a:ext cx="9418320" cy="594360"/>
+            <a:endParaRPr lang="en-US" sz="1550" dirty="0"/>
+          </a:p>
+        </p:txBody>
+      </p:sp>
+      <p:sp>
+        <p:nvSpPr>
+          <p:cNvPr id="21" name="Text 19"/>
+          <p:cNvSpPr/>
+          <p:nvPr/>
+        </p:nvSpPr>
+        <p:spPr>
+          <a:xfrm>
+            <a:off x="4737506" y="4434840"/>
+            <a:ext cx="2753258" cy="1097280"/>
           </a:xfrm>
           <a:prstGeom prst="rect">
             <a:avLst/>
@@ -2976,14 +3459,14 @@
           <a:p>
             <a:pPr indent="0" marL="0">
               <a:lnSpc>
-                <a:spcPct val="105000"/>
+                <a:spcPct val="120000"/>
               </a:lnSpc>
               <a:buNone/>
             </a:pPr>
             <a:r>
-              <a:rPr lang="en-US" sz="1300" dirty="0">
+              <a:rPr lang="en-US" sz="1200" dirty="0">
                 <a:solidFill>
-                  <a:srgbClr val="557064"/>
+                  <a:srgbClr val="8B98A6"/>
                 </a:solidFill>
                 <a:latin typeface="Calibri" pitchFamily="34" charset="0"/>
                 <a:ea typeface="Calibri" pitchFamily="34" charset="-122"/>
@@ -2991,32 +3474,32 @@
               </a:rPr>
               <a:t>Overheat risk and grid strain are both firing live on hub-1, each raised at the fog node the moment its window crossed.</a:t>
             </a:r>
-            <a:endParaRPr lang="en-US" sz="1300" dirty="0"/>
-          </a:p>
-        </p:txBody>
-      </p:sp>
-      <p:sp>
-        <p:nvSpPr>
-          <p:cNvPr id="14" name="Shape 12"/>
-          <p:cNvSpPr/>
-          <p:nvPr/>
-        </p:nvSpPr>
-        <p:spPr>
-          <a:xfrm>
-            <a:off x="640080" y="4864608"/>
-            <a:ext cx="10881360" cy="1371600"/>
+            <a:endParaRPr lang="en-US" sz="1200" dirty="0"/>
+          </a:p>
+        </p:txBody>
+      </p:sp>
+      <p:sp>
+        <p:nvSpPr>
+          <p:cNvPr id="22" name="Shape 20"/>
+          <p:cNvSpPr/>
+          <p:nvPr/>
+        </p:nvSpPr>
+        <p:spPr>
+          <a:xfrm>
+            <a:off x="8112557" y="2514600"/>
+            <a:ext cx="3301898" cy="3200400"/>
           </a:xfrm>
           <a:prstGeom prst="roundRect">
             <a:avLst>
-              <a:gd name="adj" fmla="val 6667"/>
+              <a:gd name="adj" fmla="val 1143"/>
             </a:avLst>
           </a:prstGeom>
           <a:solidFill>
-            <a:srgbClr val="EDF6F0"/>
-          </a:solidFill>
-          <a:ln w="15240">
+            <a:srgbClr val="1B221E"/>
+          </a:solidFill>
+          <a:ln w="12700">
             <a:solidFill>
-              <a:srgbClr val="1E9450"/>
+              <a:srgbClr val="2F3632"/>
             </a:solidFill>
             <a:prstDash val="solid"/>
           </a:ln>
@@ -3024,73 +3507,14 @@
       </p:sp>
       <p:sp>
         <p:nvSpPr>
-          <p:cNvPr id="15" name="Shape 13"/>
-          <p:cNvSpPr/>
-          <p:nvPr/>
-        </p:nvSpPr>
-        <p:spPr>
-          <a:xfrm>
-            <a:off x="960120" y="5239512"/>
-            <a:ext cx="621792" cy="621792"/>
-          </a:xfrm>
-          <a:prstGeom prst="ellipse">
-            <a:avLst/>
-          </a:prstGeom>
-          <a:solidFill>
-            <a:srgbClr val="12703C"/>
-          </a:solidFill>
-          <a:ln/>
-        </p:spPr>
-      </p:sp>
-      <p:sp>
-        <p:nvSpPr>
-          <p:cNvPr id="16" name="Text 14"/>
-          <p:cNvSpPr/>
-          <p:nvPr/>
-        </p:nvSpPr>
-        <p:spPr>
-          <a:xfrm>
-            <a:off x="960120" y="5239512"/>
-            <a:ext cx="621792" cy="621792"/>
-          </a:xfrm>
-          <a:prstGeom prst="rect">
-            <a:avLst/>
-          </a:prstGeom>
-          <a:noFill/>
-          <a:ln/>
-        </p:spPr>
-        <p:txBody>
-          <a:bodyPr wrap="square" lIns="0" tIns="0" rIns="0" bIns="0" rtlCol="0" anchor="ctr"/>
-          <a:lstStyle/>
-          <a:p>
-            <a:pPr algn="ctr" indent="0" marL="0">
-              <a:buNone/>
-            </a:pPr>
-            <a:r>
-              <a:rPr lang="en-US" sz="2200" b="1" dirty="0">
-                <a:solidFill>
-                  <a:srgbClr val="FFFFFF"/>
-                </a:solidFill>
-                <a:latin typeface="Times New Roman" pitchFamily="34" charset="0"/>
-                <a:ea typeface="Times New Roman" pitchFamily="34" charset="-122"/>
-                <a:cs typeface="Times New Roman" pitchFamily="34" charset="-120"/>
-              </a:rPr>
-              <a:t>3</a:t>
-            </a:r>
-            <a:endParaRPr lang="en-US" sz="2200" dirty="0"/>
-          </a:p>
-        </p:txBody>
-      </p:sp>
-      <p:sp>
-        <p:nvSpPr>
-          <p:cNvPr id="17" name="Text 15"/>
-          <p:cNvSpPr/>
-          <p:nvPr/>
-        </p:nvSpPr>
-        <p:spPr>
-          <a:xfrm>
-            <a:off x="1828800" y="5065776"/>
-            <a:ext cx="9418320" cy="411480"/>
+          <p:cNvPr id="23" name="Text 21"/>
+          <p:cNvSpPr/>
+          <p:nvPr/>
+        </p:nvSpPr>
+        <p:spPr>
+          <a:xfrm>
+            <a:off x="8386877" y="2752344"/>
+            <a:ext cx="1828800" cy="777240"/>
           </a:xfrm>
           <a:prstGeom prst="rect">
             <a:avLst/>
@@ -3106,9 +3530,51 @@
               <a:buNone/>
             </a:pPr>
             <a:r>
-              <a:rPr lang="en-US" sz="1700" b="1" dirty="0">
+              <a:rPr lang="en-US" sz="3800" b="1" dirty="0">
                 <a:solidFill>
-                  <a:srgbClr val="10281E"/>
+                  <a:srgbClr val="27E881"/>
+                </a:solidFill>
+                <a:latin typeface="Calibri" pitchFamily="34" charset="0"/>
+                <a:ea typeface="Calibri" pitchFamily="34" charset="-122"/>
+                <a:cs typeface="Calibri" pitchFamily="34" charset="-120"/>
+              </a:rPr>
+              <a:t>03</a:t>
+            </a:r>
+            <a:endParaRPr lang="en-US" sz="3800" dirty="0"/>
+          </a:p>
+        </p:txBody>
+      </p:sp>
+      <p:sp>
+        <p:nvSpPr>
+          <p:cNvPr id="24" name="Text 22"/>
+          <p:cNvSpPr/>
+          <p:nvPr/>
+        </p:nvSpPr>
+        <p:spPr>
+          <a:xfrm>
+            <a:off x="8405165" y="3566160"/>
+            <a:ext cx="2753258" cy="868680"/>
+          </a:xfrm>
+          <a:prstGeom prst="rect">
+            <a:avLst/>
+          </a:prstGeom>
+          <a:noFill/>
+          <a:ln/>
+        </p:spPr>
+        <p:txBody>
+          <a:bodyPr wrap="square" lIns="0" tIns="0" rIns="0" bIns="0" rtlCol="0" anchor="t"/>
+          <a:lstStyle/>
+          <a:p>
+            <a:pPr indent="0" marL="0">
+              <a:lnSpc>
+                <a:spcPct val="100000"/>
+              </a:lnSpc>
+              <a:buNone/>
+            </a:pPr>
+            <a:r>
+              <a:rPr lang="en-US" sz="1550" b="1" dirty="0">
+                <a:solidFill>
+                  <a:srgbClr val="EAF3EE"/>
                 </a:solidFill>
                 <a:latin typeface="Calibri" pitchFamily="34" charset="0"/>
                 <a:ea typeface="Calibri" pitchFamily="34" charset="-122"/>
@@ -3116,20 +3582,20 @@
               </a:rPr>
               <a:t>Real data, climbing</a:t>
             </a:r>
-            <a:endParaRPr lang="en-US" sz="1700" dirty="0"/>
-          </a:p>
-        </p:txBody>
-      </p:sp>
-      <p:sp>
-        <p:nvSpPr>
-          <p:cNvPr id="18" name="Text 16"/>
-          <p:cNvSpPr/>
-          <p:nvPr/>
-        </p:nvSpPr>
-        <p:spPr>
-          <a:xfrm>
-            <a:off x="1828800" y="5486400"/>
-            <a:ext cx="9418320" cy="594360"/>
+            <a:endParaRPr lang="en-US" sz="1550" dirty="0"/>
+          </a:p>
+        </p:txBody>
+      </p:sp>
+      <p:sp>
+        <p:nvSpPr>
+          <p:cNvPr id="25" name="Text 23"/>
+          <p:cNvSpPr/>
+          <p:nvPr/>
+        </p:nvSpPr>
+        <p:spPr>
+          <a:xfrm>
+            <a:off x="8405165" y="4434840"/>
+            <a:ext cx="2753258" cy="1097280"/>
           </a:xfrm>
           <a:prstGeom prst="rect">
             <a:avLst/>
@@ -3143,14 +3609,14 @@
           <a:p>
             <a:pPr indent="0" marL="0">
               <a:lnSpc>
-                <a:spcPct val="105000"/>
+                <a:spcPct val="120000"/>
               </a:lnSpc>
               <a:buNone/>
             </a:pPr>
             <a:r>
-              <a:rPr lang="en-US" sz="1300" dirty="0">
+              <a:rPr lang="en-US" sz="1200" dirty="0">
                 <a:solidFill>
-                  <a:srgbClr val="557064"/>
+                  <a:srgbClr val="8B98A6"/>
                 </a:solidFill>
                 <a:latin typeface="Calibri" pitchFamily="34" charset="0"/>
                 <a:ea typeface="Calibri" pitchFamily="34" charset="-122"/>
@@ -3158,7 +3624,7 @@
               </a:rPr>
               <a:t>The stored-record count runs from 26 to 289 across the verification window, confirming genuinely live data.</a:t>
             </a:r>
-            <a:endParaRPr lang="en-US" sz="1300" dirty="0"/>
+            <a:endParaRPr lang="en-US" sz="1200" dirty="0"/>
           </a:p>
         </p:txBody>
       </p:sp>
@@ -3176,7 +3642,7 @@
     <p:bg>
       <p:bgPr>
         <a:solidFill>
-          <a:srgbClr val="FFFFFF"/>
+          <a:srgbClr val="0F1412"/>
         </a:solidFill>
       </p:bgPr>
     </p:bg>
@@ -3196,65 +3662,341 @@
       </p:grpSpPr>
       <p:sp>
         <p:nvSpPr>
-          <p:cNvPr id="2" name="Text 0"/>
-          <p:cNvSpPr/>
-          <p:nvPr/>
-        </p:nvSpPr>
-        <p:spPr>
-          <a:xfrm>
-            <a:off x="640080" y="502920"/>
-            <a:ext cx="10972800" cy="822960"/>
-          </a:xfrm>
-          <a:prstGeom prst="rect">
-            <a:avLst/>
-          </a:prstGeom>
-          <a:noFill/>
-          <a:ln/>
-        </p:spPr>
-        <p:txBody>
-          <a:bodyPr wrap="square" rtlCol="0" anchor="t"/>
+          <p:cNvPr id="2" name="Shape 0"/>
+          <p:cNvSpPr/>
+          <p:nvPr/>
+        </p:nvSpPr>
+        <p:spPr>
+          <a:xfrm>
+            <a:off x="777240" y="6309360"/>
+            <a:ext cx="10637215" cy="0"/>
+          </a:xfrm>
+          <a:prstGeom prst="line">
+            <a:avLst/>
+          </a:prstGeom>
+          <a:noFill/>
+          <a:ln w="12700">
+            <a:solidFill>
+              <a:srgbClr val="27E881"/>
+            </a:solidFill>
+            <a:prstDash val="solid"/>
+          </a:ln>
+        </p:spPr>
+      </p:sp>
+      <p:sp>
+        <p:nvSpPr>
+          <p:cNvPr id="3" name="Shape 1"/>
+          <p:cNvSpPr/>
+          <p:nvPr/>
+        </p:nvSpPr>
+        <p:spPr>
+          <a:xfrm>
+            <a:off x="1033272" y="6245352"/>
+            <a:ext cx="128016" cy="128016"/>
+          </a:xfrm>
+          <a:prstGeom prst="ellipse">
+            <a:avLst/>
+          </a:prstGeom>
+          <a:solidFill>
+            <a:srgbClr val="0F1412"/>
+          </a:solidFill>
+          <a:ln w="12700">
+            <a:solidFill>
+              <a:srgbClr val="27E881"/>
+            </a:solidFill>
+            <a:prstDash val="solid"/>
+          </a:ln>
+        </p:spPr>
+      </p:sp>
+      <p:sp>
+        <p:nvSpPr>
+          <p:cNvPr id="4" name="Shape 2"/>
+          <p:cNvSpPr/>
+          <p:nvPr/>
+        </p:nvSpPr>
+        <p:spPr>
+          <a:xfrm>
+            <a:off x="2699461" y="6245352"/>
+            <a:ext cx="128016" cy="128016"/>
+          </a:xfrm>
+          <a:prstGeom prst="ellipse">
+            <a:avLst/>
+          </a:prstGeom>
+          <a:solidFill>
+            <a:srgbClr val="27E881"/>
+          </a:solidFill>
+          <a:ln w="12700">
+            <a:solidFill>
+              <a:srgbClr val="27E881"/>
+            </a:solidFill>
+            <a:prstDash val="solid"/>
+          </a:ln>
+        </p:spPr>
+      </p:sp>
+      <p:sp>
+        <p:nvSpPr>
+          <p:cNvPr id="5" name="Shape 3"/>
+          <p:cNvSpPr/>
+          <p:nvPr/>
+        </p:nvSpPr>
+        <p:spPr>
+          <a:xfrm>
+            <a:off x="4365650" y="6245352"/>
+            <a:ext cx="128016" cy="128016"/>
+          </a:xfrm>
+          <a:prstGeom prst="ellipse">
+            <a:avLst/>
+          </a:prstGeom>
+          <a:solidFill>
+            <a:srgbClr val="0F1412"/>
+          </a:solidFill>
+          <a:ln w="12700">
+            <a:solidFill>
+              <a:srgbClr val="27E881"/>
+            </a:solidFill>
+            <a:prstDash val="solid"/>
+          </a:ln>
+        </p:spPr>
+      </p:sp>
+      <p:sp>
+        <p:nvSpPr>
+          <p:cNvPr id="6" name="Shape 4"/>
+          <p:cNvSpPr/>
+          <p:nvPr/>
+        </p:nvSpPr>
+        <p:spPr>
+          <a:xfrm>
+            <a:off x="6031840" y="6245352"/>
+            <a:ext cx="128016" cy="128016"/>
+          </a:xfrm>
+          <a:prstGeom prst="ellipse">
+            <a:avLst/>
+          </a:prstGeom>
+          <a:solidFill>
+            <a:srgbClr val="27E881"/>
+          </a:solidFill>
+          <a:ln w="12700">
+            <a:solidFill>
+              <a:srgbClr val="27E881"/>
+            </a:solidFill>
+            <a:prstDash val="solid"/>
+          </a:ln>
+        </p:spPr>
+      </p:sp>
+      <p:sp>
+        <p:nvSpPr>
+          <p:cNvPr id="7" name="Shape 5"/>
+          <p:cNvSpPr/>
+          <p:nvPr/>
+        </p:nvSpPr>
+        <p:spPr>
+          <a:xfrm>
+            <a:off x="7698029" y="6245352"/>
+            <a:ext cx="128016" cy="128016"/>
+          </a:xfrm>
+          <a:prstGeom prst="ellipse">
+            <a:avLst/>
+          </a:prstGeom>
+          <a:solidFill>
+            <a:srgbClr val="0F1412"/>
+          </a:solidFill>
+          <a:ln w="12700">
+            <a:solidFill>
+              <a:srgbClr val="27E881"/>
+            </a:solidFill>
+            <a:prstDash val="solid"/>
+          </a:ln>
+        </p:spPr>
+      </p:sp>
+      <p:sp>
+        <p:nvSpPr>
+          <p:cNvPr id="8" name="Shape 6"/>
+          <p:cNvSpPr/>
+          <p:nvPr/>
+        </p:nvSpPr>
+        <p:spPr>
+          <a:xfrm>
+            <a:off x="9364218" y="6245352"/>
+            <a:ext cx="128016" cy="128016"/>
+          </a:xfrm>
+          <a:prstGeom prst="ellipse">
+            <a:avLst/>
+          </a:prstGeom>
+          <a:solidFill>
+            <a:srgbClr val="27E881"/>
+          </a:solidFill>
+          <a:ln w="12700">
+            <a:solidFill>
+              <a:srgbClr val="27E881"/>
+            </a:solidFill>
+            <a:prstDash val="solid"/>
+          </a:ln>
+        </p:spPr>
+      </p:sp>
+      <p:sp>
+        <p:nvSpPr>
+          <p:cNvPr id="9" name="Shape 7"/>
+          <p:cNvSpPr/>
+          <p:nvPr/>
+        </p:nvSpPr>
+        <p:spPr>
+          <a:xfrm>
+            <a:off x="11030407" y="6245352"/>
+            <a:ext cx="128016" cy="128016"/>
+          </a:xfrm>
+          <a:prstGeom prst="ellipse">
+            <a:avLst/>
+          </a:prstGeom>
+          <a:solidFill>
+            <a:srgbClr val="0F1412"/>
+          </a:solidFill>
+          <a:ln w="12700">
+            <a:solidFill>
+              <a:srgbClr val="27E881"/>
+            </a:solidFill>
+            <a:prstDash val="solid"/>
+          </a:ln>
+        </p:spPr>
+      </p:sp>
+      <p:sp>
+        <p:nvSpPr>
+          <p:cNvPr id="10" name="Text 8"/>
+          <p:cNvSpPr/>
+          <p:nvPr/>
+        </p:nvSpPr>
+        <p:spPr>
+          <a:xfrm>
+            <a:off x="777240" y="731520"/>
+            <a:ext cx="914400" cy="640080"/>
+          </a:xfrm>
+          <a:prstGeom prst="rect">
+            <a:avLst/>
+          </a:prstGeom>
+          <a:noFill/>
+          <a:ln/>
+        </p:spPr>
+        <p:txBody>
+          <a:bodyPr wrap="square" lIns="0" tIns="0" rIns="0" bIns="0" rtlCol="0" anchor="ctr"/>
           <a:lstStyle/>
           <a:p>
             <a:pPr indent="0" marL="0">
               <a:buNone/>
             </a:pPr>
             <a:r>
-              <a:rPr lang="en-US" sz="2800" b="1" dirty="0">
+              <a:rPr lang="en-US" sz="3000" b="1" dirty="0">
                 <a:solidFill>
-                  <a:srgbClr val="10281E"/>
+                  <a:srgbClr val="27E881"/>
                 </a:solidFill>
-                <a:latin typeface="Times New Roman" pitchFamily="34" charset="0"/>
-                <a:ea typeface="Times New Roman" pitchFamily="34" charset="-122"/>
-                <a:cs typeface="Times New Roman" pitchFamily="34" charset="-120"/>
+                <a:latin typeface="Calibri" pitchFamily="34" charset="0"/>
+                <a:ea typeface="Calibri" pitchFamily="34" charset="-122"/>
+                <a:cs typeface="Calibri" pitchFamily="34" charset="-120"/>
               </a:rPr>
-              <a:t>Hardest Part — one Flask app, two front doors</a:t>
-            </a:r>
-            <a:endParaRPr lang="en-US" sz="2800" dirty="0"/>
-          </a:p>
-        </p:txBody>
-      </p:sp>
-      <p:sp>
-        <p:nvSpPr>
-          <p:cNvPr id="3" name="Shape 1"/>
-          <p:cNvSpPr/>
-          <p:nvPr/>
-        </p:nvSpPr>
-        <p:spPr>
-          <a:xfrm>
-            <a:off x="640080" y="1874520"/>
-            <a:ext cx="4937760" cy="4160520"/>
+              <a:t>03</a:t>
+            </a:r>
+            <a:endParaRPr lang="en-US" sz="3000" dirty="0"/>
+          </a:p>
+        </p:txBody>
+      </p:sp>
+      <p:sp>
+        <p:nvSpPr>
+          <p:cNvPr id="11" name="Text 9"/>
+          <p:cNvSpPr/>
+          <p:nvPr/>
+        </p:nvSpPr>
+        <p:spPr>
+          <a:xfrm>
+            <a:off x="1645920" y="905256"/>
+            <a:ext cx="9768535" cy="274320"/>
+          </a:xfrm>
+          <a:prstGeom prst="rect">
+            <a:avLst/>
+          </a:prstGeom>
+          <a:noFill/>
+          <a:ln/>
+        </p:spPr>
+        <p:txBody>
+          <a:bodyPr wrap="square" lIns="0" tIns="0" rIns="0" bIns="0" rtlCol="0" anchor="ctr"/>
+          <a:lstStyle/>
+          <a:p>
+            <a:pPr indent="0" marL="0">
+              <a:buNone/>
+            </a:pPr>
+            <a:r>
+              <a:rPr lang="en-US" sz="1100" b="1" spc="200" kern="0" dirty="0">
+                <a:solidFill>
+                  <a:srgbClr val="8B98A6"/>
+                </a:solidFill>
+                <a:latin typeface="Calibri" pitchFamily="34" charset="0"/>
+                <a:ea typeface="Calibri" pitchFamily="34" charset="-122"/>
+                <a:cs typeface="Calibri" pitchFamily="34" charset="-120"/>
+              </a:rPr>
+              <a:t>CHALLENGE</a:t>
+            </a:r>
+            <a:endParaRPr lang="en-US" sz="1100" dirty="0"/>
+          </a:p>
+        </p:txBody>
+      </p:sp>
+      <p:sp>
+        <p:nvSpPr>
+          <p:cNvPr id="12" name="Text 10"/>
+          <p:cNvSpPr/>
+          <p:nvPr/>
+        </p:nvSpPr>
+        <p:spPr>
+          <a:xfrm>
+            <a:off x="777240" y="1380744"/>
+            <a:ext cx="10637215" cy="640080"/>
+          </a:xfrm>
+          <a:prstGeom prst="rect">
+            <a:avLst/>
+          </a:prstGeom>
+          <a:noFill/>
+          <a:ln/>
+        </p:spPr>
+        <p:txBody>
+          <a:bodyPr wrap="square" lIns="0" tIns="0" rIns="0" bIns="0" rtlCol="0" anchor="ctr"/>
+          <a:lstStyle/>
+          <a:p>
+            <a:pPr indent="0" marL="0">
+              <a:buNone/>
+            </a:pPr>
+            <a:r>
+              <a:rPr lang="en-US" sz="2300" b="1" dirty="0">
+                <a:solidFill>
+                  <a:srgbClr val="EAF3EE"/>
+                </a:solidFill>
+                <a:latin typeface="Calibri" pitchFamily="34" charset="0"/>
+                <a:ea typeface="Calibri" pitchFamily="34" charset="-122"/>
+                <a:cs typeface="Calibri" pitchFamily="34" charset="-120"/>
+              </a:rPr>
+              <a:t>one Flask app, two front doors</a:t>
+            </a:r>
+            <a:endParaRPr lang="en-US" sz="2300" dirty="0"/>
+          </a:p>
+        </p:txBody>
+      </p:sp>
+      <p:sp>
+        <p:nvSpPr>
+          <p:cNvPr id="13" name="Shape 11"/>
+          <p:cNvSpPr/>
+          <p:nvPr/>
+        </p:nvSpPr>
+        <p:spPr>
+          <a:xfrm>
+            <a:off x="777240" y="2423160"/>
+            <a:ext cx="5090008" cy="3291840"/>
           </a:xfrm>
           <a:prstGeom prst="roundRect">
             <a:avLst>
-              <a:gd name="adj" fmla="val 2198"/>
+              <a:gd name="adj" fmla="val 1111"/>
             </a:avLst>
           </a:prstGeom>
           <a:solidFill>
-            <a:srgbClr val="EDF6F0"/>
-          </a:solidFill>
-          <a:ln w="19050">
+            <a:srgbClr val="1B221E"/>
+          </a:solidFill>
+          <a:ln w="12700">
             <a:solidFill>
-              <a:srgbClr val="E3A83C"/>
+              <a:srgbClr val="2F3632"/>
             </a:solidFill>
             <a:prstDash val="solid"/>
           </a:ln>
@@ -3262,14 +4004,14 @@
       </p:sp>
       <p:sp>
         <p:nvSpPr>
-          <p:cNvPr id="4" name="Text 2"/>
-          <p:cNvSpPr/>
-          <p:nvPr/>
-        </p:nvSpPr>
-        <p:spPr>
-          <a:xfrm>
-            <a:off x="960120" y="2103120"/>
-            <a:ext cx="3657600" cy="457200"/>
+          <p:cNvPr id="14" name="Text 12"/>
+          <p:cNvSpPr/>
+          <p:nvPr/>
+        </p:nvSpPr>
+        <p:spPr>
+          <a:xfrm>
+            <a:off x="1097280" y="2697480"/>
+            <a:ext cx="4449928" cy="320040"/>
           </a:xfrm>
           <a:prstGeom prst="rect">
             <a:avLst/>
@@ -3285,51 +4027,74 @@
               <a:buNone/>
             </a:pPr>
             <a:r>
-              <a:rPr lang="en-US" sz="1900" b="1" dirty="0">
+              <a:rPr lang="en-US" sz="1200" b="1" spc="200" kern="0" dirty="0">
                 <a:solidFill>
-                  <a:srgbClr val="E3A83C"/>
+                  <a:srgbClr val="D1584E"/>
                 </a:solidFill>
-                <a:latin typeface="Times New Roman" pitchFamily="34" charset="0"/>
-                <a:ea typeface="Times New Roman" pitchFamily="34" charset="-122"/>
-                <a:cs typeface="Times New Roman" pitchFamily="34" charset="-120"/>
+                <a:latin typeface="Calibri" pitchFamily="34" charset="0"/>
+                <a:ea typeface="Calibri" pitchFamily="34" charset="-122"/>
+                <a:cs typeface="Calibri" pitchFamily="34" charset="-120"/>
               </a:rPr>
-              <a:t>Problem</a:t>
-            </a:r>
-            <a:endParaRPr lang="en-US" sz="1900" dirty="0"/>
-          </a:p>
-        </p:txBody>
-      </p:sp>
-      <p:sp>
-        <p:nvSpPr>
-          <p:cNvPr id="5" name="Text 3"/>
-          <p:cNvSpPr/>
-          <p:nvPr/>
-        </p:nvSpPr>
-        <p:spPr>
-          <a:xfrm>
-            <a:off x="960120" y="2651760"/>
-            <a:ext cx="4343400" cy="3200400"/>
-          </a:xfrm>
-          <a:prstGeom prst="rect">
-            <a:avLst/>
-          </a:prstGeom>
-          <a:noFill/>
-          <a:ln/>
-        </p:spPr>
-        <p:txBody>
-          <a:bodyPr wrap="square" lIns="0" tIns="0" rIns="0" bIns="0" rtlCol="0" anchor="ctr"/>
+              <a:t>PROBLEM</a:t>
+            </a:r>
+            <a:endParaRPr lang="en-US" sz="1200" dirty="0"/>
+          </a:p>
+        </p:txBody>
+      </p:sp>
+      <p:sp>
+        <p:nvSpPr>
+          <p:cNvPr id="15" name="Shape 13"/>
+          <p:cNvSpPr/>
+          <p:nvPr/>
+        </p:nvSpPr>
+        <p:spPr>
+          <a:xfrm>
+            <a:off x="1097280" y="3081528"/>
+            <a:ext cx="4449928" cy="0"/>
+          </a:xfrm>
+          <a:prstGeom prst="line">
+            <a:avLst/>
+          </a:prstGeom>
+          <a:noFill/>
+          <a:ln w="19050">
+            <a:solidFill>
+              <a:srgbClr val="D1584E"/>
+            </a:solidFill>
+            <a:prstDash val="solid"/>
+          </a:ln>
+        </p:spPr>
+      </p:sp>
+      <p:sp>
+        <p:nvSpPr>
+          <p:cNvPr id="16" name="Text 14"/>
+          <p:cNvSpPr/>
+          <p:nvPr/>
+        </p:nvSpPr>
+        <p:spPr>
+          <a:xfrm>
+            <a:off x="1097280" y="3246120"/>
+            <a:ext cx="4449928" cy="2286000"/>
+          </a:xfrm>
+          <a:prstGeom prst="rect">
+            <a:avLst/>
+          </a:prstGeom>
+          <a:noFill/>
+          <a:ln/>
+        </p:spPr>
+        <p:txBody>
+          <a:bodyPr wrap="square" lIns="0" tIns="0" rIns="0" bIns="0" rtlCol="0" anchor="t"/>
           <a:lstStyle/>
           <a:p>
             <a:pPr indent="0" marL="0">
               <a:lnSpc>
-                <a:spcPct val="112000"/>
+                <a:spcPct val="128000"/>
               </a:lnSpc>
               <a:buNone/>
             </a:pPr>
             <a:r>
               <a:rPr lang="en-US" sz="1350" dirty="0">
                 <a:solidFill>
-                  <a:srgbClr val="10281E"/>
+                  <a:srgbClr val="EAF3EE"/>
                 </a:solidFill>
                 <a:latin typeface="Calibri" pitchFamily="34" charset="0"/>
                 <a:ea typeface="Calibri" pitchFamily="34" charset="-122"/>
@@ -3343,26 +4108,26 @@
       </p:sp>
       <p:sp>
         <p:nvSpPr>
-          <p:cNvPr id="6" name="Shape 4"/>
-          <p:cNvSpPr/>
-          <p:nvPr/>
-        </p:nvSpPr>
-        <p:spPr>
-          <a:xfrm>
-            <a:off x="6611112" y="1874520"/>
-            <a:ext cx="4937760" cy="4160520"/>
+          <p:cNvPr id="17" name="Shape 15"/>
+          <p:cNvSpPr/>
+          <p:nvPr/>
+        </p:nvSpPr>
+        <p:spPr>
+          <a:xfrm>
+            <a:off x="6324448" y="2423160"/>
+            <a:ext cx="5090008" cy="3291840"/>
           </a:xfrm>
           <a:prstGeom prst="roundRect">
             <a:avLst>
-              <a:gd name="adj" fmla="val 2198"/>
+              <a:gd name="adj" fmla="val 1111"/>
             </a:avLst>
           </a:prstGeom>
           <a:solidFill>
-            <a:srgbClr val="EDF6F0"/>
-          </a:solidFill>
-          <a:ln w="19050">
+            <a:srgbClr val="1B221E"/>
+          </a:solidFill>
+          <a:ln w="12700">
             <a:solidFill>
-              <a:srgbClr val="1E9450"/>
+              <a:srgbClr val="2F3632"/>
             </a:solidFill>
             <a:prstDash val="solid"/>
           </a:ln>
@@ -3370,14 +4135,14 @@
       </p:sp>
       <p:sp>
         <p:nvSpPr>
-          <p:cNvPr id="7" name="Text 5"/>
-          <p:cNvSpPr/>
-          <p:nvPr/>
-        </p:nvSpPr>
-        <p:spPr>
-          <a:xfrm>
-            <a:off x="6931152" y="2103120"/>
-            <a:ext cx="3657600" cy="457200"/>
+          <p:cNvPr id="18" name="Text 16"/>
+          <p:cNvSpPr/>
+          <p:nvPr/>
+        </p:nvSpPr>
+        <p:spPr>
+          <a:xfrm>
+            <a:off x="6644488" y="2697480"/>
+            <a:ext cx="4449928" cy="320040"/>
           </a:xfrm>
           <a:prstGeom prst="rect">
             <a:avLst/>
@@ -3393,51 +4158,74 @@
               <a:buNone/>
             </a:pPr>
             <a:r>
-              <a:rPr lang="en-US" sz="1900" b="1" dirty="0">
+              <a:rPr lang="en-US" sz="1200" b="1" spc="200" kern="0" dirty="0">
                 <a:solidFill>
-                  <a:srgbClr val="1E9450"/>
+                  <a:srgbClr val="3FAE82"/>
                 </a:solidFill>
-                <a:latin typeface="Times New Roman" pitchFamily="34" charset="0"/>
-                <a:ea typeface="Times New Roman" pitchFamily="34" charset="-122"/>
-                <a:cs typeface="Times New Roman" pitchFamily="34" charset="-120"/>
+                <a:latin typeface="Calibri" pitchFamily="34" charset="0"/>
+                <a:ea typeface="Calibri" pitchFamily="34" charset="-122"/>
+                <a:cs typeface="Calibri" pitchFamily="34" charset="-120"/>
               </a:rPr>
-              <a:t>Solution</a:t>
-            </a:r>
-            <a:endParaRPr lang="en-US" sz="1900" dirty="0"/>
-          </a:p>
-        </p:txBody>
-      </p:sp>
-      <p:sp>
-        <p:nvSpPr>
-          <p:cNvPr id="8" name="Text 6"/>
-          <p:cNvSpPr/>
-          <p:nvPr/>
-        </p:nvSpPr>
-        <p:spPr>
-          <a:xfrm>
-            <a:off x="6931152" y="2651760"/>
-            <a:ext cx="4343400" cy="3200400"/>
-          </a:xfrm>
-          <a:prstGeom prst="rect">
-            <a:avLst/>
-          </a:prstGeom>
-          <a:noFill/>
-          <a:ln/>
-        </p:spPr>
-        <p:txBody>
-          <a:bodyPr wrap="square" lIns="0" tIns="0" rIns="0" bIns="0" rtlCol="0" anchor="ctr"/>
+              <a:t>SOLUTION</a:t>
+            </a:r>
+            <a:endParaRPr lang="en-US" sz="1200" dirty="0"/>
+          </a:p>
+        </p:txBody>
+      </p:sp>
+      <p:sp>
+        <p:nvSpPr>
+          <p:cNvPr id="19" name="Shape 17"/>
+          <p:cNvSpPr/>
+          <p:nvPr/>
+        </p:nvSpPr>
+        <p:spPr>
+          <a:xfrm>
+            <a:off x="6644488" y="3081528"/>
+            <a:ext cx="4449928" cy="0"/>
+          </a:xfrm>
+          <a:prstGeom prst="line">
+            <a:avLst/>
+          </a:prstGeom>
+          <a:noFill/>
+          <a:ln w="19050">
+            <a:solidFill>
+              <a:srgbClr val="3FAE82"/>
+            </a:solidFill>
+            <a:prstDash val="solid"/>
+          </a:ln>
+        </p:spPr>
+      </p:sp>
+      <p:sp>
+        <p:nvSpPr>
+          <p:cNvPr id="20" name="Text 18"/>
+          <p:cNvSpPr/>
+          <p:nvPr/>
+        </p:nvSpPr>
+        <p:spPr>
+          <a:xfrm>
+            <a:off x="6644488" y="3246120"/>
+            <a:ext cx="4449928" cy="2286000"/>
+          </a:xfrm>
+          <a:prstGeom prst="rect">
+            <a:avLst/>
+          </a:prstGeom>
+          <a:noFill/>
+          <a:ln/>
+        </p:spPr>
+        <p:txBody>
+          <a:bodyPr wrap="square" lIns="0" tIns="0" rIns="0" bIns="0" rtlCol="0" anchor="t"/>
           <a:lstStyle/>
           <a:p>
             <a:pPr indent="0" marL="0">
               <a:lnSpc>
-                <a:spcPct val="112000"/>
+                <a:spcPct val="128000"/>
               </a:lnSpc>
               <a:buNone/>
             </a:pPr>
             <a:r>
               <a:rPr lang="en-US" sz="1350" dirty="0">
                 <a:solidFill>
-                  <a:srgbClr val="10281E"/>
+                  <a:srgbClr val="EAF3EE"/>
                 </a:solidFill>
                 <a:latin typeface="Calibri" pitchFamily="34" charset="0"/>
                 <a:ea typeface="Calibri" pitchFamily="34" charset="-122"/>
@@ -3448,26 +4236,6 @@
             <a:endParaRPr lang="en-US" sz="1350" dirty="0"/>
           </a:p>
         </p:txBody>
-      </p:sp>
-      <p:sp>
-        <p:nvSpPr>
-          <p:cNvPr id="9" name="Shape 7"/>
-          <p:cNvSpPr/>
-          <p:nvPr/>
-        </p:nvSpPr>
-        <p:spPr>
-          <a:xfrm>
-            <a:off x="5669280" y="3703320"/>
-            <a:ext cx="841248" cy="512064"/>
-          </a:xfrm>
-          <a:prstGeom prst="rightArrow">
-            <a:avLst/>
-          </a:prstGeom>
-          <a:solidFill>
-            <a:srgbClr val="12703C"/>
-          </a:solidFill>
-          <a:ln/>
-        </p:spPr>
       </p:sp>
     </p:spTree>
   </p:cSld>
